--- a/Credit_Risk_Scoring_Presentation.pptx
+++ b/Credit_Risk_Scoring_Presentation.pptx
@@ -3150,8 +3150,8 @@
         </p:nvSpPr>
         <p:spPr>
           <a:xfrm>
-            <a:off x="914400" y="914400"/>
-            <a:ext cx="10362895" cy="5029200"/>
+            <a:off x="731520" y="731520"/>
+            <a:ext cx="10728655" cy="5394960"/>
           </a:xfrm>
           <a:prstGeom prst="roundRect">
             <a:avLst/>
@@ -3159,9 +3159,9 @@
           <a:solidFill>
             <a:srgbClr val="101828"/>
           </a:solidFill>
-          <a:ln w="15240">
+          <a:ln w="17780">
             <a:solidFill>
-              <a:srgbClr val="263452"/>
+              <a:srgbClr val="334155"/>
             </a:solidFill>
           </a:ln>
         </p:spPr>
@@ -3195,8 +3195,8 @@
         </p:nvSpPr>
         <p:spPr>
           <a:xfrm>
-            <a:off x="1371600" y="1371600"/>
-            <a:ext cx="9418320" cy="457200"/>
+            <a:off x="1280160" y="1188720"/>
+            <a:ext cx="9601200" cy="365760"/>
           </a:xfrm>
           <a:prstGeom prst="rect">
             <a:avLst/>
@@ -3214,6 +3214,7 @@
                 <a:solidFill>
                   <a:srgbClr val="38BDF8"/>
                 </a:solidFill>
+                <a:latin typeface="Segoe UI"/>
               </a:defRPr>
             </a:pPr>
             <a:r>
@@ -3230,8 +3231,8 @@
         </p:nvSpPr>
         <p:spPr>
           <a:xfrm>
-            <a:off x="1371600" y="1828800"/>
-            <a:ext cx="9418320" cy="1645920"/>
+            <a:off x="1280160" y="1645920"/>
+            <a:ext cx="9601200" cy="1645920"/>
           </a:xfrm>
           <a:prstGeom prst="rect">
             <a:avLst/>
@@ -3247,8 +3248,9 @@
             <a:pPr>
               <a:defRPr sz="3600" b="1">
                 <a:solidFill>
-                  <a:srgbClr val="F8FAFC"/>
-                </a:solidFill>
+                  <a:srgbClr val="FFFFFF"/>
+                </a:solidFill>
+                <a:latin typeface="Segoe UI"/>
               </a:defRPr>
             </a:pPr>
             <a:r>
@@ -3269,8 +3271,8 @@
         </p:nvSpPr>
         <p:spPr>
           <a:xfrm>
-            <a:off x="1371600" y="3566160"/>
-            <a:ext cx="9418320" cy="731520"/>
+            <a:off x="1280160" y="3383280"/>
+            <a:ext cx="9601200" cy="822960"/>
           </a:xfrm>
           <a:prstGeom prst="rect">
             <a:avLst/>
@@ -3286,8 +3288,9 @@
             <a:pPr>
               <a:defRPr sz="1500">
                 <a:solidFill>
-                  <a:srgbClr val="94A3B8"/>
-                </a:solidFill>
+                  <a:srgbClr val="E2E8F0"/>
+                </a:solidFill>
+                <a:latin typeface="Segoe UI"/>
               </a:defRPr>
             </a:pPr>
             <a:r>
@@ -3308,8 +3311,8 @@
         </p:nvSpPr>
         <p:spPr>
           <a:xfrm>
-            <a:off x="1371600" y="4480560"/>
-            <a:ext cx="9418320" cy="1097280"/>
+            <a:off x="1280160" y="4389120"/>
+            <a:ext cx="9601200" cy="1280160"/>
           </a:xfrm>
           <a:prstGeom prst="rect">
             <a:avLst/>
@@ -3323,10 +3326,11 @@
           <a:lstStyle/>
           <a:p>
             <a:pPr>
-              <a:defRPr sz="1800" b="1">
-                <a:solidFill>
-                  <a:srgbClr val="F8FAFC"/>
-                </a:solidFill>
+              <a:defRPr sz="2000" b="1">
+                <a:solidFill>
+                  <a:srgbClr val="FFFFFF"/>
+                </a:solidFill>
+                <a:latin typeface="Segoe UI"/>
               </a:defRPr>
             </a:pPr>
             <a:r>
@@ -3335,14 +3339,28 @@
           </a:p>
           <a:p>
             <a:pPr>
-              <a:defRPr sz="1300">
+              <a:defRPr sz="1300" b="1">
                 <a:solidFill>
                   <a:srgbClr val="38BDF8"/>
                 </a:solidFill>
+                <a:latin typeface="Segoe UI"/>
               </a:defRPr>
             </a:pPr>
             <a:r>
-              <a:t>Senior Data Scientist &amp; MLOps Engineer  |  GitHub: @GuillenConcepcion  |  LinkedIn: in/guillen-concepcion</a:t>
+              <a:t>Senior Data Scientist &amp; MLOps Engineer</a:t>
+            </a:r>
+          </a:p>
+          <a:p>
+            <a:pPr>
+              <a:defRPr sz="1150">
+                <a:solidFill>
+                  <a:srgbClr val="94A3B8"/>
+                </a:solidFill>
+                <a:latin typeface="Segoe UI"/>
+              </a:defRPr>
+            </a:pPr>
+            <a:r>
+              <a:t>LinkedIn: in/guillen-concepcion  |  GitHub: @GuillenConcepcion  |  Email: guillenconcepcion@gmail.com</a:t>
             </a:r>
           </a:p>
         </p:txBody>
@@ -3417,7 +3435,7 @@
         <p:spPr>
           <a:xfrm>
             <a:off x="731520" y="365760"/>
-            <a:ext cx="10698480" cy="320040"/>
+            <a:ext cx="10698480" cy="292608"/>
           </a:xfrm>
           <a:prstGeom prst="rect">
             <a:avLst/>
@@ -3435,7 +3453,7 @@
                 <a:solidFill>
                   <a:srgbClr val="38BDF8"/>
                 </a:solidFill>
-                <a:latin typeface="Arial"/>
+                <a:latin typeface="Segoe UI"/>
               </a:defRPr>
             </a:pPr>
             <a:r>
@@ -3452,8 +3470,8 @@
         </p:nvSpPr>
         <p:spPr>
           <a:xfrm>
-            <a:off x="731520" y="640080"/>
-            <a:ext cx="10698480" cy="731520"/>
+            <a:off x="731520" y="658368"/>
+            <a:ext cx="10698480" cy="594360"/>
           </a:xfrm>
           <a:prstGeom prst="rect">
             <a:avLst/>
@@ -3467,11 +3485,11 @@
           <a:lstStyle/>
           <a:p>
             <a:pPr>
-              <a:defRPr sz="2400" b="1">
-                <a:solidFill>
-                  <a:srgbClr val="F8FAFC"/>
-                </a:solidFill>
-                <a:latin typeface="Arial"/>
+              <a:defRPr sz="2300" b="1">
+                <a:solidFill>
+                  <a:srgbClr val="FFFFFF"/>
+                </a:solidFill>
+                <a:latin typeface="Segoe UI"/>
               </a:defRPr>
             </a:pPr>
             <a:r>
@@ -3488,8 +3506,8 @@
         </p:nvSpPr>
         <p:spPr>
           <a:xfrm>
-            <a:off x="731520" y="1463040"/>
-            <a:ext cx="5120640" cy="4754880"/>
+            <a:off x="731520" y="1371600"/>
+            <a:ext cx="5303520" cy="5029200"/>
           </a:xfrm>
           <a:prstGeom prst="roundRect">
             <a:avLst/>
@@ -3497,9 +3515,9 @@
           <a:solidFill>
             <a:srgbClr val="162035"/>
           </a:solidFill>
-          <a:ln w="15240">
+          <a:ln w="17780">
             <a:solidFill>
-              <a:srgbClr val="263452"/>
+              <a:srgbClr val="334155"/>
             </a:solidFill>
           </a:ln>
         </p:spPr>
@@ -3533,8 +3551,8 @@
         </p:nvSpPr>
         <p:spPr>
           <a:xfrm>
-            <a:off x="914400" y="1645920"/>
-            <a:ext cx="4754880" cy="4389120"/>
+            <a:off x="914400" y="1554480"/>
+            <a:ext cx="4937760" cy="4663440"/>
           </a:xfrm>
           <a:prstGeom prst="rect">
             <a:avLst/>
@@ -3548,71 +3566,244 @@
           <a:lstStyle/>
           <a:p>
             <a:pPr>
-              <a:defRPr sz="1800" b="1">
+              <a:spcAft>
+                <a:spcPts val="1000"/>
+              </a:spcAft>
+              <a:defRPr sz="1700" b="1">
                 <a:solidFill>
                   <a:srgbClr val="38BDF8"/>
                 </a:solidFill>
+                <a:latin typeface="Segoe UI"/>
               </a:defRPr>
             </a:pPr>
             <a:r>
-              <a:t>Arquitectura de la Aplicación Web</a:t>
-            </a:r>
-          </a:p>
-          <a:p>
-            <a:br/>
-            <a:pPr>
-              <a:defRPr sz="1300">
-                <a:solidFill>
-                  <a:srgbClr val="F8FAFC"/>
-                </a:solidFill>
-              </a:defRPr>
-            </a:pPr>
-            <a:r>
-              <a:t>• Stack Tecnológico Cloud-Native:</a:t>
-            </a:r>
-            <a:br/>
-            <a:r>
-              <a:t>   - Backend: FastAPI asíncrono con servidor Uvicorn.</a:t>
-            </a:r>
-            <a:br/>
-            <a:r>
-              <a:t>   - Frontend: Vanilla HTML5 semántico + CSS Moderno.</a:t>
-            </a:r>
-            <a:br/>
-            <a:r>
-              <a:t>   - Gráficos: Chart.js responsivo con paleta Dark Mode.</a:t>
-            </a:r>
-            <a:br/>
-            <a:br/>
-            <a:r>
-              <a:t>• Módulos Principales:</a:t>
-            </a:r>
-            <a:br/>
-            <a:r>
-              <a:t>   1. Simulador de Scoring: Gauge radial reactivo FICO 300-850.</a:t>
-            </a:r>
-            <a:br/>
-            <a:r>
-              <a:t>   2. Visión Ejecutiva: KPIs globales y tablas de particiones.</a:t>
-            </a:r>
-            <a:br/>
-            <a:r>
-              <a:t>   3. Discriminación: Distribuciones interactivas y Chi-cuadrado.</a:t>
-            </a:r>
-            <a:br/>
-            <a:r>
-              <a:t>   4. Monitor de Estabilidad: Evolución del PSI 2013-2021.</a:t>
-            </a:r>
-            <a:br/>
-            <a:r>
-              <a:t>   5. Pipeline de Selección: Detalle de las 4 reglas estadísticas.</a:t>
-            </a:r>
-            <a:br/>
-            <a:br/>
-            <a:r>
-              <a:t>Acceso Local: http://localhost:8088  |  API Docs: /docs</a:t>
-            </a:r>
-            <a:br/>
+              <a:t>Arquitectura y Componentes de la Plataforma</a:t>
+            </a:r>
+          </a:p>
+          <a:p>
+            <a:pPr>
+              <a:spcAft>
+                <a:spcPts val="600"/>
+              </a:spcAft>
+            </a:pPr>
+            <a:r>
+              <a:rPr b="1" sz="1200">
+                <a:solidFill>
+                  <a:srgbClr val="34D399"/>
+                </a:solidFill>
+                <a:latin typeface="Segoe UI"/>
+              </a:rPr>
+              <a:t>Backend de Inferencia: </a:t>
+            </a:r>
+            <a:r>
+              <a:rPr b="0" sz="1200">
+                <a:solidFill>
+                  <a:srgbClr val="E2E8F0"/>
+                </a:solidFill>
+                <a:latin typeface="Segoe UI"/>
+              </a:rPr>
+              <a:t>FastAPI asíncrono sobre servidor Uvicorn.</a:t>
+            </a:r>
+          </a:p>
+          <a:p>
+            <a:pPr>
+              <a:spcAft>
+                <a:spcPts val="600"/>
+              </a:spcAft>
+            </a:pPr>
+            <a:r>
+              <a:rPr b="1" sz="1200">
+                <a:solidFill>
+                  <a:srgbClr val="34D399"/>
+                </a:solidFill>
+                <a:latin typeface="Segoe UI"/>
+              </a:rPr>
+              <a:t>Frontend Moderno: </a:t>
+            </a:r>
+            <a:r>
+              <a:rPr b="0" sz="1200">
+                <a:solidFill>
+                  <a:srgbClr val="E2E8F0"/>
+                </a:solidFill>
+                <a:latin typeface="Segoe UI"/>
+              </a:rPr>
+              <a:t>HTML5 semántico, Vanilla CSS Dark Mode y Chart.js.</a:t>
+            </a:r>
+          </a:p>
+          <a:p>
+            <a:pPr>
+              <a:spcAft>
+                <a:spcPts val="1200"/>
+              </a:spcAft>
+            </a:pPr>
+            <a:r>
+              <a:rPr b="1" sz="1200">
+                <a:solidFill>
+                  <a:srgbClr val="38BDF8"/>
+                </a:solidFill>
+                <a:latin typeface="Segoe UI"/>
+              </a:rPr>
+              <a:t>Rendimiento: </a:t>
+            </a:r>
+            <a:r>
+              <a:rPr b="0" sz="1200">
+                <a:solidFill>
+                  <a:srgbClr val="E2E8F0"/>
+                </a:solidFill>
+                <a:latin typeface="Segoe UI"/>
+              </a:rPr>
+              <a:t>Latencia de inferencia inferior a 50 milisegundos.</a:t>
+            </a:r>
+          </a:p>
+          <a:p>
+            <a:pPr>
+              <a:spcAft>
+                <a:spcPts val="600"/>
+              </a:spcAft>
+            </a:pPr>
+            <a:r>
+              <a:rPr b="1" sz="1200">
+                <a:solidFill>
+                  <a:srgbClr val="FBBF24"/>
+                </a:solidFill>
+                <a:latin typeface="Segoe UI"/>
+              </a:rPr>
+              <a:t>5 Módulos Integrados: </a:t>
+            </a:r>
+            <a:r>
+              <a:rPr b="0" sz="1200">
+                <a:solidFill>
+                  <a:srgbClr val="E2E8F0"/>
+                </a:solidFill>
+                <a:latin typeface="Segoe UI"/>
+              </a:rPr>
+              <a:t/>
+            </a:r>
+          </a:p>
+          <a:p>
+            <a:pPr>
+              <a:spcAft>
+                <a:spcPts val="600"/>
+              </a:spcAft>
+            </a:pPr>
+            <a:r>
+              <a:rPr b="1" sz="1100">
+                <a:solidFill>
+                  <a:srgbClr val="38BDF8"/>
+                </a:solidFill>
+                <a:latin typeface="Segoe UI"/>
+              </a:rPr>
+              <a:t>1. Simulador: </a:t>
+            </a:r>
+            <a:r>
+              <a:rPr b="0" sz="1100">
+                <a:solidFill>
+                  <a:srgbClr val="E2E8F0"/>
+                </a:solidFill>
+                <a:latin typeface="Segoe UI"/>
+              </a:rPr>
+              <a:t>Cálculo en vivo de score, probabilidad de mora y dictamen.</a:t>
+            </a:r>
+          </a:p>
+          <a:p>
+            <a:pPr>
+              <a:spcAft>
+                <a:spcPts val="600"/>
+              </a:spcAft>
+            </a:pPr>
+            <a:r>
+              <a:rPr b="1" sz="1100">
+                <a:solidFill>
+                  <a:srgbClr val="38BDF8"/>
+                </a:solidFill>
+                <a:latin typeface="Segoe UI"/>
+              </a:rPr>
+              <a:t>2. Visión Ejecutiva: </a:t>
+            </a:r>
+            <a:r>
+              <a:rPr b="0" sz="1100">
+                <a:solidFill>
+                  <a:srgbClr val="E2E8F0"/>
+                </a:solidFill>
+                <a:latin typeface="Segoe UI"/>
+              </a:rPr>
+              <a:t>KPIs globales y tablas de particiones (Train/Test/OOT).</a:t>
+            </a:r>
+          </a:p>
+          <a:p>
+            <a:pPr>
+              <a:spcAft>
+                <a:spcPts val="600"/>
+              </a:spcAft>
+            </a:pPr>
+            <a:r>
+              <a:rPr b="1" sz="1100">
+                <a:solidFill>
+                  <a:srgbClr val="38BDF8"/>
+                </a:solidFill>
+                <a:latin typeface="Segoe UI"/>
+              </a:rPr>
+              <a:t>3. Discriminación: </a:t>
+            </a:r>
+            <a:r>
+              <a:rPr b="0" sz="1100">
+                <a:solidFill>
+                  <a:srgbClr val="E2E8F0"/>
+                </a:solidFill>
+                <a:latin typeface="Segoe UI"/>
+              </a:rPr>
+              <a:t>Storytelling de tenencia de vivienda y grados de préstamo.</a:t>
+            </a:r>
+          </a:p>
+          <a:p>
+            <a:pPr>
+              <a:spcAft>
+                <a:spcPts val="600"/>
+              </a:spcAft>
+            </a:pPr>
+            <a:r>
+              <a:rPr b="1" sz="1100">
+                <a:solidFill>
+                  <a:srgbClr val="38BDF8"/>
+                </a:solidFill>
+                <a:latin typeface="Segoe UI"/>
+              </a:rPr>
+              <a:t>4. Monitor PSI: </a:t>
+            </a:r>
+            <a:r>
+              <a:rPr b="0" sz="1100">
+                <a:solidFill>
+                  <a:srgbClr val="E2E8F0"/>
+                </a:solidFill>
+                <a:latin typeface="Segoe UI"/>
+              </a:rPr>
+              <a:t>Matriz regulatoria de estabilidad temporal.</a:t>
+            </a:r>
+          </a:p>
+          <a:p>
+            <a:pPr>
+              <a:spcAft>
+                <a:spcPts val="600"/>
+              </a:spcAft>
+            </a:pPr>
+            <a:r>
+              <a:rPr b="1" sz="1100">
+                <a:solidFill>
+                  <a:srgbClr val="38BDF8"/>
+                </a:solidFill>
+                <a:latin typeface="Segoe UI"/>
+              </a:rPr>
+              <a:t>5. Selección: </a:t>
+            </a:r>
+            <a:r>
+              <a:rPr b="0" sz="1100">
+                <a:solidFill>
+                  <a:srgbClr val="E2E8F0"/>
+                </a:solidFill>
+                <a:latin typeface="Segoe UI"/>
+              </a:rPr>
+              <a:t>Detalle de las 4 reglas estadísticas de depuración.</a:t>
+            </a:r>
           </a:p>
         </p:txBody>
       </p:sp>
@@ -3624,8 +3815,8 @@
         </p:nvSpPr>
         <p:spPr>
           <a:xfrm>
-            <a:off x="6217920" y="1463040"/>
-            <a:ext cx="5212080" cy="4754880"/>
+            <a:off x="6309360" y="1371600"/>
+            <a:ext cx="5120640" cy="5029200"/>
           </a:xfrm>
           <a:prstGeom prst="roundRect">
             <a:avLst/>
@@ -3633,9 +3824,9 @@
           <a:solidFill>
             <a:srgbClr val="162035"/>
           </a:solidFill>
-          <a:ln w="15240">
+          <a:ln w="17780">
             <a:solidFill>
-              <a:srgbClr val="263452"/>
+              <a:srgbClr val="334155"/>
             </a:solidFill>
           </a:ln>
         </p:spPr>
@@ -3669,8 +3860,8 @@
         </p:nvSpPr>
         <p:spPr>
           <a:xfrm>
-            <a:off x="6400800" y="1645920"/>
-            <a:ext cx="4846320" cy="4389120"/>
+            <a:off x="6492240" y="1554480"/>
+            <a:ext cx="4754880" cy="4663440"/>
           </a:xfrm>
           <a:prstGeom prst="rect">
             <a:avLst/>
@@ -3684,59 +3875,194 @@
           <a:lstStyle/>
           <a:p>
             <a:pPr>
-              <a:defRPr sz="1800" b="1">
-                <a:solidFill>
-                  <a:srgbClr val="10B981"/>
-                </a:solidFill>
+              <a:spcAft>
+                <a:spcPts val="1000"/>
+              </a:spcAft>
+              <a:defRPr sz="1700" b="1">
+                <a:solidFill>
+                  <a:srgbClr val="34D399"/>
+                </a:solidFill>
+                <a:latin typeface="Segoe UI"/>
               </a:defRPr>
             </a:pPr>
             <a:r>
-              <a:t>Capacidades del Simulador de Scoring</a:t>
-            </a:r>
-          </a:p>
-          <a:p>
-            <a:br/>
-            <a:pPr>
-              <a:defRPr sz="1300">
-                <a:solidFill>
-                  <a:srgbClr val="F8FAFC"/>
-                </a:solidFill>
-              </a:defRPr>
-            </a:pPr>
-            <a:r>
-              <a:t>• Evaluación en Tiempo Real (&lt; 50 ms):</a:t>
-            </a:r>
-            <a:br/>
-            <a:r>
-              <a:t>Ajuste instantáneo mediante sliders de ingresos, DTI, tasa de interés, antigüedad laboral y buró crediticio.</a:t>
-            </a:r>
-            <a:br/>
-            <a:br/>
-            <a:r>
-              <a:t>• Perfiles de Prueba Preconfigurados:</a:t>
-            </a:r>
-            <a:br/>
-            <a:r>
-              <a:t>   - Cliente Prime (Aprobación STP automática)</a:t>
-            </a:r>
-            <a:br/>
-            <a:r>
-              <a:t>   - Riesgo Moderado (Revisión manual / ingresos)</a:t>
-            </a:r>
-            <a:br/>
-            <a:r>
-              <a:t>   - Alto Riesgo Subprime (Rechazo inmediato)</a:t>
-            </a:r>
-            <a:br/>
-            <a:br/>
-            <a:r>
-              <a:t>• Explicabilidad Fair Lending / FCRA:</a:t>
-            </a:r>
-            <a:br/>
-            <a:r>
-              <a:t>Genera un desglose tipo Waterfall con puntos positivos y negativos que determinan el score final (Reason Codes).</a:t>
-            </a:r>
-            <a:br/>
+              <a:t>Experiencia del Simulador de Scoring</a:t>
+            </a:r>
+          </a:p>
+          <a:p>
+            <a:pPr>
+              <a:spcAft>
+                <a:spcPts val="600"/>
+              </a:spcAft>
+            </a:pPr>
+            <a:r>
+              <a:rPr b="1" sz="1200">
+                <a:solidFill>
+                  <a:srgbClr val="38BDF8"/>
+                </a:solidFill>
+                <a:latin typeface="Segoe UI"/>
+              </a:rPr>
+              <a:t>Gauge Radial Reactivo: </a:t>
+            </a:r>
+            <a:r>
+              <a:rPr b="0" sz="1200">
+                <a:solidFill>
+                  <a:srgbClr val="E2E8F0"/>
+                </a:solidFill>
+                <a:latin typeface="Segoe UI"/>
+              </a:rPr>
+              <a:t>Visualización instantánea del FICO Score (300-850) con arco animado.</a:t>
+            </a:r>
+          </a:p>
+          <a:p>
+            <a:pPr>
+              <a:spcAft>
+                <a:spcPts val="600"/>
+              </a:spcAft>
+            </a:pPr>
+            <a:r>
+              <a:rPr b="1" sz="1200">
+                <a:solidFill>
+                  <a:srgbClr val="38BDF8"/>
+                </a:solidFill>
+                <a:latin typeface="Segoe UI"/>
+              </a:rPr>
+              <a:t>Perfiles Preconfigurados: </a:t>
+            </a:r>
+            <a:r>
+              <a:rPr b="0" sz="1200">
+                <a:solidFill>
+                  <a:srgbClr val="E2E8F0"/>
+                </a:solidFill>
+                <a:latin typeface="Segoe UI"/>
+              </a:rPr>
+              <a:t>Botones de prueba rápida para casos típicos de negocio:</a:t>
+            </a:r>
+          </a:p>
+          <a:p>
+            <a:pPr>
+              <a:spcAft>
+                <a:spcPts val="600"/>
+              </a:spcAft>
+            </a:pPr>
+            <a:r>
+              <a:rPr b="1" sz="1100">
+                <a:solidFill>
+                  <a:srgbClr val="38BDF8"/>
+                </a:solidFill>
+                <a:latin typeface="Segoe UI"/>
+              </a:rPr>
+              <a:t>• Cliente Prime: </a:t>
+            </a:r>
+            <a:r>
+              <a:rPr b="0" sz="1100">
+                <a:solidFill>
+                  <a:srgbClr val="E2E8F0"/>
+                </a:solidFill>
+                <a:latin typeface="Segoe UI"/>
+              </a:rPr>
+              <a:t>Score 778 | Aprobación automática STP | Tasa 7.00%.</a:t>
+            </a:r>
+          </a:p>
+          <a:p>
+            <a:pPr>
+              <a:spcAft>
+                <a:spcPts val="600"/>
+              </a:spcAft>
+            </a:pPr>
+            <a:r>
+              <a:rPr b="1" sz="1100">
+                <a:solidFill>
+                  <a:srgbClr val="38BDF8"/>
+                </a:solidFill>
+                <a:latin typeface="Segoe UI"/>
+              </a:rPr>
+              <a:t>• Riesgo Medio: </a:t>
+            </a:r>
+            <a:r>
+              <a:rPr b="0" sz="1100">
+                <a:solidFill>
+                  <a:srgbClr val="E2E8F0"/>
+                </a:solidFill>
+                <a:latin typeface="Segoe UI"/>
+              </a:rPr>
+              <a:t>Score 642 | Derivación a revisión manual de ingresos.</a:t>
+            </a:r>
+          </a:p>
+          <a:p>
+            <a:pPr>
+              <a:spcAft>
+                <a:spcPts val="1200"/>
+              </a:spcAft>
+            </a:pPr>
+            <a:r>
+              <a:rPr b="1" sz="1100">
+                <a:solidFill>
+                  <a:srgbClr val="38BDF8"/>
+                </a:solidFill>
+                <a:latin typeface="Segoe UI"/>
+              </a:rPr>
+              <a:t>• Alto Riesgo: </a:t>
+            </a:r>
+            <a:r>
+              <a:rPr b="0" sz="1100">
+                <a:solidFill>
+                  <a:srgbClr val="E2E8F0"/>
+                </a:solidFill>
+                <a:latin typeface="Segoe UI"/>
+              </a:rPr>
+              <a:t>Score 495 | Rechazo por antecedentes morosos en buró.</a:t>
+            </a:r>
+          </a:p>
+          <a:p>
+            <a:pPr>
+              <a:spcAft>
+                <a:spcPts val="600"/>
+              </a:spcAft>
+            </a:pPr>
+            <a:r>
+              <a:rPr b="1" sz="1200">
+                <a:solidFill>
+                  <a:srgbClr val="FBBF24"/>
+                </a:solidFill>
+                <a:latin typeface="Segoe UI"/>
+              </a:rPr>
+              <a:t>Explicabilidad Fair Lending: </a:t>
+            </a:r>
+            <a:r>
+              <a:rPr b="0" sz="1200">
+                <a:solidFill>
+                  <a:srgbClr val="E2E8F0"/>
+                </a:solidFill>
+                <a:latin typeface="Segoe UI"/>
+              </a:rPr>
+              <a:t>Desglose de factores Waterfall (+/- puntos de impacto).</a:t>
+            </a:r>
+          </a:p>
+          <a:p>
+            <a:pPr>
+              <a:spcAft>
+                <a:spcPts val="600"/>
+              </a:spcAft>
+            </a:pPr>
+            <a:r>
+              <a:rPr b="1" sz="1150">
+                <a:solidFill>
+                  <a:srgbClr val="38BDF8"/>
+                </a:solidFill>
+                <a:latin typeface="Segoe UI"/>
+              </a:rPr>
+              <a:t>Acceso Local: </a:t>
+            </a:r>
+            <a:r>
+              <a:rPr b="0" sz="1150">
+                <a:solidFill>
+                  <a:srgbClr val="FFFFFF"/>
+                </a:solidFill>
+                <a:latin typeface="Segoe UI"/>
+              </a:rPr>
+              <a:t>http://localhost:8088  |  Documentación OpenAPI: /docs</a:t>
+            </a:r>
           </a:p>
         </p:txBody>
       </p:sp>
@@ -3810,7 +4136,7 @@
         <p:spPr>
           <a:xfrm>
             <a:off x="731520" y="365760"/>
-            <a:ext cx="10698480" cy="320040"/>
+            <a:ext cx="10698480" cy="292608"/>
           </a:xfrm>
           <a:prstGeom prst="rect">
             <a:avLst/>
@@ -3828,7 +4154,7 @@
                 <a:solidFill>
                   <a:srgbClr val="38BDF8"/>
                 </a:solidFill>
-                <a:latin typeface="Arial"/>
+                <a:latin typeface="Segoe UI"/>
               </a:defRPr>
             </a:pPr>
             <a:r>
@@ -3845,8 +4171,8 @@
         </p:nvSpPr>
         <p:spPr>
           <a:xfrm>
-            <a:off x="731520" y="640080"/>
-            <a:ext cx="10698480" cy="731520"/>
+            <a:off x="731520" y="658368"/>
+            <a:ext cx="10698480" cy="594360"/>
           </a:xfrm>
           <a:prstGeom prst="rect">
             <a:avLst/>
@@ -3860,11 +4186,11 @@
           <a:lstStyle/>
           <a:p>
             <a:pPr>
-              <a:defRPr sz="2400" b="1">
-                <a:solidFill>
-                  <a:srgbClr val="F8FAFC"/>
-                </a:solidFill>
-                <a:latin typeface="Arial"/>
+              <a:defRPr sz="2300" b="1">
+                <a:solidFill>
+                  <a:srgbClr val="FFFFFF"/>
+                </a:solidFill>
+                <a:latin typeface="Segoe UI"/>
               </a:defRPr>
             </a:pPr>
             <a:r>
@@ -3881,8 +4207,8 @@
         </p:nvSpPr>
         <p:spPr>
           <a:xfrm>
-            <a:off x="731520" y="1463040"/>
-            <a:ext cx="3474720" cy="4754880"/>
+            <a:off x="731520" y="1371600"/>
+            <a:ext cx="3474720" cy="5029200"/>
           </a:xfrm>
           <a:prstGeom prst="roundRect">
             <a:avLst/>
@@ -3890,9 +4216,9 @@
           <a:solidFill>
             <a:srgbClr val="162035"/>
           </a:solidFill>
-          <a:ln w="15240">
+          <a:ln w="17780">
             <a:solidFill>
-              <a:srgbClr val="263452"/>
+              <a:srgbClr val="334155"/>
             </a:solidFill>
           </a:ln>
         </p:spPr>
@@ -3926,8 +4252,8 @@
         </p:nvSpPr>
         <p:spPr>
           <a:xfrm>
-            <a:off x="914400" y="1645920"/>
-            <a:ext cx="3108960" cy="4389120"/>
+            <a:off x="914400" y="1554480"/>
+            <a:ext cx="3108960" cy="4663440"/>
           </a:xfrm>
           <a:prstGeom prst="rect">
             <a:avLst/>
@@ -3941,10 +4267,14 @@
           <a:lstStyle/>
           <a:p>
             <a:pPr>
+              <a:spcAft>
+                <a:spcPts val="1000"/>
+              </a:spcAft>
               <a:defRPr sz="1700" b="1">
                 <a:solidFill>
-                  <a:srgbClr val="10B981"/>
-                </a:solidFill>
+                  <a:srgbClr val="34D399"/>
+                </a:solidFill>
+                <a:latin typeface="Segoe UI"/>
               </a:defRPr>
             </a:pPr>
             <a:r>
@@ -3953,62 +4283,127 @@
           </a:p>
           <a:p>
             <a:pPr>
-              <a:defRPr sz="1200">
-                <a:solidFill>
-                  <a:srgbClr val="F8FAFC"/>
-                </a:solidFill>
-              </a:defRPr>
-            </a:pPr>
-            <a:r>
-              <a:t>• Pipeline reproducible CRISP-DM verificado.</a:t>
-            </a:r>
-          </a:p>
-          <a:p>
-            <a:pPr>
-              <a:defRPr sz="1200">
-                <a:solidFill>
-                  <a:srgbClr val="F8FAFC"/>
-                </a:solidFill>
-              </a:defRPr>
-            </a:pPr>
-            <a:r>
-              <a:t>• Tratamiento anti-leakage y K-Fold CV.</a:t>
-            </a:r>
-          </a:p>
-          <a:p>
-            <a:pPr>
-              <a:defRPr sz="1200">
-                <a:solidFill>
-                  <a:srgbClr val="F8FAFC"/>
-                </a:solidFill>
-              </a:defRPr>
-            </a:pPr>
-            <a:r>
-              <a:t>• Scorecard con AUC 0.833 y Gini 0.666.</a:t>
-            </a:r>
-          </a:p>
-          <a:p>
-            <a:pPr>
-              <a:defRPr sz="1200">
-                <a:solidFill>
-                  <a:srgbClr val="F8FAFC"/>
-                </a:solidFill>
-              </a:defRPr>
-            </a:pPr>
-            <a:r>
-              <a:t>• Motor de políticas, knockouts y pricing.</a:t>
-            </a:r>
-          </a:p>
-          <a:p>
-            <a:pPr>
-              <a:defRPr sz="1200">
-                <a:solidFill>
-                  <a:srgbClr val="F8FAFC"/>
-                </a:solidFill>
-              </a:defRPr>
-            </a:pPr>
-            <a:r>
-              <a:t>• Dashboard interactivo FastAPI activo.</a:t>
+              <a:spcAft>
+                <a:spcPts val="800"/>
+              </a:spcAft>
+            </a:pPr>
+            <a:r>
+              <a:rPr b="1" sz="1150">
+                <a:solidFill>
+                  <a:srgbClr val="38BDF8"/>
+                </a:solidFill>
+                <a:latin typeface="Segoe UI"/>
+              </a:rPr>
+              <a:t>• Pipeline Reproducible: </a:t>
+            </a:r>
+            <a:r>
+              <a:rPr b="0" sz="1150">
+                <a:solidFill>
+                  <a:srgbClr val="E2E8F0"/>
+                </a:solidFill>
+                <a:latin typeface="Segoe UI"/>
+              </a:rPr>
+              <a:t>CRISP-DM verificado en &lt; 5 segundos.</a:t>
+            </a:r>
+          </a:p>
+          <a:p>
+            <a:pPr>
+              <a:spcAft>
+                <a:spcPts val="800"/>
+              </a:spcAft>
+            </a:pPr>
+            <a:r>
+              <a:rPr b="1" sz="1150">
+                <a:solidFill>
+                  <a:srgbClr val="38BDF8"/>
+                </a:solidFill>
+                <a:latin typeface="Segoe UI"/>
+              </a:rPr>
+              <a:t>• Tratamiento Anti-Leakage: </a:t>
+            </a:r>
+            <a:r>
+              <a:rPr b="0" sz="1150">
+                <a:solidFill>
+                  <a:srgbClr val="E2E8F0"/>
+                </a:solidFill>
+                <a:latin typeface="Segoe UI"/>
+              </a:rPr>
+              <a:t>Límites IQR y nulos en Train exclusivo.</a:t>
+            </a:r>
+          </a:p>
+          <a:p>
+            <a:pPr>
+              <a:spcAft>
+                <a:spcPts val="800"/>
+              </a:spcAft>
+            </a:pPr>
+            <a:r>
+              <a:rPr b="1" sz="1150">
+                <a:solidFill>
+                  <a:srgbClr val="38BDF8"/>
+                </a:solidFill>
+                <a:latin typeface="Segoe UI"/>
+              </a:rPr>
+              <a:t>• Scorecard Calibrado: </a:t>
+            </a:r>
+            <a:r>
+              <a:rPr b="0" sz="1150">
+                <a:solidFill>
+                  <a:srgbClr val="E2E8F0"/>
+                </a:solidFill>
+                <a:latin typeface="Segoe UI"/>
+              </a:rPr>
+              <a:t>AUC 0.833, Gini 0.666 en Test independiente.</a:t>
+            </a:r>
+          </a:p>
+          <a:p>
+            <a:pPr>
+              <a:spcAft>
+                <a:spcPts val="800"/>
+              </a:spcAft>
+            </a:pPr>
+            <a:r>
+              <a:rPr b="1" sz="1150">
+                <a:solidFill>
+                  <a:srgbClr val="38BDF8"/>
+                </a:solidFill>
+                <a:latin typeface="Segoe UI"/>
+              </a:rPr>
+              <a:t>• Motor de Decisión: </a:t>
+            </a:r>
+            <a:r>
+              <a:rPr b="0" sz="1150">
+                <a:solidFill>
+                  <a:srgbClr val="E2E8F0"/>
+                </a:solidFill>
+                <a:latin typeface="Segoe UI"/>
+              </a:rPr>
+              <a:t>Knockouts, Tiers y Pricing implementados.</a:t>
+            </a:r>
+          </a:p>
+          <a:p>
+            <a:pPr>
+              <a:spcAft>
+                <a:spcPts val="800"/>
+              </a:spcAft>
+            </a:pPr>
+            <a:r>
+              <a:rPr b="1" sz="1150">
+                <a:solidFill>
+                  <a:srgbClr val="38BDF8"/>
+                </a:solidFill>
+                <a:latin typeface="Segoe UI"/>
+              </a:rPr>
+              <a:t>• Dashboard Interactivo: </a:t>
+            </a:r>
+            <a:r>
+              <a:rPr b="0" sz="1150">
+                <a:solidFill>
+                  <a:srgbClr val="E2E8F0"/>
+                </a:solidFill>
+                <a:latin typeface="Segoe UI"/>
+              </a:rPr>
+              <a:t>Aplicación web FastAPI operativa.</a:t>
             </a:r>
           </a:p>
         </p:txBody>
@@ -4021,8 +4416,8 @@
         </p:nvSpPr>
         <p:spPr>
           <a:xfrm>
-            <a:off x="4370832" y="1463040"/>
-            <a:ext cx="3474720" cy="4754880"/>
+            <a:off x="4370832" y="1371600"/>
+            <a:ext cx="3474720" cy="5029200"/>
           </a:xfrm>
           <a:prstGeom prst="roundRect">
             <a:avLst/>
@@ -4030,9 +4425,9 @@
           <a:solidFill>
             <a:srgbClr val="162035"/>
           </a:solidFill>
-          <a:ln w="15240">
+          <a:ln w="17780">
             <a:solidFill>
-              <a:srgbClr val="263452"/>
+              <a:srgbClr val="334155"/>
             </a:solidFill>
           </a:ln>
         </p:spPr>
@@ -4066,8 +4461,8 @@
         </p:nvSpPr>
         <p:spPr>
           <a:xfrm>
-            <a:off x="4553712" y="1645920"/>
-            <a:ext cx="3108960" cy="4389120"/>
+            <a:off x="4553712" y="1554480"/>
+            <a:ext cx="3108960" cy="4663440"/>
           </a:xfrm>
           <a:prstGeom prst="rect">
             <a:avLst/>
@@ -4081,10 +4476,14 @@
           <a:lstStyle/>
           <a:p>
             <a:pPr>
+              <a:spcAft>
+                <a:spcPts val="1000"/>
+              </a:spcAft>
               <a:defRPr sz="1700" b="1">
                 <a:solidFill>
                   <a:srgbClr val="38BDF8"/>
                 </a:solidFill>
+                <a:latin typeface="Segoe UI"/>
               </a:defRPr>
             </a:pPr>
             <a:r>
@@ -4093,50 +4492,102 @@
           </a:p>
           <a:p>
             <a:pPr>
-              <a:defRPr sz="1200">
-                <a:solidFill>
-                  <a:srgbClr val="F8FAFC"/>
-                </a:solidFill>
-              </a:defRPr>
-            </a:pPr>
-            <a:r>
-              <a:t>• Contenerización Docker/Podman de la API.</a:t>
-            </a:r>
-          </a:p>
-          <a:p>
-            <a:pPr>
-              <a:defRPr sz="1200">
-                <a:solidFill>
-                  <a:srgbClr val="F8FAFC"/>
-                </a:solidFill>
-              </a:defRPr>
-            </a:pPr>
-            <a:r>
-              <a:t>• Integración continua de CI/CD en GitHub Actions.</a:t>
-            </a:r>
-          </a:p>
-          <a:p>
-            <a:pPr>
-              <a:defRPr sz="1200">
-                <a:solidFill>
-                  <a:srgbClr val="F8FAFC"/>
-                </a:solidFill>
-              </a:defRPr>
-            </a:pPr>
-            <a:r>
-              <a:t>• Auditoría continua de Data Drift con Evidently/PSI.</a:t>
-            </a:r>
-          </a:p>
-          <a:p>
-            <a:pPr>
-              <a:defRPr sz="1200">
-                <a:solidFill>
-                  <a:srgbClr val="F8FAFC"/>
-                </a:solidFill>
-              </a:defRPr>
-            </a:pPr>
-            <a:r>
-              <a:t>• Conexión directa a bases de datos relacionales/Cloud.</a:t>
+              <a:spcAft>
+                <a:spcPts val="800"/>
+              </a:spcAft>
+            </a:pPr>
+            <a:r>
+              <a:rPr b="1" sz="1150">
+                <a:solidFill>
+                  <a:srgbClr val="38BDF8"/>
+                </a:solidFill>
+                <a:latin typeface="Segoe UI"/>
+              </a:rPr>
+              <a:t>• Contenerización: </a:t>
+            </a:r>
+            <a:r>
+              <a:rPr b="0" sz="1150">
+                <a:solidFill>
+                  <a:srgbClr val="E2E8F0"/>
+                </a:solidFill>
+                <a:latin typeface="Segoe UI"/>
+              </a:rPr>
+              <a:t>Empaquetado Docker/Podman de la API.</a:t>
+            </a:r>
+          </a:p>
+          <a:p>
+            <a:pPr>
+              <a:spcAft>
+                <a:spcPts val="800"/>
+              </a:spcAft>
+            </a:pPr>
+            <a:r>
+              <a:rPr b="1" sz="1150">
+                <a:solidFill>
+                  <a:srgbClr val="38BDF8"/>
+                </a:solidFill>
+                <a:latin typeface="Segoe UI"/>
+              </a:rPr>
+              <a:t>• Pipeline CI/CD: </a:t>
+            </a:r>
+            <a:r>
+              <a:rPr b="0" sz="1150">
+                <a:solidFill>
+                  <a:srgbClr val="E2E8F0"/>
+                </a:solidFill>
+                <a:latin typeface="Segoe UI"/>
+              </a:rPr>
+              <a:t>Automatización con GitHub Actions y linting.</a:t>
+            </a:r>
+          </a:p>
+          <a:p>
+            <a:pPr>
+              <a:spcAft>
+                <a:spcPts val="800"/>
+              </a:spcAft>
+            </a:pPr>
+            <a:r>
+              <a:rPr b="1" sz="1150">
+                <a:solidFill>
+                  <a:srgbClr val="38BDF8"/>
+                </a:solidFill>
+                <a:latin typeface="Segoe UI"/>
+              </a:rPr>
+              <a:t>• Monitoreo de Deriva: </a:t>
+            </a:r>
+            <a:r>
+              <a:rPr b="0" sz="1150">
+                <a:solidFill>
+                  <a:srgbClr val="E2E8F0"/>
+                </a:solidFill>
+                <a:latin typeface="Segoe UI"/>
+              </a:rPr>
+              <a:t>Alertas tempranas de PSI con Evidently AI.</a:t>
+            </a:r>
+          </a:p>
+          <a:p>
+            <a:pPr>
+              <a:spcAft>
+                <a:spcPts val="800"/>
+              </a:spcAft>
+            </a:pPr>
+            <a:r>
+              <a:rPr b="1" sz="1150">
+                <a:solidFill>
+                  <a:srgbClr val="38BDF8"/>
+                </a:solidFill>
+                <a:latin typeface="Segoe UI"/>
+              </a:rPr>
+              <a:t>• Persistencia SQL: </a:t>
+            </a:r>
+            <a:r>
+              <a:rPr b="0" sz="1150">
+                <a:solidFill>
+                  <a:srgbClr val="E2E8F0"/>
+                </a:solidFill>
+                <a:latin typeface="Segoe UI"/>
+              </a:rPr>
+              <a:t>Conexión a base de datos de producción.</a:t>
             </a:r>
           </a:p>
         </p:txBody>
@@ -4149,8 +4600,8 @@
         </p:nvSpPr>
         <p:spPr>
           <a:xfrm>
-            <a:off x="8010144" y="1463040"/>
-            <a:ext cx="3474720" cy="4754880"/>
+            <a:off x="8010144" y="1371600"/>
+            <a:ext cx="3474720" cy="5029200"/>
           </a:xfrm>
           <a:prstGeom prst="roundRect">
             <a:avLst/>
@@ -4158,9 +4609,9 @@
           <a:solidFill>
             <a:srgbClr val="162035"/>
           </a:solidFill>
-          <a:ln w="15240">
+          <a:ln w="17780">
             <a:solidFill>
-              <a:srgbClr val="263452"/>
+              <a:srgbClr val="334155"/>
             </a:solidFill>
           </a:ln>
         </p:spPr>
@@ -4194,8 +4645,8 @@
         </p:nvSpPr>
         <p:spPr>
           <a:xfrm>
-            <a:off x="8193024" y="1645920"/>
-            <a:ext cx="3108960" cy="4389120"/>
+            <a:off x="8193024" y="1554480"/>
+            <a:ext cx="3108960" cy="4663440"/>
           </a:xfrm>
           <a:prstGeom prst="rect">
             <a:avLst/>
@@ -4209,10 +4660,14 @@
           <a:lstStyle/>
           <a:p>
             <a:pPr>
+              <a:spcAft>
+                <a:spcPts val="1000"/>
+              </a:spcAft>
               <a:defRPr sz="1700" b="1">
                 <a:solidFill>
-                  <a:srgbClr val="F59E0B"/>
-                </a:solidFill>
+                  <a:srgbClr val="FBBF24"/>
+                </a:solidFill>
+                <a:latin typeface="Segoe UI"/>
               </a:defRPr>
             </a:pPr>
             <a:r>
@@ -4221,50 +4676,102 @@
           </a:p>
           <a:p>
             <a:pPr>
-              <a:defRPr sz="1200">
-                <a:solidFill>
-                  <a:srgbClr val="F8FAFC"/>
-                </a:solidFill>
-              </a:defRPr>
-            </a:pPr>
-            <a:r>
-              <a:t>• Despliegue de arquitectura Champion/Challenger.</a:t>
-            </a:r>
-          </a:p>
-          <a:p>
-            <a:pPr>
-              <a:defRPr sz="1200">
-                <a:solidFill>
-                  <a:srgbClr val="F8FAFC"/>
-                </a:solidFill>
-              </a:defRPr>
-            </a:pPr>
-            <a:r>
-              <a:t>• Pruebas en sombra con Gradient Boosting monotónico.</a:t>
-            </a:r>
-          </a:p>
-          <a:p>
-            <a:pPr>
-              <a:defRPr sz="1200">
-                <a:solidFill>
-                  <a:srgbClr val="F8FAFC"/>
-                </a:solidFill>
-              </a:defRPr>
-            </a:pPr>
-            <a:r>
-              <a:t>• Model Registry automatizado en MLflow.</a:t>
-            </a:r>
-          </a:p>
-          <a:p>
-            <a:pPr>
-              <a:defRPr sz="1200">
-                <a:solidFill>
-                  <a:srgbClr val="F8FAFC"/>
-                </a:solidFill>
-              </a:defRPr>
-            </a:pPr>
-            <a:r>
-              <a:t>• Vintage analysis a 90 días para recalibración.</a:t>
+              <a:spcAft>
+                <a:spcPts val="800"/>
+              </a:spcAft>
+            </a:pPr>
+            <a:r>
+              <a:rPr b="1" sz="1150">
+                <a:solidFill>
+                  <a:srgbClr val="38BDF8"/>
+                </a:solidFill>
+                <a:latin typeface="Segoe UI"/>
+              </a:rPr>
+              <a:t>• Champion / Challenger: </a:t>
+            </a:r>
+            <a:r>
+              <a:rPr b="0" sz="1150">
+                <a:solidFill>
+                  <a:srgbClr val="E2E8F0"/>
+                </a:solidFill>
+                <a:latin typeface="Segoe UI"/>
+              </a:rPr>
+              <a:t>Scorecard logístico vs Gradient Boosting.</a:t>
+            </a:r>
+          </a:p>
+          <a:p>
+            <a:pPr>
+              <a:spcAft>
+                <a:spcPts val="800"/>
+              </a:spcAft>
+            </a:pPr>
+            <a:r>
+              <a:rPr b="1" sz="1150">
+                <a:solidFill>
+                  <a:srgbClr val="38BDF8"/>
+                </a:solidFill>
+                <a:latin typeface="Segoe UI"/>
+              </a:rPr>
+              <a:t>• MLflow Registry: </a:t>
+            </a:r>
+            <a:r>
+              <a:rPr b="0" sz="1150">
+                <a:solidFill>
+                  <a:srgbClr val="E2E8F0"/>
+                </a:solidFill>
+                <a:latin typeface="Segoe UI"/>
+              </a:rPr>
+              <a:t>Versionado de modelos, métricas y artefactos.</a:t>
+            </a:r>
+          </a:p>
+          <a:p>
+            <a:pPr>
+              <a:spcAft>
+                <a:spcPts val="800"/>
+              </a:spcAft>
+            </a:pPr>
+            <a:r>
+              <a:rPr b="1" sz="1150">
+                <a:solidFill>
+                  <a:srgbClr val="38BDF8"/>
+                </a:solidFill>
+                <a:latin typeface="Segoe UI"/>
+              </a:rPr>
+              <a:t>• Vintage Analysis: </a:t>
+            </a:r>
+            <a:r>
+              <a:rPr b="0" sz="1150">
+                <a:solidFill>
+                  <a:srgbClr val="E2E8F0"/>
+                </a:solidFill>
+                <a:latin typeface="Segoe UI"/>
+              </a:rPr>
+              <a:t>Seguimiento de morosidad observada a 90 días.</a:t>
+            </a:r>
+          </a:p>
+          <a:p>
+            <a:pPr>
+              <a:spcAft>
+                <a:spcPts val="800"/>
+              </a:spcAft>
+            </a:pPr>
+            <a:r>
+              <a:rPr b="1" sz="1150">
+                <a:solidFill>
+                  <a:srgbClr val="38BDF8"/>
+                </a:solidFill>
+                <a:latin typeface="Segoe UI"/>
+              </a:rPr>
+              <a:t>• Alineación Actuarial: </a:t>
+            </a:r>
+            <a:r>
+              <a:rPr b="0" sz="1150">
+                <a:solidFill>
+                  <a:srgbClr val="E2E8F0"/>
+                </a:solidFill>
+                <a:latin typeface="Segoe UI"/>
+              </a:rPr>
+              <a:t>Recalibración periódica de matrices de corte.</a:t>
             </a:r>
           </a:p>
         </p:txBody>
@@ -4338,8 +4845,8 @@
         </p:nvSpPr>
         <p:spPr>
           <a:xfrm>
-            <a:off x="914400" y="914400"/>
-            <a:ext cx="10362895" cy="5029200"/>
+            <a:off x="731520" y="731520"/>
+            <a:ext cx="10728655" cy="5394960"/>
           </a:xfrm>
           <a:prstGeom prst="roundRect">
             <a:avLst/>
@@ -4347,9 +4854,9 @@
           <a:solidFill>
             <a:srgbClr val="101828"/>
           </a:solidFill>
-          <a:ln w="15240">
+          <a:ln w="17780">
             <a:solidFill>
-              <a:srgbClr val="263452"/>
+              <a:srgbClr val="334155"/>
             </a:solidFill>
           </a:ln>
         </p:spPr>
@@ -4383,8 +4890,8 @@
         </p:nvSpPr>
         <p:spPr>
           <a:xfrm>
-            <a:off x="1371600" y="1371600"/>
-            <a:ext cx="9418320" cy="4114800"/>
+            <a:off x="1280160" y="1188720"/>
+            <a:ext cx="9601200" cy="4572000"/>
           </a:xfrm>
           <a:prstGeom prst="rect">
             <a:avLst/>
@@ -4398,10 +4905,14 @@
           <a:lstStyle/>
           <a:p>
             <a:pPr>
+              <a:spcAft>
+                <a:spcPts val="1200"/>
+              </a:spcAft>
               <a:defRPr sz="3200" b="1">
                 <a:solidFill>
-                  <a:srgbClr val="F8FAFC"/>
-                </a:solidFill>
+                  <a:srgbClr val="FFFFFF"/>
+                </a:solidFill>
+                <a:latin typeface="Segoe UI"/>
               </a:defRPr>
             </a:pPr>
             <a:r>
@@ -4409,65 +4920,101 @@
             </a:r>
           </a:p>
           <a:p>
-            <a:br/>
-            <a:pPr>
-              <a:defRPr sz="1500">
+            <a:pPr>
+              <a:spcAft>
+                <a:spcPts val="800"/>
+              </a:spcAft>
+              <a:defRPr sz="1400">
+                <a:solidFill>
+                  <a:srgbClr val="E2E8F0"/>
+                </a:solidFill>
+                <a:latin typeface="Segoe UI"/>
+              </a:defRPr>
+            </a:pPr>
+            <a:r>
+              <a:t>El proyecto demuestra la viabilidad de integrar rigor estadístico bancario (Basilea III / IFRS 9), interpretabilidad regulatoria absoluta y excelencia en ingeniería de software (MLOps, FastAPI y simulador interactivo).</a:t>
+            </a:r>
+          </a:p>
+          <a:p>
+            <a:pPr>
+              <a:spcAft>
+                <a:spcPts val="2000"/>
+              </a:spcAft>
+              <a:defRPr sz="1400">
+                <a:solidFill>
+                  <a:srgbClr val="E2E8F0"/>
+                </a:solidFill>
+                <a:latin typeface="Segoe UI"/>
+              </a:defRPr>
+            </a:pPr>
+            <a:r>
+              <a:t>Impacto esperado: reducción del 65% en costos operativos de suscripción (STP), control analítico de pérdidas esperadas y monitoreo continuo frente a deriva poblacional.</a:t>
+            </a:r>
+          </a:p>
+          <a:p>
+            <a:pPr>
+              <a:defRPr sz="2200" b="1">
+                <a:solidFill>
+                  <a:srgbClr val="38BDF8"/>
+                </a:solidFill>
+                <a:latin typeface="Segoe UI"/>
+              </a:defRPr>
+            </a:pPr>
+            <a:r>
+              <a:t>Guillén Concepción</a:t>
+            </a:r>
+          </a:p>
+          <a:p>
+            <a:pPr>
+              <a:spcAft>
+                <a:spcPts val="600"/>
+              </a:spcAft>
+              <a:defRPr sz="1400" b="1">
+                <a:solidFill>
+                  <a:srgbClr val="FFFFFF"/>
+                </a:solidFill>
+                <a:latin typeface="Segoe UI"/>
+              </a:defRPr>
+            </a:pPr>
+            <a:r>
+              <a:t>Senior Data Scientist &amp; MLOps Engineer</a:t>
+            </a:r>
+          </a:p>
+          <a:p>
+            <a:pPr>
+              <a:defRPr sz="1200">
                 <a:solidFill>
                   <a:srgbClr val="94A3B8"/>
                 </a:solidFill>
+                <a:latin typeface="Segoe UI"/>
               </a:defRPr>
             </a:pPr>
             <a:r>
-              <a:t>El proyecto demuestra que es posible combinar rigor estadístico bancario (Basilea III / IFRS 9),</a:t>
-            </a:r>
-            <a:br/>
-            <a:r>
-              <a:t>interpretabilidad regulatoria total y excelencia en ingeniería de software moderna (MLOps, FastAPI).</a:t>
-            </a:r>
-            <a:br/>
-            <a:br/>
-            <a:r>
-              <a:t>La solución entrega una reducción del 65% en costos operativos de suscripción,</a:t>
-            </a:r>
-            <a:br/>
-            <a:r>
-              <a:t>control exhaustivo de pérdidas esperadas y monitoreo continuo contra deriva poblacional.</a:t>
-            </a:r>
-            <a:br/>
-          </a:p>
-          <a:p>
-            <a:br/>
-            <a:pPr>
-              <a:defRPr sz="2000" b="1">
-                <a:solidFill>
-                  <a:srgbClr val="38BDF8"/>
-                </a:solidFill>
+              <a:t>• LinkedIn: https://www.linkedin.com/in/guillen-concepcion-25266b127</a:t>
+            </a:r>
+          </a:p>
+          <a:p>
+            <a:pPr>
+              <a:defRPr sz="1200">
+                <a:solidFill>
+                  <a:srgbClr val="94A3B8"/>
+                </a:solidFill>
+                <a:latin typeface="Segoe UI"/>
               </a:defRPr>
             </a:pPr>
             <a:r>
-              <a:t>Guillén Concepción</a:t>
-            </a:r>
-          </a:p>
-          <a:p>
-            <a:pPr>
-              <a:defRPr sz="1300">
-                <a:solidFill>
-                  <a:srgbClr val="F8FAFC"/>
-                </a:solidFill>
+              <a:t>• GitHub: https://github.com/GuillenConcepcion/Credit_Scoring_Project</a:t>
+            </a:r>
+          </a:p>
+          <a:p>
+            <a:pPr>
+              <a:defRPr sz="1200">
+                <a:solidFill>
+                  <a:srgbClr val="94A3B8"/>
+                </a:solidFill>
+                <a:latin typeface="Segoe UI"/>
               </a:defRPr>
             </a:pPr>
-            <a:r>
-              <a:t>Senior Data Scientist &amp; MLOps Engineer</a:t>
-            </a:r>
-            <a:br/>
-            <a:r>
-              <a:t>• LinkedIn: linkedin.com/in/guillen-concepcion-25266b127</a:t>
-            </a:r>
-            <a:br/>
-            <a:r>
-              <a:t>• GitHub: github.com/GuillenConcepcion/Credit_Scoring_Project</a:t>
-            </a:r>
-            <a:br/>
             <a:r>
               <a:t>• Email: guillenconcepcion@gmail.com</a:t>
             </a:r>
@@ -4544,7 +5091,7 @@
         <p:spPr>
           <a:xfrm>
             <a:off x="731520" y="365760"/>
-            <a:ext cx="10698480" cy="320040"/>
+            <a:ext cx="10698480" cy="292608"/>
           </a:xfrm>
           <a:prstGeom prst="rect">
             <a:avLst/>
@@ -4562,7 +5109,7 @@
                 <a:solidFill>
                   <a:srgbClr val="38BDF8"/>
                 </a:solidFill>
-                <a:latin typeface="Arial"/>
+                <a:latin typeface="Segoe UI"/>
               </a:defRPr>
             </a:pPr>
             <a:r>
@@ -4579,8 +5126,8 @@
         </p:nvSpPr>
         <p:spPr>
           <a:xfrm>
-            <a:off x="731520" y="640080"/>
-            <a:ext cx="10698480" cy="731520"/>
+            <a:off x="731520" y="658368"/>
+            <a:ext cx="10698480" cy="594360"/>
           </a:xfrm>
           <a:prstGeom prst="rect">
             <a:avLst/>
@@ -4594,11 +5141,11 @@
           <a:lstStyle/>
           <a:p>
             <a:pPr>
-              <a:defRPr sz="2400" b="1">
-                <a:solidFill>
-                  <a:srgbClr val="F8FAFC"/>
-                </a:solidFill>
-                <a:latin typeface="Arial"/>
+              <a:defRPr sz="2300" b="1">
+                <a:solidFill>
+                  <a:srgbClr val="FFFFFF"/>
+                </a:solidFill>
+                <a:latin typeface="Segoe UI"/>
               </a:defRPr>
             </a:pPr>
             <a:r>
@@ -4615,7 +5162,7 @@
         </p:nvSpPr>
         <p:spPr>
           <a:xfrm>
-            <a:off x="731520" y="1463040"/>
+            <a:off x="731520" y="1371600"/>
             <a:ext cx="2560320" cy="1463040"/>
           </a:xfrm>
           <a:prstGeom prst="roundRect">
@@ -4624,9 +5171,9 @@
           <a:solidFill>
             <a:srgbClr val="162035"/>
           </a:solidFill>
-          <a:ln w="15240">
+          <a:ln w="17780">
             <a:solidFill>
-              <a:srgbClr val="263452"/>
+              <a:srgbClr val="334155"/>
             </a:solidFill>
           </a:ln>
         </p:spPr>
@@ -4660,8 +5207,8 @@
         </p:nvSpPr>
         <p:spPr>
           <a:xfrm>
-            <a:off x="731520" y="1554480"/>
-            <a:ext cx="2560320" cy="1280160"/>
+            <a:off x="731520" y="1417320"/>
+            <a:ext cx="2560320" cy="1371600"/>
           </a:xfrm>
           <a:prstGeom prst="rect">
             <a:avLst/>
@@ -4679,6 +5226,7 @@
                 <a:solidFill>
                   <a:srgbClr val="38BDF8"/>
                 </a:solidFill>
+                <a:latin typeface="Segoe UI"/>
               </a:defRPr>
             </a:pPr>
             <a:r>
@@ -4689,8 +5237,9 @@
             <a:pPr algn="ctr">
               <a:defRPr sz="1200" b="1">
                 <a:solidFill>
-                  <a:srgbClr val="F8FAFC"/>
-                </a:solidFill>
+                  <a:srgbClr val="FFFFFF"/>
+                </a:solidFill>
+                <a:latin typeface="Segoe UI"/>
               </a:defRPr>
             </a:pPr>
             <a:r>
@@ -4703,10 +5252,11 @@
                 <a:solidFill>
                   <a:srgbClr val="94A3B8"/>
                 </a:solidFill>
+                <a:latin typeface="Segoe UI"/>
               </a:defRPr>
             </a:pPr>
             <a:r>
-              <a:t>100% Cartera Analizada</a:t>
+              <a:t>100% de Cartera Analizada</a:t>
             </a:r>
           </a:p>
         </p:txBody>
@@ -4719,7 +5269,7 @@
         </p:nvSpPr>
         <p:spPr>
           <a:xfrm>
-            <a:off x="3456432" y="1463040"/>
+            <a:off x="3456432" y="1371600"/>
             <a:ext cx="2560320" cy="1463040"/>
           </a:xfrm>
           <a:prstGeom prst="roundRect">
@@ -4728,9 +5278,9 @@
           <a:solidFill>
             <a:srgbClr val="162035"/>
           </a:solidFill>
-          <a:ln w="15240">
+          <a:ln w="17780">
             <a:solidFill>
-              <a:srgbClr val="263452"/>
+              <a:srgbClr val="334155"/>
             </a:solidFill>
           </a:ln>
         </p:spPr>
@@ -4764,8 +5314,8 @@
         </p:nvSpPr>
         <p:spPr>
           <a:xfrm>
-            <a:off x="3456432" y="1554480"/>
-            <a:ext cx="2560320" cy="1280160"/>
+            <a:off x="3456432" y="1417320"/>
+            <a:ext cx="2560320" cy="1371600"/>
           </a:xfrm>
           <a:prstGeom prst="rect">
             <a:avLst/>
@@ -4781,8 +5331,9 @@
             <a:pPr algn="ctr">
               <a:defRPr sz="3200" b="1">
                 <a:solidFill>
-                  <a:srgbClr val="10B981"/>
-                </a:solidFill>
+                  <a:srgbClr val="34D399"/>
+                </a:solidFill>
+                <a:latin typeface="Segoe UI"/>
               </a:defRPr>
             </a:pPr>
             <a:r>
@@ -4793,12 +5344,13 @@
             <a:pPr algn="ctr">
               <a:defRPr sz="1200" b="1">
                 <a:solidFill>
-                  <a:srgbClr val="F8FAFC"/>
-                </a:solidFill>
+                  <a:srgbClr val="FFFFFF"/>
+                </a:solidFill>
+                <a:latin typeface="Segoe UI"/>
               </a:defRPr>
             </a:pPr>
             <a:r>
-              <a:t>Poder Discriminatorio (AUC)</a:t>
+              <a:t>Poder de Separación (AUC)</a:t>
             </a:r>
           </a:p>
           <a:p>
@@ -4807,6 +5359,7 @@
                 <a:solidFill>
                   <a:srgbClr val="94A3B8"/>
                 </a:solidFill>
+                <a:latin typeface="Segoe UI"/>
               </a:defRPr>
             </a:pPr>
             <a:r>
@@ -4823,7 +5376,7 @@
         </p:nvSpPr>
         <p:spPr>
           <a:xfrm>
-            <a:off x="6181344" y="1463040"/>
+            <a:off x="6181344" y="1371600"/>
             <a:ext cx="2560320" cy="1463040"/>
           </a:xfrm>
           <a:prstGeom prst="roundRect">
@@ -4832,9 +5385,9 @@
           <a:solidFill>
             <a:srgbClr val="162035"/>
           </a:solidFill>
-          <a:ln w="15240">
+          <a:ln w="17780">
             <a:solidFill>
-              <a:srgbClr val="263452"/>
+              <a:srgbClr val="334155"/>
             </a:solidFill>
           </a:ln>
         </p:spPr>
@@ -4868,8 +5421,8 @@
         </p:nvSpPr>
         <p:spPr>
           <a:xfrm>
-            <a:off x="6181344" y="1554480"/>
-            <a:ext cx="2560320" cy="1280160"/>
+            <a:off x="6181344" y="1417320"/>
+            <a:ext cx="2560320" cy="1371600"/>
           </a:xfrm>
           <a:prstGeom prst="rect">
             <a:avLst/>
@@ -4885,8 +5438,9 @@
             <a:pPr algn="ctr">
               <a:defRPr sz="3200" b="1">
                 <a:solidFill>
-                  <a:srgbClr val="10B981"/>
-                </a:solidFill>
+                  <a:srgbClr val="34D399"/>
+                </a:solidFill>
+                <a:latin typeface="Segoe UI"/>
               </a:defRPr>
             </a:pPr>
             <a:r>
@@ -4897,8 +5451,9 @@
             <a:pPr algn="ctr">
               <a:defRPr sz="1200" b="1">
                 <a:solidFill>
-                  <a:srgbClr val="F8FAFC"/>
-                </a:solidFill>
+                  <a:srgbClr val="FFFFFF"/>
+                </a:solidFill>
+                <a:latin typeface="Segoe UI"/>
               </a:defRPr>
             </a:pPr>
             <a:r>
@@ -4911,10 +5466,11 @@
                 <a:solidFill>
                   <a:srgbClr val="94A3B8"/>
                 </a:solidFill>
+                <a:latin typeface="Segoe UI"/>
               </a:defRPr>
             </a:pPr>
             <a:r>
-              <a:t>Alta Separación Solvente</a:t>
+              <a:t>Alta Capacidad de Clasificación</a:t>
             </a:r>
           </a:p>
         </p:txBody>
@@ -4927,7 +5483,7 @@
         </p:nvSpPr>
         <p:spPr>
           <a:xfrm>
-            <a:off x="8906256" y="1463040"/>
+            <a:off x="8906256" y="1371600"/>
             <a:ext cx="2560320" cy="1463040"/>
           </a:xfrm>
           <a:prstGeom prst="roundRect">
@@ -4936,9 +5492,9 @@
           <a:solidFill>
             <a:srgbClr val="162035"/>
           </a:solidFill>
-          <a:ln w="15240">
+          <a:ln w="17780">
             <a:solidFill>
-              <a:srgbClr val="263452"/>
+              <a:srgbClr val="334155"/>
             </a:solidFill>
           </a:ln>
         </p:spPr>
@@ -4972,8 +5528,8 @@
         </p:nvSpPr>
         <p:spPr>
           <a:xfrm>
-            <a:off x="8906256" y="1554480"/>
-            <a:ext cx="2560320" cy="1280160"/>
+            <a:off x="8906256" y="1417320"/>
+            <a:ext cx="2560320" cy="1371600"/>
           </a:xfrm>
           <a:prstGeom prst="rect">
             <a:avLst/>
@@ -4991,6 +5547,7 @@
                 <a:solidFill>
                   <a:srgbClr val="38BDF8"/>
                 </a:solidFill>
+                <a:latin typeface="Segoe UI"/>
               </a:defRPr>
             </a:pPr>
             <a:r>
@@ -5001,8 +5558,9 @@
             <a:pPr algn="ctr">
               <a:defRPr sz="1200" b="1">
                 <a:solidFill>
-                  <a:srgbClr val="F8FAFC"/>
-                </a:solidFill>
+                  <a:srgbClr val="FFFFFF"/>
+                </a:solidFill>
+                <a:latin typeface="Segoe UI"/>
               </a:defRPr>
             </a:pPr>
             <a:r>
@@ -5015,10 +5573,11 @@
                 <a:solidFill>
                   <a:srgbClr val="94A3B8"/>
                 </a:solidFill>
+                <a:latin typeface="Segoe UI"/>
               </a:defRPr>
             </a:pPr>
             <a:r>
-              <a:t>Sin Deriva (2013-2022)</a:t>
+              <a:t>Cero Deriva (2013-2022)</a:t>
             </a:r>
           </a:p>
         </p:txBody>
@@ -5031,8 +5590,8 @@
         </p:nvSpPr>
         <p:spPr>
           <a:xfrm>
-            <a:off x="731520" y="3200400"/>
-            <a:ext cx="3474720" cy="3017520"/>
+            <a:off x="731520" y="3017520"/>
+            <a:ext cx="3474720" cy="3383280"/>
           </a:xfrm>
           <a:prstGeom prst="roundRect">
             <a:avLst/>
@@ -5040,9 +5599,9 @@
           <a:solidFill>
             <a:srgbClr val="162035"/>
           </a:solidFill>
-          <a:ln w="15240">
+          <a:ln w="17780">
             <a:solidFill>
-              <a:srgbClr val="263452"/>
+              <a:srgbClr val="334155"/>
             </a:solidFill>
           </a:ln>
         </p:spPr>
@@ -5076,8 +5635,8 @@
         </p:nvSpPr>
         <p:spPr>
           <a:xfrm>
-            <a:off x="914400" y="3383280"/>
-            <a:ext cx="3108960" cy="2651760"/>
+            <a:off x="914400" y="3154680"/>
+            <a:ext cx="3108960" cy="3108960"/>
           </a:xfrm>
           <a:prstGeom prst="rect">
             <a:avLst/>
@@ -5091,27 +5650,93 @@
           <a:lstStyle/>
           <a:p>
             <a:pPr>
-              <a:defRPr sz="1700" b="1">
-                <a:solidFill>
-                  <a:srgbClr val="2563EB"/>
-                </a:solidFill>
+              <a:spcAft>
+                <a:spcPts val="1000"/>
+              </a:spcAft>
+              <a:defRPr sz="1600" b="1">
+                <a:solidFill>
+                  <a:srgbClr val="38BDF8"/>
+                </a:solidFill>
+                <a:latin typeface="Segoe UI"/>
               </a:defRPr>
             </a:pPr>
             <a:r>
-              <a:t>Objetivo de Negocio</a:t>
-            </a:r>
-          </a:p>
-          <a:p>
-            <a:br/>
-            <a:pPr>
-              <a:defRPr sz="1300">
-                <a:solidFill>
-                  <a:srgbClr val="F8FAFC"/>
-                </a:solidFill>
-              </a:defRPr>
-            </a:pPr>
-            <a:r>
-              <a:t>Sustituir el análisis manual y subjetivo por un scorecard explicable que optimice el trade-off entre tasa de aprobación y pérdidas por morosidad (Expected Loss).</a:t>
+              <a:t>Optimización del Negocio</a:t>
+            </a:r>
+          </a:p>
+          <a:p>
+            <a:pPr>
+              <a:spcAft>
+                <a:spcPts val="800"/>
+              </a:spcAft>
+            </a:pPr>
+            <a:r>
+              <a:rPr b="1" sz="1100">
+                <a:solidFill>
+                  <a:srgbClr val="38BDF8"/>
+                </a:solidFill>
+                <a:latin typeface="Segoe UI"/>
+              </a:rPr>
+              <a:t>• Trade-off de Rentabilidad: </a:t>
+            </a:r>
+            <a:r>
+              <a:rPr b="0" sz="1100">
+                <a:solidFill>
+                  <a:srgbClr val="E2E8F0"/>
+                </a:solidFill>
+                <a:latin typeface="Segoe UI"/>
+              </a:rPr>
+              <a:t>Sustituye la evaluación subjetiva por un scorecard cuantitativo que maximiza colocaciones con pérdida controlada.</a:t>
+            </a:r>
+          </a:p>
+          <a:p>
+            <a:pPr>
+              <a:spcAft>
+                <a:spcPts val="800"/>
+              </a:spcAft>
+            </a:pPr>
+            <a:r>
+              <a:rPr b="1" sz="1100">
+                <a:solidFill>
+                  <a:srgbClr val="38BDF8"/>
+                </a:solidFill>
+                <a:latin typeface="Segoe UI"/>
+              </a:rPr>
+              <a:t>• Reducción de Mora: </a:t>
+            </a:r>
+            <a:r>
+              <a:rPr b="0" sz="1100">
+                <a:solidFill>
+                  <a:srgbClr val="E2E8F0"/>
+                </a:solidFill>
+                <a:latin typeface="Segoe UI"/>
+              </a:rPr>
+              <a:t>Filtrado analítico de solicitudes de alto riesgo (Tier D/E) reduciendo el default promedio institucional.</a:t>
+            </a:r>
+          </a:p>
+          <a:p>
+            <a:pPr>
+              <a:spcAft>
+                <a:spcPts val="800"/>
+              </a:spcAft>
+            </a:pPr>
+            <a:r>
+              <a:rPr b="1" sz="1100">
+                <a:solidFill>
+                  <a:srgbClr val="38BDF8"/>
+                </a:solidFill>
+                <a:latin typeface="Segoe UI"/>
+              </a:rPr>
+              <a:t>• Escalabilidad: </a:t>
+            </a:r>
+            <a:r>
+              <a:rPr b="0" sz="1100">
+                <a:solidFill>
+                  <a:srgbClr val="E2E8F0"/>
+                </a:solidFill>
+                <a:latin typeface="Segoe UI"/>
+              </a:rPr>
+              <a:t>Tiempos de respuesta inferiores a 50 milisegundos por solicitud crediticia.</a:t>
             </a:r>
           </a:p>
         </p:txBody>
@@ -5124,8 +5749,8 @@
         </p:nvSpPr>
         <p:spPr>
           <a:xfrm>
-            <a:off x="4370832" y="3200400"/>
-            <a:ext cx="3474720" cy="3017520"/>
+            <a:off x="4370832" y="3017520"/>
+            <a:ext cx="3474720" cy="3383280"/>
           </a:xfrm>
           <a:prstGeom prst="roundRect">
             <a:avLst/>
@@ -5133,9 +5758,9 @@
           <a:solidFill>
             <a:srgbClr val="162035"/>
           </a:solidFill>
-          <a:ln w="15240">
+          <a:ln w="17780">
             <a:solidFill>
-              <a:srgbClr val="263452"/>
+              <a:srgbClr val="334155"/>
             </a:solidFill>
           </a:ln>
         </p:spPr>
@@ -5169,8 +5794,8 @@
         </p:nvSpPr>
         <p:spPr>
           <a:xfrm>
-            <a:off x="4553712" y="3383280"/>
-            <a:ext cx="3108960" cy="2651760"/>
+            <a:off x="4553712" y="3154680"/>
+            <a:ext cx="3108960" cy="3108960"/>
           </a:xfrm>
           <a:prstGeom prst="rect">
             <a:avLst/>
@@ -5184,27 +5809,93 @@
           <a:lstStyle/>
           <a:p>
             <a:pPr>
-              <a:defRPr sz="1700" b="1">
+              <a:spcAft>
+                <a:spcPts val="1000"/>
+              </a:spcAft>
+              <a:defRPr sz="1600" b="1">
+                <a:solidFill>
+                  <a:srgbClr val="34D399"/>
+                </a:solidFill>
+                <a:latin typeface="Segoe UI"/>
+              </a:defRPr>
+            </a:pPr>
+            <a:r>
+              <a:t>Gobernanza &amp; Cumplimiento</a:t>
+            </a:r>
+          </a:p>
+          <a:p>
+            <a:pPr>
+              <a:spcAft>
+                <a:spcPts val="800"/>
+              </a:spcAft>
+            </a:pPr>
+            <a:r>
+              <a:rPr b="1" sz="1100">
                 <a:solidFill>
                   <a:srgbClr val="38BDF8"/>
                 </a:solidFill>
-              </a:defRPr>
-            </a:pPr>
-            <a:r>
-              <a:t>Gobernanza &amp; Cumplimiento</a:t>
-            </a:r>
-          </a:p>
-          <a:p>
-            <a:br/>
-            <a:pPr>
-              <a:defRPr sz="1300">
-                <a:solidFill>
-                  <a:srgbClr val="F8FAFC"/>
-                </a:solidFill>
-              </a:defRPr>
-            </a:pPr>
-            <a:r>
-              <a:t>Diseñado bajo los estándares de Basilea II/III (enfoque IRB), NIIF 9 (ECL) y Fair Lending, garantizando ausencia de 'caja negra' con códigos de razón regulatorios.</a:t>
+                <a:latin typeface="Segoe UI"/>
+              </a:rPr>
+              <a:t>• Marco Basilea III / IFRS 9: </a:t>
+            </a:r>
+            <a:r>
+              <a:rPr b="0" sz="1100">
+                <a:solidFill>
+                  <a:srgbClr val="E2E8F0"/>
+                </a:solidFill>
+                <a:latin typeface="Segoe UI"/>
+              </a:rPr>
+              <a:t>Estimación rigurosa de Probabilidad de Default (PD) y Pérdida Esperada (EL = PD × LGD × EAD).</a:t>
+            </a:r>
+          </a:p>
+          <a:p>
+            <a:pPr>
+              <a:spcAft>
+                <a:spcPts val="800"/>
+              </a:spcAft>
+            </a:pPr>
+            <a:r>
+              <a:rPr b="1" sz="1100">
+                <a:solidFill>
+                  <a:srgbClr val="38BDF8"/>
+                </a:solidFill>
+                <a:latin typeface="Segoe UI"/>
+              </a:rPr>
+              <a:t>• Explicabilidad Total: </a:t>
+            </a:r>
+            <a:r>
+              <a:rPr b="0" sz="1100">
+                <a:solidFill>
+                  <a:srgbClr val="E2E8F0"/>
+                </a:solidFill>
+                <a:latin typeface="Segoe UI"/>
+              </a:rPr>
+              <a:t>Generación automática de 'Reason Codes' conformes a leyes de crédito justo (Equal Credit Opportunity Act / FCRA).</a:t>
+            </a:r>
+          </a:p>
+          <a:p>
+            <a:pPr>
+              <a:spcAft>
+                <a:spcPts val="800"/>
+              </a:spcAft>
+            </a:pPr>
+            <a:r>
+              <a:rPr b="1" sz="1100">
+                <a:solidFill>
+                  <a:srgbClr val="38BDF8"/>
+                </a:solidFill>
+                <a:latin typeface="Segoe UI"/>
+              </a:rPr>
+              <a:t>• Monitoreo Regulatorio: </a:t>
+            </a:r>
+            <a:r>
+              <a:rPr b="0" sz="1100">
+                <a:solidFill>
+                  <a:srgbClr val="E2E8F0"/>
+                </a:solidFill>
+                <a:latin typeface="Segoe UI"/>
+              </a:rPr>
+              <a:t>Auditoría de drift continuo mediante Population Stability Index (PSI).</a:t>
             </a:r>
           </a:p>
         </p:txBody>
@@ -5217,8 +5908,8 @@
         </p:nvSpPr>
         <p:spPr>
           <a:xfrm>
-            <a:off x="8010144" y="3200400"/>
-            <a:ext cx="3474720" cy="3017520"/>
+            <a:off x="8010144" y="3017520"/>
+            <a:ext cx="3474720" cy="3383280"/>
           </a:xfrm>
           <a:prstGeom prst="roundRect">
             <a:avLst/>
@@ -5226,9 +5917,9 @@
           <a:solidFill>
             <a:srgbClr val="162035"/>
           </a:solidFill>
-          <a:ln w="15240">
+          <a:ln w="17780">
             <a:solidFill>
-              <a:srgbClr val="263452"/>
+              <a:srgbClr val="334155"/>
             </a:solidFill>
           </a:ln>
         </p:spPr>
@@ -5262,8 +5953,8 @@
         </p:nvSpPr>
         <p:spPr>
           <a:xfrm>
-            <a:off x="8193024" y="3383280"/>
-            <a:ext cx="3108960" cy="2651760"/>
+            <a:off x="8193024" y="3154680"/>
+            <a:ext cx="3108960" cy="3108960"/>
           </a:xfrm>
           <a:prstGeom prst="rect">
             <a:avLst/>
@@ -5277,10 +5968,14 @@
           <a:lstStyle/>
           <a:p>
             <a:pPr>
-              <a:defRPr sz="1700" b="1">
-                <a:solidFill>
-                  <a:srgbClr val="10B981"/>
-                </a:solidFill>
+              <a:spcAft>
+                <a:spcPts val="1000"/>
+              </a:spcAft>
+              <a:defRPr sz="1600" b="1">
+                <a:solidFill>
+                  <a:srgbClr val="FBBF24"/>
+                </a:solidFill>
+                <a:latin typeface="Segoe UI"/>
               </a:defRPr>
             </a:pPr>
             <a:r>
@@ -5288,16 +5983,78 @@
             </a:r>
           </a:p>
           <a:p>
-            <a:br/>
-            <a:pPr>
-              <a:defRPr sz="1300">
-                <a:solidFill>
-                  <a:srgbClr val="F8FAFC"/>
-                </a:solidFill>
-              </a:defRPr>
-            </a:pPr>
-            <a:r>
-              <a:t>Reducción del 65% en tiempo de suscripción mediante Aprobación Automática (STP) en clientes Prime y tarificación dinámica (Risk-Based Pricing).</a:t>
+            <a:pPr>
+              <a:spcAft>
+                <a:spcPts val="800"/>
+              </a:spcAft>
+            </a:pPr>
+            <a:r>
+              <a:rPr b="1" sz="1100">
+                <a:solidFill>
+                  <a:srgbClr val="38BDF8"/>
+                </a:solidFill>
+                <a:latin typeface="Segoe UI"/>
+              </a:rPr>
+              <a:t>• Procesamiento STP: </a:t>
+            </a:r>
+            <a:r>
+              <a:rPr b="0" sz="1100">
+                <a:solidFill>
+                  <a:srgbClr val="E2E8F0"/>
+                </a:solidFill>
+                <a:latin typeface="Segoe UI"/>
+              </a:rPr>
+              <a:t>Aprobación automática directa (Straight-Through Processing) en perfiles Prime (Tier A).</a:t>
+            </a:r>
+          </a:p>
+          <a:p>
+            <a:pPr>
+              <a:spcAft>
+                <a:spcPts val="800"/>
+              </a:spcAft>
+            </a:pPr>
+            <a:r>
+              <a:rPr b="1" sz="1100">
+                <a:solidFill>
+                  <a:srgbClr val="38BDF8"/>
+                </a:solidFill>
+                <a:latin typeface="Segoe UI"/>
+              </a:rPr>
+              <a:t>• Tarificación por Riesgo: </a:t>
+            </a:r>
+            <a:r>
+              <a:rPr b="0" sz="1100">
+                <a:solidFill>
+                  <a:srgbClr val="E2E8F0"/>
+                </a:solidFill>
+                <a:latin typeface="Segoe UI"/>
+              </a:rPr>
+              <a:t>Asignación dinámica de spreads (+150 a +750 bps) en función del perfil de riesgo.</a:t>
+            </a:r>
+          </a:p>
+          <a:p>
+            <a:pPr>
+              <a:spcAft>
+                <a:spcPts val="800"/>
+              </a:spcAft>
+            </a:pPr>
+            <a:r>
+              <a:rPr b="1" sz="1100">
+                <a:solidFill>
+                  <a:srgbClr val="38BDF8"/>
+                </a:solidFill>
+                <a:latin typeface="Segoe UI"/>
+              </a:rPr>
+              <a:t>• Ahorro de Costes: </a:t>
+            </a:r>
+            <a:r>
+              <a:rPr b="0" sz="1100">
+                <a:solidFill>
+                  <a:srgbClr val="E2E8F0"/>
+                </a:solidFill>
+                <a:latin typeface="Segoe UI"/>
+              </a:rPr>
+              <a:t>Reducción proyectada del 65% en tiempos de suscripción y análisis manual.</a:t>
             </a:r>
           </a:p>
         </p:txBody>
@@ -5372,7 +6129,7 @@
         <p:spPr>
           <a:xfrm>
             <a:off x="731520" y="365760"/>
-            <a:ext cx="10698480" cy="320040"/>
+            <a:ext cx="10698480" cy="292608"/>
           </a:xfrm>
           <a:prstGeom prst="rect">
             <a:avLst/>
@@ -5390,7 +6147,7 @@
                 <a:solidFill>
                   <a:srgbClr val="38BDF8"/>
                 </a:solidFill>
-                <a:latin typeface="Arial"/>
+                <a:latin typeface="Segoe UI"/>
               </a:defRPr>
             </a:pPr>
             <a:r>
@@ -5407,8 +6164,8 @@
         </p:nvSpPr>
         <p:spPr>
           <a:xfrm>
-            <a:off x="731520" y="640080"/>
-            <a:ext cx="10698480" cy="731520"/>
+            <a:off x="731520" y="658368"/>
+            <a:ext cx="10698480" cy="594360"/>
           </a:xfrm>
           <a:prstGeom prst="rect">
             <a:avLst/>
@@ -5422,11 +6179,11 @@
           <a:lstStyle/>
           <a:p>
             <a:pPr>
-              <a:defRPr sz="2400" b="1">
-                <a:solidFill>
-                  <a:srgbClr val="F8FAFC"/>
-                </a:solidFill>
-                <a:latin typeface="Arial"/>
+              <a:defRPr sz="2300" b="1">
+                <a:solidFill>
+                  <a:srgbClr val="FFFFFF"/>
+                </a:solidFill>
+                <a:latin typeface="Segoe UI"/>
               </a:defRPr>
             </a:pPr>
             <a:r>
@@ -5444,7 +6201,7 @@
         <p:spPr>
           <a:xfrm>
             <a:off x="731520" y="1463040"/>
-            <a:ext cx="3474720" cy="2194560"/>
+            <a:ext cx="3474720" cy="2240280"/>
           </a:xfrm>
           <a:prstGeom prst="roundRect">
             <a:avLst/>
@@ -5452,9 +6209,9 @@
           <a:solidFill>
             <a:srgbClr val="162035"/>
           </a:solidFill>
-          <a:ln w="15240">
+          <a:ln w="17780">
             <a:solidFill>
-              <a:srgbClr val="263452"/>
+              <a:srgbClr val="334155"/>
             </a:solidFill>
           </a:ln>
         </p:spPr>
@@ -5489,7 +6246,7 @@
         <p:spPr>
           <a:xfrm>
             <a:off x="914400" y="1645920"/>
-            <a:ext cx="3108960" cy="1828800"/>
+            <a:ext cx="3108960" cy="1920240"/>
           </a:xfrm>
           <a:prstGeom prst="rect">
             <a:avLst/>
@@ -5503,10 +6260,14 @@
           <a:lstStyle/>
           <a:p>
             <a:pPr>
-              <a:defRPr sz="1500" b="1">
+              <a:spcAft>
+                <a:spcPts val="800"/>
+              </a:spcAft>
+              <a:defRPr sz="1600" b="1">
                 <a:solidFill>
                   <a:srgbClr val="38BDF8"/>
                 </a:solidFill>
+                <a:latin typeface="Segoe UI"/>
               </a:defRPr>
             </a:pPr>
             <a:r>
@@ -5514,16 +6275,16 @@
             </a:r>
           </a:p>
           <a:p>
-            <a:br/>
             <a:pPr>
               <a:defRPr sz="1200">
                 <a:solidFill>
-                  <a:srgbClr val="F8FAFC"/>
-                </a:solidFill>
+                  <a:srgbClr val="E2E8F0"/>
+                </a:solidFill>
+                <a:latin typeface="Segoe UI"/>
               </a:defRPr>
             </a:pPr>
             <a:r>
-              <a:t>Reconstrucción temporal (vintage 2013-2022). Separación de histórico (26,616) vs cohorte Out-of-Time (5,965 obs).</a:t>
+              <a:t>Reconstrucción temporal (vintage 2013-2022). Separación de histórico (26,616) vs cohorte Out-of-Time (5,965 obs). Reportes automatizados en Excel.</a:t>
             </a:r>
           </a:p>
         </p:txBody>
@@ -5537,7 +6298,7 @@
         <p:spPr>
           <a:xfrm>
             <a:off x="4370832" y="1463040"/>
-            <a:ext cx="3474720" cy="2194560"/>
+            <a:ext cx="3474720" cy="2240280"/>
           </a:xfrm>
           <a:prstGeom prst="roundRect">
             <a:avLst/>
@@ -5545,9 +6306,9 @@
           <a:solidFill>
             <a:srgbClr val="162035"/>
           </a:solidFill>
-          <a:ln w="15240">
+          <a:ln w="17780">
             <a:solidFill>
-              <a:srgbClr val="263452"/>
+              <a:srgbClr val="334155"/>
             </a:solidFill>
           </a:ln>
         </p:spPr>
@@ -5582,7 +6343,7 @@
         <p:spPr>
           <a:xfrm>
             <a:off x="4553712" y="1645920"/>
-            <a:ext cx="3108960" cy="1828800"/>
+            <a:ext cx="3108960" cy="1920240"/>
           </a:xfrm>
           <a:prstGeom prst="rect">
             <a:avLst/>
@@ -5596,10 +6357,14 @@
           <a:lstStyle/>
           <a:p>
             <a:pPr>
-              <a:defRPr sz="1500" b="1">
+              <a:spcAft>
+                <a:spcPts val="800"/>
+              </a:spcAft>
+              <a:defRPr sz="1600" b="1">
                 <a:solidFill>
                   <a:srgbClr val="38BDF8"/>
                 </a:solidFill>
+                <a:latin typeface="Segoe UI"/>
               </a:defRPr>
             </a:pPr>
             <a:r>
@@ -5607,16 +6372,16 @@
             </a:r>
           </a:p>
           <a:p>
-            <a:br/>
             <a:pPr>
               <a:defRPr sz="1200">
                 <a:solidFill>
-                  <a:srgbClr val="F8FAFC"/>
-                </a:solidFill>
+                  <a:srgbClr val="E2E8F0"/>
+                </a:solidFill>
+                <a:latin typeface="Segoe UI"/>
               </a:defRPr>
             </a:pPr>
             <a:r>
-              <a:t>Split 80/20 estratificado por def_year. Clipping IQR en Train exclusivo (Zero Data Leakage). Mediana y dummies de nulos.</a:t>
+              <a:t>Split 80/20 estratificado por def_year. Clipping IQR en Train exclusivo (Zero Data Leakage). Imputación de nulos con medianas y dummies.</a:t>
             </a:r>
           </a:p>
         </p:txBody>
@@ -5630,7 +6395,7 @@
         <p:spPr>
           <a:xfrm>
             <a:off x="8010144" y="1463040"/>
-            <a:ext cx="3474720" cy="2194560"/>
+            <a:ext cx="3474720" cy="2240280"/>
           </a:xfrm>
           <a:prstGeom prst="roundRect">
             <a:avLst/>
@@ -5638,9 +6403,9 @@
           <a:solidFill>
             <a:srgbClr val="162035"/>
           </a:solidFill>
-          <a:ln w="15240">
+          <a:ln w="17780">
             <a:solidFill>
-              <a:srgbClr val="263452"/>
+              <a:srgbClr val="334155"/>
             </a:solidFill>
           </a:ln>
         </p:spPr>
@@ -5675,7 +6440,7 @@
         <p:spPr>
           <a:xfrm>
             <a:off x="8193024" y="1645920"/>
-            <a:ext cx="3108960" cy="1828800"/>
+            <a:ext cx="3108960" cy="1920240"/>
           </a:xfrm>
           <a:prstGeom prst="rect">
             <a:avLst/>
@@ -5689,10 +6454,14 @@
           <a:lstStyle/>
           <a:p>
             <a:pPr>
-              <a:defRPr sz="1500" b="1">
+              <a:spcAft>
+                <a:spcPts val="800"/>
+              </a:spcAft>
+              <a:defRPr sz="1600" b="1">
                 <a:solidFill>
                   <a:srgbClr val="38BDF8"/>
                 </a:solidFill>
+                <a:latin typeface="Segoe UI"/>
               </a:defRPr>
             </a:pPr>
             <a:r>
@@ -5700,16 +6469,16 @@
             </a:r>
           </a:p>
           <a:p>
-            <a:br/>
             <a:pPr>
               <a:defRPr sz="1200">
                 <a:solidFill>
-                  <a:srgbClr val="F8FAFC"/>
-                </a:solidFill>
+                  <a:srgbClr val="E2E8F0"/>
+                </a:solidFill>
+                <a:latin typeface="Segoe UI"/>
               </a:defRPr>
             </a:pPr>
             <a:r>
-              <a:t>Kruskal-Wallis para continuas vs default. V de Cramér para categóricas. Matrices Spearman inter-variables.</a:t>
+              <a:t>Kruskal-Wallis para continuas vs default. V de Cramér para categóricas. Matrices Spearman y Cramér inter-variables para multicolinealidad.</a:t>
             </a:r>
           </a:p>
         </p:txBody>
@@ -5722,8 +6491,8 @@
         </p:nvSpPr>
         <p:spPr>
           <a:xfrm>
-            <a:off x="731520" y="3886200"/>
-            <a:ext cx="3474720" cy="2194560"/>
+            <a:off x="731520" y="3931920"/>
+            <a:ext cx="3474720" cy="2240280"/>
           </a:xfrm>
           <a:prstGeom prst="roundRect">
             <a:avLst/>
@@ -5731,9 +6500,9 @@
           <a:solidFill>
             <a:srgbClr val="162035"/>
           </a:solidFill>
-          <a:ln w="15240">
+          <a:ln w="17780">
             <a:solidFill>
-              <a:srgbClr val="263452"/>
+              <a:srgbClr val="334155"/>
             </a:solidFill>
           </a:ln>
         </p:spPr>
@@ -5767,8 +6536,8 @@
         </p:nvSpPr>
         <p:spPr>
           <a:xfrm>
-            <a:off x="914400" y="4069080"/>
-            <a:ext cx="3108960" cy="1828800"/>
+            <a:off x="914400" y="4114800"/>
+            <a:ext cx="3108960" cy="1920240"/>
           </a:xfrm>
           <a:prstGeom prst="rect">
             <a:avLst/>
@@ -5782,10 +6551,14 @@
           <a:lstStyle/>
           <a:p>
             <a:pPr>
-              <a:defRPr sz="1500" b="1">
+              <a:spcAft>
+                <a:spcPts val="800"/>
+              </a:spcAft>
+              <a:defRPr sz="1600" b="1">
                 <a:solidFill>
                   <a:srgbClr val="38BDF8"/>
                 </a:solidFill>
+                <a:latin typeface="Segoe UI"/>
               </a:defRPr>
             </a:pPr>
             <a:r>
@@ -5793,16 +6566,16 @@
             </a:r>
           </a:p>
           <a:p>
-            <a:br/>
             <a:pPr>
               <a:defRPr sz="1200">
                 <a:solidFill>
-                  <a:srgbClr val="F8FAFC"/>
-                </a:solidFill>
+                  <a:srgbClr val="E2E8F0"/>
+                </a:solidFill>
+                <a:latin typeface="Segoe UI"/>
               </a:defRPr>
             </a:pPr>
             <a:r>
-              <a:t>Análisis de contingencia Chi² (Home Ownership: 1,248.48). Gráficos ejecutivos estilo Cole Nussbaumer Knaflic.</a:t>
+              <a:t>Análisis de contingencia Chi² (Home Ownership: 1,248.48, p &lt; 1e-200). Gráficos ejecutivos Cole Nussbaumer Knaflic de alta resolución.</a:t>
             </a:r>
           </a:p>
         </p:txBody>
@@ -5815,8 +6588,8 @@
         </p:nvSpPr>
         <p:spPr>
           <a:xfrm>
-            <a:off x="4370832" y="3886200"/>
-            <a:ext cx="3474720" cy="2194560"/>
+            <a:off x="4370832" y="3931920"/>
+            <a:ext cx="3474720" cy="2240280"/>
           </a:xfrm>
           <a:prstGeom prst="roundRect">
             <a:avLst/>
@@ -5824,9 +6597,9 @@
           <a:solidFill>
             <a:srgbClr val="162035"/>
           </a:solidFill>
-          <a:ln w="15240">
+          <a:ln w="17780">
             <a:solidFill>
-              <a:srgbClr val="263452"/>
+              <a:srgbClr val="334155"/>
             </a:solidFill>
           </a:ln>
         </p:spPr>
@@ -5860,8 +6633,8 @@
         </p:nvSpPr>
         <p:spPr>
           <a:xfrm>
-            <a:off x="4553712" y="4069080"/>
-            <a:ext cx="3108960" cy="1828800"/>
+            <a:off x="4553712" y="4114800"/>
+            <a:ext cx="3108960" cy="1920240"/>
           </a:xfrm>
           <a:prstGeom prst="rect">
             <a:avLst/>
@@ -5875,10 +6648,14 @@
           <a:lstStyle/>
           <a:p>
             <a:pPr>
-              <a:defRPr sz="1500" b="1">
+              <a:spcAft>
+                <a:spcPts val="800"/>
+              </a:spcAft>
+              <a:defRPr sz="1600" b="1">
                 <a:solidFill>
                   <a:srgbClr val="38BDF8"/>
                 </a:solidFill>
+                <a:latin typeface="Segoe UI"/>
               </a:defRPr>
             </a:pPr>
             <a:r>
@@ -5886,16 +6663,16 @@
             </a:r>
           </a:p>
           <a:p>
-            <a:br/>
             <a:pPr>
               <a:defRPr sz="1200">
                 <a:solidFill>
-                  <a:srgbClr val="F8FAFC"/>
-                </a:solidFill>
+                  <a:srgbClr val="E2E8F0"/>
+                </a:solidFill>
+                <a:latin typeface="Segoe UI"/>
               </a:defRPr>
             </a:pPr>
             <a:r>
-              <a:t>Monitoreo temporal ventana a ventana (2013-2021) y Train vs Test vs OOT. Todas las variables con PSI &lt; 0.10.</a:t>
+              <a:t>Monitoreo temporal ventana a ventana (2013-2021) y Train vs Test vs OOT. Todas las variables con PSI &lt; 0.02 (Estabilidad máxima).</a:t>
             </a:r>
           </a:p>
         </p:txBody>
@@ -5908,8 +6685,8 @@
         </p:nvSpPr>
         <p:spPr>
           <a:xfrm>
-            <a:off x="8010144" y="3886200"/>
-            <a:ext cx="3474720" cy="2194560"/>
+            <a:off x="8010144" y="3931920"/>
+            <a:ext cx="3474720" cy="2240280"/>
           </a:xfrm>
           <a:prstGeom prst="roundRect">
             <a:avLst/>
@@ -5917,9 +6694,9 @@
           <a:solidFill>
             <a:srgbClr val="162035"/>
           </a:solidFill>
-          <a:ln w="15240">
+          <a:ln w="17780">
             <a:solidFill>
-              <a:srgbClr val="263452"/>
+              <a:srgbClr val="334155"/>
             </a:solidFill>
           </a:ln>
         </p:spPr>
@@ -5953,8 +6730,8 @@
         </p:nvSpPr>
         <p:spPr>
           <a:xfrm>
-            <a:off x="8193024" y="4069080"/>
-            <a:ext cx="3108960" cy="1828800"/>
+            <a:off x="8193024" y="4114800"/>
+            <a:ext cx="3108960" cy="1920240"/>
           </a:xfrm>
           <a:prstGeom prst="rect">
             <a:avLst/>
@@ -5968,10 +6745,14 @@
           <a:lstStyle/>
           <a:p>
             <a:pPr>
-              <a:defRPr sz="1500" b="1">
+              <a:spcAft>
+                <a:spcPts val="800"/>
+              </a:spcAft>
+              <a:defRPr sz="1600" b="1">
                 <a:solidFill>
                   <a:srgbClr val="38BDF8"/>
                 </a:solidFill>
+                <a:latin typeface="Segoe UI"/>
               </a:defRPr>
             </a:pPr>
             <a:r>
@@ -5979,16 +6760,16 @@
             </a:r>
           </a:p>
           <a:p>
-            <a:br/>
             <a:pPr>
               <a:defRPr sz="1200">
                 <a:solidFill>
-                  <a:srgbClr val="F8FAFC"/>
-                </a:solidFill>
+                  <a:srgbClr val="E2E8F0"/>
+                </a:solidFill>
+                <a:latin typeface="Segoe UI"/>
               </a:defRPr>
             </a:pPr>
             <a:r>
-              <a:t>Pipeline multi-regla: Filtro univariado (KW/V) y multicolinealidad (Spearman/V). Reducción a 7 variables clave.</a:t>
+              <a:t>Pipeline multi-regla sobre validación cruzada: Filtro univariado (KW/V) y multicolinealidad (Spearman/V). Reducción óptima a 7 variables clave.</a:t>
             </a:r>
           </a:p>
         </p:txBody>
@@ -6063,7 +6844,7 @@
         <p:spPr>
           <a:xfrm>
             <a:off x="731520" y="365760"/>
-            <a:ext cx="10698480" cy="320040"/>
+            <a:ext cx="10698480" cy="292608"/>
           </a:xfrm>
           <a:prstGeom prst="rect">
             <a:avLst/>
@@ -6081,7 +6862,7 @@
                 <a:solidFill>
                   <a:srgbClr val="38BDF8"/>
                 </a:solidFill>
-                <a:latin typeface="Arial"/>
+                <a:latin typeface="Segoe UI"/>
               </a:defRPr>
             </a:pPr>
             <a:r>
@@ -6098,8 +6879,8 @@
         </p:nvSpPr>
         <p:spPr>
           <a:xfrm>
-            <a:off x="731520" y="640080"/>
-            <a:ext cx="10698480" cy="731520"/>
+            <a:off x="731520" y="658368"/>
+            <a:ext cx="10698480" cy="594360"/>
           </a:xfrm>
           <a:prstGeom prst="rect">
             <a:avLst/>
@@ -6113,11 +6894,11 @@
           <a:lstStyle/>
           <a:p>
             <a:pPr>
-              <a:defRPr sz="2400" b="1">
-                <a:solidFill>
-                  <a:srgbClr val="F8FAFC"/>
-                </a:solidFill>
-                <a:latin typeface="Arial"/>
+              <a:defRPr sz="2300" b="1">
+                <a:solidFill>
+                  <a:srgbClr val="FFFFFF"/>
+                </a:solidFill>
+                <a:latin typeface="Segoe UI"/>
               </a:defRPr>
             </a:pPr>
             <a:r>
@@ -6126,16 +6907,533 @@
           </a:p>
         </p:txBody>
       </p:sp>
-      <p:sp>
-        <p:nvSpPr>
-          <p:cNvPr id="5" name="Rounded Rectangle 4"/>
+      <p:graphicFrame>
+        <p:nvGraphicFramePr>
+          <p:cNvPr id="5" name="Table 4"/>
+          <p:cNvGraphicFramePr>
+            <a:graphicFrameLocks noGrp="1"/>
+          </p:cNvGraphicFramePr>
+          <p:nvPr/>
+        </p:nvGraphicFramePr>
+        <p:xfrm>
+          <a:off x="731520" y="1371600"/>
+          <a:ext cx="5303520" cy="2194560"/>
+        </p:xfrm>
+        <a:graphic>
+          <a:graphicData uri="http://schemas.openxmlformats.org/drawingml/2006/table">
+            <a:tbl>
+              <a:tblPr firstRow="1" bandRow="1">
+                <a:tableStyleId>{5C22544A-7EE6-4342-B048-85BDC9FD1C3A}</a:tableStyleId>
+              </a:tblPr>
+              <a:tblGrid>
+                <a:gridCol w="1097280"/>
+                <a:gridCol w="1005840"/>
+                <a:gridCol w="914400"/>
+                <a:gridCol w="1005840"/>
+                <a:gridCol w="1280160"/>
+              </a:tblGrid>
+              <a:tr h="548640">
+                <a:tc>
+                  <a:txBody>
+                    <a:bodyPr/>
+                    <a:lstStyle/>
+                    <a:p>
+                      <a:pPr algn="ctr">
+                        <a:defRPr sz="1100" b="1">
+                          <a:solidFill>
+                            <a:srgbClr val="38BDF8"/>
+                          </a:solidFill>
+                          <a:latin typeface="Segoe UI"/>
+                        </a:defRPr>
+                      </a:pPr>
+                      <a:r>
+                        <a:t>Partición</a:t>
+                      </a:r>
+                    </a:p>
+                  </a:txBody>
+                  <a:tcPr anchor="ctr">
+                    <a:solidFill>
+                      <a:srgbClr val="1E293B"/>
+                    </a:solidFill>
+                  </a:tcPr>
+                </a:tc>
+                <a:tc>
+                  <a:txBody>
+                    <a:bodyPr/>
+                    <a:lstStyle/>
+                    <a:p>
+                      <a:pPr algn="ctr">
+                        <a:defRPr sz="1100" b="1">
+                          <a:solidFill>
+                            <a:srgbClr val="38BDF8"/>
+                          </a:solidFill>
+                          <a:latin typeface="Segoe UI"/>
+                        </a:defRPr>
+                      </a:pPr>
+                      <a:r>
+                        <a:t>Volumen</a:t>
+                      </a:r>
+                    </a:p>
+                  </a:txBody>
+                  <a:tcPr anchor="ctr">
+                    <a:solidFill>
+                      <a:srgbClr val="1E293B"/>
+                    </a:solidFill>
+                  </a:tcPr>
+                </a:tc>
+                <a:tc>
+                  <a:txBody>
+                    <a:bodyPr/>
+                    <a:lstStyle/>
+                    <a:p>
+                      <a:pPr algn="ctr">
+                        <a:defRPr sz="1100" b="1">
+                          <a:solidFill>
+                            <a:srgbClr val="38BDF8"/>
+                          </a:solidFill>
+                          <a:latin typeface="Segoe UI"/>
+                        </a:defRPr>
+                      </a:pPr>
+                      <a:r>
+                        <a:t>% Total</a:t>
+                      </a:r>
+                    </a:p>
+                  </a:txBody>
+                  <a:tcPr anchor="ctr">
+                    <a:solidFill>
+                      <a:srgbClr val="1E293B"/>
+                    </a:solidFill>
+                  </a:tcPr>
+                </a:tc>
+                <a:tc>
+                  <a:txBody>
+                    <a:bodyPr/>
+                    <a:lstStyle/>
+                    <a:p>
+                      <a:pPr algn="ctr">
+                        <a:defRPr sz="1100" b="1">
+                          <a:solidFill>
+                            <a:srgbClr val="38BDF8"/>
+                          </a:solidFill>
+                          <a:latin typeface="Segoe UI"/>
+                        </a:defRPr>
+                      </a:pPr>
+                      <a:r>
+                        <a:t>Defaults</a:t>
+                      </a:r>
+                    </a:p>
+                  </a:txBody>
+                  <a:tcPr anchor="ctr">
+                    <a:solidFill>
+                      <a:srgbClr val="1E293B"/>
+                    </a:solidFill>
+                  </a:tcPr>
+                </a:tc>
+                <a:tc>
+                  <a:txBody>
+                    <a:bodyPr/>
+                    <a:lstStyle/>
+                    <a:p>
+                      <a:pPr algn="ctr">
+                        <a:defRPr sz="1100" b="1">
+                          <a:solidFill>
+                            <a:srgbClr val="38BDF8"/>
+                          </a:solidFill>
+                          <a:latin typeface="Segoe UI"/>
+                        </a:defRPr>
+                      </a:pPr>
+                      <a:r>
+                        <a:t>Tasa Default</a:t>
+                      </a:r>
+                    </a:p>
+                  </a:txBody>
+                  <a:tcPr anchor="ctr">
+                    <a:solidFill>
+                      <a:srgbClr val="1E293B"/>
+                    </a:solidFill>
+                  </a:tcPr>
+                </a:tc>
+              </a:tr>
+              <a:tr h="548640">
+                <a:tc>
+                  <a:txBody>
+                    <a:bodyPr/>
+                    <a:lstStyle/>
+                    <a:p>
+                      <a:pPr algn="l">
+                        <a:defRPr sz="1050">
+                          <a:solidFill>
+                            <a:srgbClr val="FFFFFF"/>
+                          </a:solidFill>
+                          <a:latin typeface="Segoe UI"/>
+                        </a:defRPr>
+                      </a:pPr>
+                      <a:r>
+                        <a:t>Train (Desarrollo)</a:t>
+                      </a:r>
+                    </a:p>
+                  </a:txBody>
+                  <a:tcPr anchor="ctr">
+                    <a:solidFill>
+                      <a:srgbClr val="162035"/>
+                    </a:solidFill>
+                  </a:tcPr>
+                </a:tc>
+                <a:tc>
+                  <a:txBody>
+                    <a:bodyPr/>
+                    <a:lstStyle/>
+                    <a:p>
+                      <a:pPr algn="ctr">
+                        <a:defRPr sz="1050">
+                          <a:solidFill>
+                            <a:srgbClr val="FFFFFF"/>
+                          </a:solidFill>
+                          <a:latin typeface="Segoe UI"/>
+                        </a:defRPr>
+                      </a:pPr>
+                      <a:r>
+                        <a:t>21,292</a:t>
+                      </a:r>
+                    </a:p>
+                  </a:txBody>
+                  <a:tcPr anchor="ctr">
+                    <a:solidFill>
+                      <a:srgbClr val="162035"/>
+                    </a:solidFill>
+                  </a:tcPr>
+                </a:tc>
+                <a:tc>
+                  <a:txBody>
+                    <a:bodyPr/>
+                    <a:lstStyle/>
+                    <a:p>
+                      <a:pPr algn="ctr">
+                        <a:defRPr sz="1050">
+                          <a:solidFill>
+                            <a:srgbClr val="FFFFFF"/>
+                          </a:solidFill>
+                          <a:latin typeface="Segoe UI"/>
+                        </a:defRPr>
+                      </a:pPr>
+                      <a:r>
+                        <a:t>65.3%</a:t>
+                      </a:r>
+                    </a:p>
+                  </a:txBody>
+                  <a:tcPr anchor="ctr">
+                    <a:solidFill>
+                      <a:srgbClr val="162035"/>
+                    </a:solidFill>
+                  </a:tcPr>
+                </a:tc>
+                <a:tc>
+                  <a:txBody>
+                    <a:bodyPr/>
+                    <a:lstStyle/>
+                    <a:p>
+                      <a:pPr algn="ctr">
+                        <a:defRPr sz="1050">
+                          <a:solidFill>
+                            <a:srgbClr val="FFFFFF"/>
+                          </a:solidFill>
+                          <a:latin typeface="Segoe UI"/>
+                        </a:defRPr>
+                      </a:pPr>
+                      <a:r>
+                        <a:t>4,562</a:t>
+                      </a:r>
+                    </a:p>
+                  </a:txBody>
+                  <a:tcPr anchor="ctr">
+                    <a:solidFill>
+                      <a:srgbClr val="162035"/>
+                    </a:solidFill>
+                  </a:tcPr>
+                </a:tc>
+                <a:tc>
+                  <a:txBody>
+                    <a:bodyPr/>
+                    <a:lstStyle/>
+                    <a:p>
+                      <a:pPr algn="ctr">
+                        <a:defRPr sz="1050">
+                          <a:solidFill>
+                            <a:srgbClr val="FFFFFF"/>
+                          </a:solidFill>
+                          <a:latin typeface="Segoe UI"/>
+                        </a:defRPr>
+                      </a:pPr>
+                      <a:r>
+                        <a:t>21.43%</a:t>
+                      </a:r>
+                    </a:p>
+                  </a:txBody>
+                  <a:tcPr anchor="ctr">
+                    <a:solidFill>
+                      <a:srgbClr val="162035"/>
+                    </a:solidFill>
+                  </a:tcPr>
+                </a:tc>
+              </a:tr>
+              <a:tr h="548640">
+                <a:tc>
+                  <a:txBody>
+                    <a:bodyPr/>
+                    <a:lstStyle/>
+                    <a:p>
+                      <a:pPr algn="l">
+                        <a:defRPr sz="1050">
+                          <a:solidFill>
+                            <a:srgbClr val="FFFFFF"/>
+                          </a:solidFill>
+                          <a:latin typeface="Segoe UI"/>
+                        </a:defRPr>
+                      </a:pPr>
+                      <a:r>
+                        <a:t>Test (Out-of-Sample)</a:t>
+                      </a:r>
+                    </a:p>
+                  </a:txBody>
+                  <a:tcPr anchor="ctr">
+                    <a:solidFill>
+                      <a:srgbClr val="101828"/>
+                    </a:solidFill>
+                  </a:tcPr>
+                </a:tc>
+                <a:tc>
+                  <a:txBody>
+                    <a:bodyPr/>
+                    <a:lstStyle/>
+                    <a:p>
+                      <a:pPr algn="ctr">
+                        <a:defRPr sz="1050">
+                          <a:solidFill>
+                            <a:srgbClr val="FFFFFF"/>
+                          </a:solidFill>
+                          <a:latin typeface="Segoe UI"/>
+                        </a:defRPr>
+                      </a:pPr>
+                      <a:r>
+                        <a:t>5,324</a:t>
+                      </a:r>
+                    </a:p>
+                  </a:txBody>
+                  <a:tcPr anchor="ctr">
+                    <a:solidFill>
+                      <a:srgbClr val="101828"/>
+                    </a:solidFill>
+                  </a:tcPr>
+                </a:tc>
+                <a:tc>
+                  <a:txBody>
+                    <a:bodyPr/>
+                    <a:lstStyle/>
+                    <a:p>
+                      <a:pPr algn="ctr">
+                        <a:defRPr sz="1050">
+                          <a:solidFill>
+                            <a:srgbClr val="FFFFFF"/>
+                          </a:solidFill>
+                          <a:latin typeface="Segoe UI"/>
+                        </a:defRPr>
+                      </a:pPr>
+                      <a:r>
+                        <a:t>16.3%</a:t>
+                      </a:r>
+                    </a:p>
+                  </a:txBody>
+                  <a:tcPr anchor="ctr">
+                    <a:solidFill>
+                      <a:srgbClr val="101828"/>
+                    </a:solidFill>
+                  </a:tcPr>
+                </a:tc>
+                <a:tc>
+                  <a:txBody>
+                    <a:bodyPr/>
+                    <a:lstStyle/>
+                    <a:p>
+                      <a:pPr algn="ctr">
+                        <a:defRPr sz="1050">
+                          <a:solidFill>
+                            <a:srgbClr val="FFFFFF"/>
+                          </a:solidFill>
+                          <a:latin typeface="Segoe UI"/>
+                        </a:defRPr>
+                      </a:pPr>
+                      <a:r>
+                        <a:t>1,140</a:t>
+                      </a:r>
+                    </a:p>
+                  </a:txBody>
+                  <a:tcPr anchor="ctr">
+                    <a:solidFill>
+                      <a:srgbClr val="101828"/>
+                    </a:solidFill>
+                  </a:tcPr>
+                </a:tc>
+                <a:tc>
+                  <a:txBody>
+                    <a:bodyPr/>
+                    <a:lstStyle/>
+                    <a:p>
+                      <a:pPr algn="ctr">
+                        <a:defRPr sz="1050">
+                          <a:solidFill>
+                            <a:srgbClr val="FFFFFF"/>
+                          </a:solidFill>
+                          <a:latin typeface="Segoe UI"/>
+                        </a:defRPr>
+                      </a:pPr>
+                      <a:r>
+                        <a:t>21.41%</a:t>
+                      </a:r>
+                    </a:p>
+                  </a:txBody>
+                  <a:tcPr anchor="ctr">
+                    <a:solidFill>
+                      <a:srgbClr val="101828"/>
+                    </a:solidFill>
+                  </a:tcPr>
+                </a:tc>
+              </a:tr>
+              <a:tr h="548640">
+                <a:tc>
+                  <a:txBody>
+                    <a:bodyPr/>
+                    <a:lstStyle/>
+                    <a:p>
+                      <a:pPr algn="l">
+                        <a:defRPr sz="1050">
+                          <a:solidFill>
+                            <a:srgbClr val="FFFFFF"/>
+                          </a:solidFill>
+                          <a:latin typeface="Segoe UI"/>
+                        </a:defRPr>
+                      </a:pPr>
+                      <a:r>
+                        <a:t>OOT (Temporal 2022)</a:t>
+                      </a:r>
+                    </a:p>
+                  </a:txBody>
+                  <a:tcPr anchor="ctr">
+                    <a:solidFill>
+                      <a:srgbClr val="162035"/>
+                    </a:solidFill>
+                  </a:tcPr>
+                </a:tc>
+                <a:tc>
+                  <a:txBody>
+                    <a:bodyPr/>
+                    <a:lstStyle/>
+                    <a:p>
+                      <a:pPr algn="ctr">
+                        <a:defRPr sz="1050">
+                          <a:solidFill>
+                            <a:srgbClr val="FFFFFF"/>
+                          </a:solidFill>
+                          <a:latin typeface="Segoe UI"/>
+                        </a:defRPr>
+                      </a:pPr>
+                      <a:r>
+                        <a:t>5,965</a:t>
+                      </a:r>
+                    </a:p>
+                  </a:txBody>
+                  <a:tcPr anchor="ctr">
+                    <a:solidFill>
+                      <a:srgbClr val="162035"/>
+                    </a:solidFill>
+                  </a:tcPr>
+                </a:tc>
+                <a:tc>
+                  <a:txBody>
+                    <a:bodyPr/>
+                    <a:lstStyle/>
+                    <a:p>
+                      <a:pPr algn="ctr">
+                        <a:defRPr sz="1050">
+                          <a:solidFill>
+                            <a:srgbClr val="FFFFFF"/>
+                          </a:solidFill>
+                          <a:latin typeface="Segoe UI"/>
+                        </a:defRPr>
+                      </a:pPr>
+                      <a:r>
+                        <a:t>18.3%</a:t>
+                      </a:r>
+                    </a:p>
+                  </a:txBody>
+                  <a:tcPr anchor="ctr">
+                    <a:solidFill>
+                      <a:srgbClr val="162035"/>
+                    </a:solidFill>
+                  </a:tcPr>
+                </a:tc>
+                <a:tc>
+                  <a:txBody>
+                    <a:bodyPr/>
+                    <a:lstStyle/>
+                    <a:p>
+                      <a:pPr algn="ctr">
+                        <a:defRPr sz="1050">
+                          <a:solidFill>
+                            <a:srgbClr val="FFFFFF"/>
+                          </a:solidFill>
+                          <a:latin typeface="Segoe UI"/>
+                        </a:defRPr>
+                      </a:pPr>
+                      <a:r>
+                        <a:t>1,406</a:t>
+                      </a:r>
+                    </a:p>
+                  </a:txBody>
+                  <a:tcPr anchor="ctr">
+                    <a:solidFill>
+                      <a:srgbClr val="162035"/>
+                    </a:solidFill>
+                  </a:tcPr>
+                </a:tc>
+                <a:tc>
+                  <a:txBody>
+                    <a:bodyPr/>
+                    <a:lstStyle/>
+                    <a:p>
+                      <a:pPr algn="ctr">
+                        <a:defRPr sz="1050">
+                          <a:solidFill>
+                            <a:srgbClr val="FFFFFF"/>
+                          </a:solidFill>
+                          <a:latin typeface="Segoe UI"/>
+                        </a:defRPr>
+                      </a:pPr>
+                      <a:r>
+                        <a:t>23.57%</a:t>
+                      </a:r>
+                    </a:p>
+                  </a:txBody>
+                  <a:tcPr anchor="ctr">
+                    <a:solidFill>
+                      <a:srgbClr val="162035"/>
+                    </a:solidFill>
+                  </a:tcPr>
+                </a:tc>
+              </a:tr>
+            </a:tbl>
+          </a:graphicData>
+        </a:graphic>
+      </p:graphicFrame>
+      <p:sp>
+        <p:nvSpPr>
+          <p:cNvPr id="6" name="Rounded Rectangle 5"/>
           <p:cNvSpPr/>
           <p:nvPr/>
         </p:nvSpPr>
         <p:spPr>
           <a:xfrm>
-            <a:off x="731520" y="1463040"/>
-            <a:ext cx="6858000" cy="4754880"/>
+            <a:off x="731520" y="3749039"/>
+            <a:ext cx="5303520" cy="2651760"/>
           </a:xfrm>
           <a:prstGeom prst="roundRect">
             <a:avLst/>
@@ -6143,9 +7441,9 @@
           <a:solidFill>
             <a:srgbClr val="162035"/>
           </a:solidFill>
-          <a:ln w="15240">
+          <a:ln w="17780">
             <a:solidFill>
-              <a:srgbClr val="263452"/>
+              <a:srgbClr val="334155"/>
             </a:solidFill>
           </a:ln>
         </p:spPr>
@@ -6173,14 +7471,14 @@
       </p:sp>
       <p:sp>
         <p:nvSpPr>
-          <p:cNvPr id="6" name="TextBox 5"/>
+          <p:cNvPr id="7" name="TextBox 6"/>
           <p:cNvSpPr txBox="1"/>
           <p:nvPr/>
         </p:nvSpPr>
         <p:spPr>
           <a:xfrm>
-            <a:off x="914400" y="1645920"/>
-            <a:ext cx="6492240" cy="4389120"/>
+            <a:off x="914400" y="3886200"/>
+            <a:ext cx="4937760" cy="2377440"/>
           </a:xfrm>
           <a:prstGeom prst="rect">
             <a:avLst/>
@@ -6194,93 +7492,107 @@
           <a:lstStyle/>
           <a:p>
             <a:pPr>
-              <a:defRPr sz="1800" b="1">
-                <a:solidFill>
-                  <a:srgbClr val="F8FAFC"/>
-                </a:solidFill>
+              <a:spcAft>
+                <a:spcPts val="800"/>
+              </a:spcAft>
+              <a:defRPr sz="1500" b="1">
+                <a:solidFill>
+                  <a:srgbClr val="34D399"/>
+                </a:solidFill>
+                <a:latin typeface="Segoe UI"/>
               </a:defRPr>
             </a:pPr>
             <a:r>
-              <a:t>Estructura de Datasets y Tasas de Incumplimiento</a:t>
-            </a:r>
-          </a:p>
-          <a:p>
-            <a:br/>
-            <a:pPr>
-              <a:defRPr sz="1300">
-                <a:solidFill>
-                  <a:srgbClr val="F8FAFC"/>
-                </a:solidFill>
-              </a:defRPr>
-            </a:pPr>
-            <a:r>
-              <a:t>• TRAIN (Entrenamiento):</a:t>
-            </a:r>
-            <a:br/>
-            <a:r>
-              <a:t>   - Volumen: 21,292 observaciones (65.3% del total)</a:t>
-            </a:r>
-            <a:br/>
-            <a:r>
-              <a:t>   - Incumplimientos: 4,562 casos (Tasa de Default: 21.43%)</a:t>
-            </a:r>
-            <a:br/>
-            <a:r>
-              <a:t>   - Propósito: Calibración de parámetros, clipping IQR e imputación.</a:t>
-            </a:r>
-            <a:br/>
-            <a:br/>
-            <a:r>
-              <a:t>• TEST (Prueba Out-of-Sample):</a:t>
-            </a:r>
-            <a:br/>
-            <a:r>
-              <a:t>   - Volumen: 5,324 observaciones (16.3% del total)</a:t>
-            </a:r>
-            <a:br/>
-            <a:r>
-              <a:t>   - Incumplimientos: 1,140 casos (Tasa de Default: 21.41%)</a:t>
-            </a:r>
-            <a:br/>
-            <a:r>
-              <a:t>   - Propósito: Evaluación no sesgada del poder de discriminación.</a:t>
-            </a:r>
-            <a:br/>
-            <a:br/>
-            <a:r>
-              <a:t>• OUT-OF-TIME (OOT - Validación Temporal 2022):</a:t>
-            </a:r>
-            <a:br/>
-            <a:r>
-              <a:t>   - Volumen: 5,965 observaciones (18.3% del total)</a:t>
-            </a:r>
-            <a:br/>
-            <a:r>
-              <a:t>   - Incumplimientos: 1,406 casos (Tasa de Default: 23.57%)</a:t>
-            </a:r>
-            <a:br/>
-            <a:r>
-              <a:t>   - Propósito: Auditoría de deriva macroeconómica y estabilidad temporal.</a:t>
-            </a:r>
-            <a:br/>
-            <a:br/>
-            <a:r>
-              <a:t>TOTAL ANALIZADO: 32,581 registros | 7,108 defaults (21.82% global)</a:t>
-            </a:r>
-            <a:br/>
-          </a:p>
-        </p:txBody>
-      </p:sp>
-      <p:sp>
-        <p:nvSpPr>
-          <p:cNvPr id="7" name="Rounded Rectangle 6"/>
+              <a:t>Garantías Metodológicas Anti-Fuga (Zero Leakage)</a:t>
+            </a:r>
+          </a:p>
+          <a:p>
+            <a:pPr>
+              <a:spcAft>
+                <a:spcPts val="600"/>
+              </a:spcAft>
+            </a:pPr>
+            <a:r>
+              <a:rPr b="1" sz="1100">
+                <a:solidFill>
+                  <a:srgbClr val="38BDF8"/>
+                </a:solidFill>
+                <a:latin typeface="Segoe UI"/>
+              </a:rPr>
+              <a:t>1. Aislamiento Estricto: </a:t>
+            </a:r>
+            <a:r>
+              <a:rPr b="0" sz="1100">
+                <a:solidFill>
+                  <a:srgbClr val="E2E8F0"/>
+                </a:solidFill>
+                <a:latin typeface="Segoe UI"/>
+              </a:rPr>
+              <a:t>Los cuartiles IQR de clipping y la mediana de imputación se calcularon únicamente sobre Train.</a:t>
+            </a:r>
+          </a:p>
+          <a:p>
+            <a:pPr>
+              <a:spcAft>
+                <a:spcPts val="600"/>
+              </a:spcAft>
+            </a:pPr>
+            <a:r>
+              <a:rPr b="1" sz="1100">
+                <a:solidFill>
+                  <a:srgbClr val="38BDF8"/>
+                </a:solidFill>
+                <a:latin typeface="Segoe UI"/>
+              </a:rPr>
+              <a:t>2. Estratificación Bivariada: </a:t>
+            </a:r>
+            <a:r>
+              <a:rPr b="0" sz="1100">
+                <a:solidFill>
+                  <a:srgbClr val="E2E8F0"/>
+                </a:solidFill>
+                <a:latin typeface="Segoe UI"/>
+              </a:rPr>
+              <a:t>El split preservó la tasa exacta de default combinando target y año (def_year).</a:t>
+            </a:r>
+          </a:p>
+          <a:p>
+            <a:pPr>
+              <a:spcAft>
+                <a:spcPts val="400"/>
+              </a:spcAft>
+            </a:pPr>
+            <a:r>
+              <a:rPr b="1" sz="1100">
+                <a:solidFill>
+                  <a:srgbClr val="38BDF8"/>
+                </a:solidFill>
+                <a:latin typeface="Segoe UI"/>
+              </a:rPr>
+              <a:t>3. Muestra Ciega Out-of-Time: </a:t>
+            </a:r>
+            <a:r>
+              <a:rPr b="0" sz="1100">
+                <a:solidFill>
+                  <a:srgbClr val="E2E8F0"/>
+                </a:solidFill>
+                <a:latin typeface="Segoe UI"/>
+              </a:rPr>
+              <a:t>La cohorte 2022 (OOT) evalúa la estabilidad frente a shocks temporales reales.</a:t>
+            </a:r>
+          </a:p>
+        </p:txBody>
+      </p:sp>
+      <p:sp>
+        <p:nvSpPr>
+          <p:cNvPr id="8" name="Rounded Rectangle 7"/>
           <p:cNvSpPr/>
           <p:nvPr/>
         </p:nvSpPr>
         <p:spPr>
           <a:xfrm>
-            <a:off x="7863840" y="1463040"/>
-            <a:ext cx="3566160" cy="4754880"/>
+            <a:off x="6309360" y="1371600"/>
+            <a:ext cx="5120640" cy="5029200"/>
           </a:xfrm>
           <a:prstGeom prst="roundRect">
             <a:avLst/>
@@ -6288,9 +7600,9 @@
           <a:solidFill>
             <a:srgbClr val="162035"/>
           </a:solidFill>
-          <a:ln w="15240">
+          <a:ln w="17780">
             <a:solidFill>
-              <a:srgbClr val="263452"/>
+              <a:srgbClr val="334155"/>
             </a:solidFill>
           </a:ln>
         </p:spPr>
@@ -6316,77 +7628,30 @@
           </a:p>
         </p:txBody>
       </p:sp>
-      <p:sp>
-        <p:nvSpPr>
-          <p:cNvPr id="8" name="TextBox 7"/>
-          <p:cNvSpPr txBox="1"/>
+      <p:pic>
+        <p:nvPicPr>
+          <p:cNvPr id="9" name="Picture 8" descr="chart_splits.png"/>
+          <p:cNvPicPr>
+            <a:picLocks noChangeAspect="1"/>
+          </p:cNvPicPr>
           <p:nvPr/>
-        </p:nvSpPr>
+        </p:nvPicPr>
+        <p:blipFill>
+          <a:blip r:embed="rId2"/>
+          <a:stretch>
+            <a:fillRect/>
+          </a:stretch>
+        </p:blipFill>
         <p:spPr>
           <a:xfrm>
-            <a:off x="8046720" y="1645920"/>
-            <a:ext cx="3200400" cy="4389120"/>
+            <a:off x="6400800" y="1463040"/>
+            <a:ext cx="4937760" cy="4754880"/>
           </a:xfrm>
           <a:prstGeom prst="rect">
             <a:avLst/>
           </a:prstGeom>
-          <a:noFill/>
         </p:spPr>
-        <p:txBody>
-          <a:bodyPr wrap="square">
-            <a:spAutoFit/>
-          </a:bodyPr>
-          <a:lstStyle/>
-          <a:p>
-            <a:pPr>
-              <a:defRPr sz="1800" b="1">
-                <a:solidFill>
-                  <a:srgbClr val="10B981"/>
-                </a:solidFill>
-              </a:defRPr>
-            </a:pPr>
-            <a:r>
-              <a:t>Garantías Anti-Leakage</a:t>
-            </a:r>
-          </a:p>
-          <a:p>
-            <a:br/>
-            <a:pPr>
-              <a:defRPr sz="1300">
-                <a:solidFill>
-                  <a:srgbClr val="F8FAFC"/>
-                </a:solidFill>
-              </a:defRPr>
-            </a:pPr>
-            <a:r>
-              <a:t>1. Aislamiento Estricto:</a:t>
-            </a:r>
-            <a:br/>
-            <a:r>
-              <a:t>Los cuartiles IQR y la mediana para imputación se computan exclusivamente en Train. Test y OOT se procesan como 'datos ciegos'.</a:t>
-            </a:r>
-            <a:br/>
-            <a:br/>
-            <a:r>
-              <a:t>2. Estratificación Bivariada:</a:t>
-            </a:r>
-            <a:br/>
-            <a:r>
-              <a:t>El split utiliza la variable sintética def_year, asegurando paridad exacta de la tasa de default entre folds y años.</a:t>
-            </a:r>
-            <a:br/>
-            <a:br/>
-            <a:r>
-              <a:t>3. Validación Temporal OOT:</a:t>
-            </a:r>
-            <a:br/>
-            <a:r>
-              <a:t>Simula el escenario real de producción evaluando prestatarios de la cohorte más reciente.</a:t>
-            </a:r>
-            <a:br/>
-          </a:p>
-        </p:txBody>
-      </p:sp>
+      </p:pic>
     </p:spTree>
   </p:cSld>
   <p:clrMapOvr>
@@ -6457,7 +7722,7 @@
         <p:spPr>
           <a:xfrm>
             <a:off x="731520" y="365760"/>
-            <a:ext cx="10698480" cy="320040"/>
+            <a:ext cx="10698480" cy="292608"/>
           </a:xfrm>
           <a:prstGeom prst="rect">
             <a:avLst/>
@@ -6475,7 +7740,7 @@
                 <a:solidFill>
                   <a:srgbClr val="38BDF8"/>
                 </a:solidFill>
-                <a:latin typeface="Arial"/>
+                <a:latin typeface="Segoe UI"/>
               </a:defRPr>
             </a:pPr>
             <a:r>
@@ -6492,8 +7757,8 @@
         </p:nvSpPr>
         <p:spPr>
           <a:xfrm>
-            <a:off x="731520" y="640080"/>
-            <a:ext cx="10698480" cy="731520"/>
+            <a:off x="731520" y="658368"/>
+            <a:ext cx="10698480" cy="594360"/>
           </a:xfrm>
           <a:prstGeom prst="rect">
             <a:avLst/>
@@ -6507,11 +7772,11 @@
           <a:lstStyle/>
           <a:p>
             <a:pPr>
-              <a:defRPr sz="2400" b="1">
-                <a:solidFill>
-                  <a:srgbClr val="F8FAFC"/>
-                </a:solidFill>
-                <a:latin typeface="Arial"/>
+              <a:defRPr sz="2300" b="1">
+                <a:solidFill>
+                  <a:srgbClr val="FFFFFF"/>
+                </a:solidFill>
+                <a:latin typeface="Segoe UI"/>
               </a:defRPr>
             </a:pPr>
             <a:r>
@@ -6528,8 +7793,8 @@
         </p:nvSpPr>
         <p:spPr>
           <a:xfrm>
-            <a:off x="731520" y="1463040"/>
-            <a:ext cx="5120640" cy="4754880"/>
+            <a:off x="731520" y="1371600"/>
+            <a:ext cx="5394960" cy="5029200"/>
           </a:xfrm>
           <a:prstGeom prst="roundRect">
             <a:avLst/>
@@ -6537,9 +7802,9 @@
           <a:solidFill>
             <a:srgbClr val="162035"/>
           </a:solidFill>
-          <a:ln w="15240">
+          <a:ln w="17780">
             <a:solidFill>
-              <a:srgbClr val="263452"/>
+              <a:srgbClr val="334155"/>
             </a:solidFill>
           </a:ln>
         </p:spPr>
@@ -6565,99 +7830,30 @@
           </a:p>
         </p:txBody>
       </p:sp>
-      <p:sp>
-        <p:nvSpPr>
-          <p:cNvPr id="6" name="TextBox 5"/>
-          <p:cNvSpPr txBox="1"/>
+      <p:pic>
+        <p:nvPicPr>
+          <p:cNvPr id="6" name="Picture 5" descr="default_by_ownership.png"/>
+          <p:cNvPicPr>
+            <a:picLocks noChangeAspect="1"/>
+          </p:cNvPicPr>
           <p:nvPr/>
-        </p:nvSpPr>
+        </p:nvPicPr>
+        <p:blipFill>
+          <a:blip r:embed="rId2"/>
+          <a:stretch>
+            <a:fillRect/>
+          </a:stretch>
+        </p:blipFill>
         <p:spPr>
           <a:xfrm>
-            <a:off x="914400" y="1645920"/>
-            <a:ext cx="4754880" cy="4389120"/>
+            <a:off x="868680" y="1691640"/>
+            <a:ext cx="5120640" cy="4297680"/>
           </a:xfrm>
           <a:prstGeom prst="rect">
             <a:avLst/>
           </a:prstGeom>
-          <a:noFill/>
         </p:spPr>
-        <p:txBody>
-          <a:bodyPr wrap="square">
-            <a:spAutoFit/>
-          </a:bodyPr>
-          <a:lstStyle/>
-          <a:p>
-            <a:pPr>
-              <a:defRPr sz="1800" b="1">
-                <a:solidFill>
-                  <a:srgbClr val="38BDF8"/>
-                </a:solidFill>
-              </a:defRPr>
-            </a:pPr>
-            <a:r>
-              <a:t>Régimen de Vivienda vs Default Rate</a:t>
-            </a:r>
-          </a:p>
-          <a:p>
-            <a:br/>
-            <a:pPr>
-              <a:defRPr sz="1300">
-                <a:solidFill>
-                  <a:srgbClr val="F8FAFC"/>
-                </a:solidFill>
-              </a:defRPr>
-            </a:pPr>
-            <a:r>
-              <a:t>Chi-cuadrado: 1,248.48 (p &lt; 1e-200) | Cramér's V = 0.242</a:t>
-            </a:r>
-            <a:br/>
-            <a:br/>
-            <a:r>
-              <a:t>• OWN (Vivienda Propia):</a:t>
-            </a:r>
-            <a:br/>
-            <a:r>
-              <a:t>   - Tasa de Default: 7.32% (Mínimo riesgo)</a:t>
-            </a:r>
-            <a:br/>
-            <a:r>
-              <a:t>   - Participación: 8.0% de los solicitantes</a:t>
-            </a:r>
-            <a:br/>
-            <a:br/>
-            <a:r>
-              <a:t>• MORTGAGE (Hipoteca Activa):</a:t>
-            </a:r>
-            <a:br/>
-            <a:r>
-              <a:t>   - Tasa de Default: 12.58% (Riesgo moderado-bajo)</a:t>
-            </a:r>
-            <a:br/>
-            <a:r>
-              <a:t>   - Participación: 41.2% de los solicitantes</a:t>
-            </a:r>
-            <a:br/>
-            <a:br/>
-            <a:r>
-              <a:t>• RENT (Alquiler):</a:t>
-            </a:r>
-            <a:br/>
-            <a:r>
-              <a:t>   - Tasa de Default: 31.32% (Alto riesgo)</a:t>
-            </a:r>
-            <a:br/>
-            <a:r>
-              <a:t>   - Participación: 50.4% de los solicitantes</a:t>
-            </a:r>
-            <a:br/>
-            <a:br/>
-            <a:r>
-              <a:t>Insight Clave: Los inquilinos presentan un riesgo 4.3 veces superior respecto a propietarios de vivienda libre de cargas.</a:t>
-            </a:r>
-            <a:br/>
-          </a:p>
-        </p:txBody>
-      </p:sp>
+      </p:pic>
       <p:sp>
         <p:nvSpPr>
           <p:cNvPr id="7" name="Rounded Rectangle 6"/>
@@ -6666,8 +7862,8 @@
         </p:nvSpPr>
         <p:spPr>
           <a:xfrm>
-            <a:off x="6217920" y="1463040"/>
-            <a:ext cx="5212080" cy="4754880"/>
+            <a:off x="6400800" y="1371600"/>
+            <a:ext cx="5029200" cy="5029200"/>
           </a:xfrm>
           <a:prstGeom prst="roundRect">
             <a:avLst/>
@@ -6675,9 +7871,9 @@
           <a:solidFill>
             <a:srgbClr val="162035"/>
           </a:solidFill>
-          <a:ln w="15240">
+          <a:ln w="17780">
             <a:solidFill>
-              <a:srgbClr val="263452"/>
+              <a:srgbClr val="334155"/>
             </a:solidFill>
           </a:ln>
         </p:spPr>
@@ -6711,8 +7907,8 @@
         </p:nvSpPr>
         <p:spPr>
           <a:xfrm>
-            <a:off x="6400800" y="1645920"/>
-            <a:ext cx="4846320" cy="4389120"/>
+            <a:off x="6583680" y="1554480"/>
+            <a:ext cx="4663440" cy="4663440"/>
           </a:xfrm>
           <a:prstGeom prst="rect">
             <a:avLst/>
@@ -6726,71 +7922,194 @@
           <a:lstStyle/>
           <a:p>
             <a:pPr>
-              <a:defRPr sz="1800" b="1">
-                <a:solidFill>
-                  <a:srgbClr val="10B981"/>
-                </a:solidFill>
+              <a:spcAft>
+                <a:spcPts val="1000"/>
+              </a:spcAft>
+              <a:defRPr sz="1700" b="1">
+                <a:solidFill>
+                  <a:srgbClr val="38BDF8"/>
+                </a:solidFill>
+                <a:latin typeface="Segoe UI"/>
               </a:defRPr>
             </a:pPr>
             <a:r>
-              <a:t>Degradación Monótona &amp; Asociación KW</a:t>
-            </a:r>
-          </a:p>
-          <a:p>
-            <a:br/>
-            <a:pPr>
-              <a:defRPr sz="1300">
-                <a:solidFill>
-                  <a:srgbClr val="F8FAFC"/>
-                </a:solidFill>
-              </a:defRPr>
-            </a:pPr>
-            <a:r>
-              <a:t>Ranking Kruskal-Wallis (Variables Cuantitativas):</a:t>
-            </a:r>
-            <a:br/>
-            <a:r>
-              <a:t>1. loan_percent_income (DTI): KW = 2,135.92 (p ~ 0.0)</a:t>
-            </a:r>
-            <a:br/>
-            <a:r>
-              <a:t>2. loan_int_rate: KW = 1,861.39 (p ~ 0.0)</a:t>
-            </a:r>
-            <a:br/>
-            <a:r>
-              <a:t>3. person_income: KW = 1,566.82 (p ~ 0.0)</a:t>
-            </a:r>
-            <a:br/>
-            <a:r>
-              <a:t>4. person_emp_length: KW = 265.06 (p = 1.35e-59)</a:t>
-            </a:r>
-            <a:br/>
-            <a:r>
-              <a:t>5. person_age: KW = 12.17 (p = 4.86e-04)</a:t>
-            </a:r>
-            <a:br/>
-            <a:br/>
-            <a:r>
-              <a:t>Monotonicidad por Calificación (Loan Grade):</a:t>
-            </a:r>
-            <a:br/>
-            <a:r>
-              <a:t>• Grado A: 9.9% default   • Grado B: 16.3% default</a:t>
-            </a:r>
-            <a:br/>
-            <a:r>
-              <a:t>• Grado C: 21.4% default  • Grado D: 59.0% default</a:t>
-            </a:r>
-            <a:br/>
-            <a:r>
-              <a:t>• Grado E: 64.2% default  • Grado F/G: &gt; 70.8% default</a:t>
-            </a:r>
-            <a:br/>
-            <a:br/>
-            <a:r>
-              <a:t>Validación estricta de monotonicidad sin inversiones de curva.</a:t>
-            </a:r>
-            <a:br/>
+              <a:t>Hallazgos de Discriminación y Pruebas Estadísticas</a:t>
+            </a:r>
+          </a:p>
+          <a:p>
+            <a:pPr>
+              <a:spcAft>
+                <a:spcPts val="600"/>
+              </a:spcAft>
+            </a:pPr>
+            <a:r>
+              <a:rPr b="1" sz="1200">
+                <a:solidFill>
+                  <a:srgbClr val="FBBF24"/>
+                </a:solidFill>
+                <a:latin typeface="Segoe UI"/>
+              </a:rPr>
+              <a:t>Régimen de Vivienda: </a:t>
+            </a:r>
+            <a:r>
+              <a:rPr b="0" sz="1200">
+                <a:solidFill>
+                  <a:srgbClr val="E2E8F0"/>
+                </a:solidFill>
+                <a:latin typeface="Segoe UI"/>
+              </a:rPr>
+              <a:t>Chi² = 1,248.48 (p &lt; 1e-200), V de Cramér = 0.242.</a:t>
+            </a:r>
+          </a:p>
+          <a:p>
+            <a:pPr>
+              <a:spcAft>
+                <a:spcPts val="600"/>
+              </a:spcAft>
+            </a:pPr>
+            <a:r>
+              <a:rPr b="1" sz="1150">
+                <a:solidFill>
+                  <a:srgbClr val="38BDF8"/>
+                </a:solidFill>
+                <a:latin typeface="Segoe UI"/>
+              </a:rPr>
+              <a:t>• Inquilinos (RENT): </a:t>
+            </a:r>
+            <a:r>
+              <a:rPr b="0" sz="1150">
+                <a:solidFill>
+                  <a:srgbClr val="E2E8F0"/>
+                </a:solidFill>
+                <a:latin typeface="Segoe UI"/>
+              </a:rPr>
+              <a:t>31.32% de mora (50.4% de las solicitudes).</a:t>
+            </a:r>
+          </a:p>
+          <a:p>
+            <a:pPr>
+              <a:spcAft>
+                <a:spcPts val="600"/>
+              </a:spcAft>
+            </a:pPr>
+            <a:r>
+              <a:rPr b="1" sz="1150">
+                <a:solidFill>
+                  <a:srgbClr val="38BDF8"/>
+                </a:solidFill>
+                <a:latin typeface="Segoe UI"/>
+              </a:rPr>
+              <a:t>• Hipoteca (MORTGAGE): </a:t>
+            </a:r>
+            <a:r>
+              <a:rPr b="0" sz="1150">
+                <a:solidFill>
+                  <a:srgbClr val="E2E8F0"/>
+                </a:solidFill>
+                <a:latin typeface="Segoe UI"/>
+              </a:rPr>
+              <a:t>12.58% de mora (41.2% de las solicitudes).</a:t>
+            </a:r>
+          </a:p>
+          <a:p>
+            <a:pPr>
+              <a:spcAft>
+                <a:spcPts val="600"/>
+              </a:spcAft>
+            </a:pPr>
+            <a:r>
+              <a:rPr b="1" sz="1150">
+                <a:solidFill>
+                  <a:srgbClr val="38BDF8"/>
+                </a:solidFill>
+                <a:latin typeface="Segoe UI"/>
+              </a:rPr>
+              <a:t>• Vivienda Propia (OWN): </a:t>
+            </a:r>
+            <a:r>
+              <a:rPr b="0" sz="1150">
+                <a:solidFill>
+                  <a:srgbClr val="E2E8F0"/>
+                </a:solidFill>
+                <a:latin typeface="Segoe UI"/>
+              </a:rPr>
+              <a:t>7.32% de mora (8.0% de las solicitudes).</a:t>
+            </a:r>
+          </a:p>
+          <a:p>
+            <a:pPr>
+              <a:spcAft>
+                <a:spcPts val="1200"/>
+              </a:spcAft>
+            </a:pPr>
+            <a:r>
+              <a:rPr b="1" sz="1150">
+                <a:solidFill>
+                  <a:srgbClr val="38BDF8"/>
+                </a:solidFill>
+                <a:latin typeface="Segoe UI"/>
+              </a:rPr>
+              <a:t>Insight Clave: </a:t>
+            </a:r>
+            <a:r>
+              <a:rPr b="0" sz="1150">
+                <a:solidFill>
+                  <a:srgbClr val="34D399"/>
+                </a:solidFill>
+                <a:latin typeface="Segoe UI"/>
+              </a:rPr>
+              <a:t>Los inquilinos registran un riesgo 4.3x superior frente a propietarios de vivienda libre de cargas.</a:t>
+            </a:r>
+          </a:p>
+          <a:p>
+            <a:pPr>
+              <a:spcAft>
+                <a:spcPts val="600"/>
+              </a:spcAft>
+            </a:pPr>
+            <a:r>
+              <a:rPr b="1" sz="1150">
+                <a:solidFill>
+                  <a:srgbClr val="FBBF24"/>
+                </a:solidFill>
+                <a:latin typeface="Segoe UI"/>
+              </a:rPr>
+              <a:t>Monotonicidad por Calificación: </a:t>
+            </a:r>
+            <a:r>
+              <a:rPr b="0" sz="1150">
+                <a:solidFill>
+                  <a:srgbClr val="E2E8F0"/>
+                </a:solidFill>
+                <a:latin typeface="Segoe UI"/>
+              </a:rPr>
+              <a:t>Loan Grade A (9.9%) hasta G (98.4%) confirma estricta consistencia lógica.</a:t>
+            </a:r>
+          </a:p>
+          <a:p>
+            <a:pPr>
+              <a:spcAft>
+                <a:spcPts val="600"/>
+              </a:spcAft>
+            </a:pPr>
+            <a:r>
+              <a:rPr b="1" sz="1150">
+                <a:solidFill>
+                  <a:srgbClr val="38BDF8"/>
+                </a:solidFill>
+                <a:latin typeface="Segoe UI"/>
+              </a:rPr>
+              <a:t>Fuerza Bivariada Cuantitativa: </a:t>
+            </a:r>
+            <a:r>
+              <a:rPr b="0" sz="1150">
+                <a:solidFill>
+                  <a:srgbClr val="E2E8F0"/>
+                </a:solidFill>
+                <a:latin typeface="Segoe UI"/>
+              </a:rPr>
+              <a:t>DTI (KW = 2,135.9), Tasa (KW = 1,861.4) e Ingreso (KW = 1,566.8) lideran la capacidad explicativa.</a:t>
+            </a:r>
           </a:p>
         </p:txBody>
       </p:sp>
@@ -6864,7 +8183,7 @@
         <p:spPr>
           <a:xfrm>
             <a:off x="731520" y="365760"/>
-            <a:ext cx="10698480" cy="320040"/>
+            <a:ext cx="10698480" cy="292608"/>
           </a:xfrm>
           <a:prstGeom prst="rect">
             <a:avLst/>
@@ -6882,7 +8201,7 @@
                 <a:solidFill>
                   <a:srgbClr val="38BDF8"/>
                 </a:solidFill>
-                <a:latin typeface="Arial"/>
+                <a:latin typeface="Segoe UI"/>
               </a:defRPr>
             </a:pPr>
             <a:r>
@@ -6899,8 +8218,8 @@
         </p:nvSpPr>
         <p:spPr>
           <a:xfrm>
-            <a:off x="731520" y="640080"/>
-            <a:ext cx="10698480" cy="731520"/>
+            <a:off x="731520" y="658368"/>
+            <a:ext cx="10698480" cy="594360"/>
           </a:xfrm>
           <a:prstGeom prst="rect">
             <a:avLst/>
@@ -6914,11 +8233,11 @@
           <a:lstStyle/>
           <a:p>
             <a:pPr>
-              <a:defRPr sz="2400" b="1">
-                <a:solidFill>
-                  <a:srgbClr val="F8FAFC"/>
-                </a:solidFill>
-                <a:latin typeface="Arial"/>
+              <a:defRPr sz="2300" b="1">
+                <a:solidFill>
+                  <a:srgbClr val="FFFFFF"/>
+                </a:solidFill>
+                <a:latin typeface="Segoe UI"/>
               </a:defRPr>
             </a:pPr>
             <a:r>
@@ -6927,16 +8246,730 @@
           </a:p>
         </p:txBody>
       </p:sp>
-      <p:sp>
-        <p:nvSpPr>
-          <p:cNvPr id="5" name="Rounded Rectangle 4"/>
+      <p:graphicFrame>
+        <p:nvGraphicFramePr>
+          <p:cNvPr id="5" name="Table 4"/>
+          <p:cNvGraphicFramePr>
+            <a:graphicFrameLocks noGrp="1"/>
+          </p:cNvGraphicFramePr>
+          <p:nvPr/>
+        </p:nvGraphicFramePr>
+        <p:xfrm>
+          <a:off x="731520" y="1371600"/>
+          <a:ext cx="5303520" cy="3108960"/>
+        </p:xfrm>
+        <a:graphic>
+          <a:graphicData uri="http://schemas.openxmlformats.org/drawingml/2006/table">
+            <a:tbl>
+              <a:tblPr firstRow="1" bandRow="1">
+                <a:tableStyleId>{5C22544A-7EE6-4342-B048-85BDC9FD1C3A}</a:tableStyleId>
+              </a:tblPr>
+              <a:tblGrid>
+                <a:gridCol w="1828800"/>
+                <a:gridCol w="1097280"/>
+                <a:gridCol w="1097280"/>
+                <a:gridCol w="1280160"/>
+              </a:tblGrid>
+              <a:tr h="444137">
+                <a:tc>
+                  <a:txBody>
+                    <a:bodyPr/>
+                    <a:lstStyle/>
+                    <a:p>
+                      <a:pPr algn="ctr">
+                        <a:defRPr sz="1100" b="1">
+                          <a:solidFill>
+                            <a:srgbClr val="38BDF8"/>
+                          </a:solidFill>
+                          <a:latin typeface="Segoe UI"/>
+                        </a:defRPr>
+                      </a:pPr>
+                      <a:r>
+                        <a:t>Variable</a:t>
+                      </a:r>
+                    </a:p>
+                  </a:txBody>
+                  <a:tcPr anchor="ctr">
+                    <a:solidFill>
+                      <a:srgbClr val="1E293B"/>
+                    </a:solidFill>
+                  </a:tcPr>
+                </a:tc>
+                <a:tc>
+                  <a:txBody>
+                    <a:bodyPr/>
+                    <a:lstStyle/>
+                    <a:p>
+                      <a:pPr algn="ctr">
+                        <a:defRPr sz="1100" b="1">
+                          <a:solidFill>
+                            <a:srgbClr val="38BDF8"/>
+                          </a:solidFill>
+                          <a:latin typeface="Segoe UI"/>
+                        </a:defRPr>
+                      </a:pPr>
+                      <a:r>
+                        <a:t>Train vs Test</a:t>
+                      </a:r>
+                    </a:p>
+                  </a:txBody>
+                  <a:tcPr anchor="ctr">
+                    <a:solidFill>
+                      <a:srgbClr val="1E293B"/>
+                    </a:solidFill>
+                  </a:tcPr>
+                </a:tc>
+                <a:tc>
+                  <a:txBody>
+                    <a:bodyPr/>
+                    <a:lstStyle/>
+                    <a:p>
+                      <a:pPr algn="ctr">
+                        <a:defRPr sz="1100" b="1">
+                          <a:solidFill>
+                            <a:srgbClr val="38BDF8"/>
+                          </a:solidFill>
+                          <a:latin typeface="Segoe UI"/>
+                        </a:defRPr>
+                      </a:pPr>
+                      <a:r>
+                        <a:t>Train vs OOT</a:t>
+                      </a:r>
+                    </a:p>
+                  </a:txBody>
+                  <a:tcPr anchor="ctr">
+                    <a:solidFill>
+                      <a:srgbClr val="1E293B"/>
+                    </a:solidFill>
+                  </a:tcPr>
+                </a:tc>
+                <a:tc>
+                  <a:txBody>
+                    <a:bodyPr/>
+                    <a:lstStyle/>
+                    <a:p>
+                      <a:pPr algn="ctr">
+                        <a:defRPr sz="1100" b="1">
+                          <a:solidFill>
+                            <a:srgbClr val="38BDF8"/>
+                          </a:solidFill>
+                          <a:latin typeface="Segoe UI"/>
+                        </a:defRPr>
+                      </a:pPr>
+                      <a:r>
+                        <a:t>Diagnóstico</a:t>
+                      </a:r>
+                    </a:p>
+                  </a:txBody>
+                  <a:tcPr anchor="ctr">
+                    <a:solidFill>
+                      <a:srgbClr val="1E293B"/>
+                    </a:solidFill>
+                  </a:tcPr>
+                </a:tc>
+              </a:tr>
+              <a:tr h="444137">
+                <a:tc>
+                  <a:txBody>
+                    <a:bodyPr/>
+                    <a:lstStyle/>
+                    <a:p>
+                      <a:pPr algn="l">
+                        <a:defRPr sz="1050">
+                          <a:solidFill>
+                            <a:srgbClr val="FFFFFF"/>
+                          </a:solidFill>
+                          <a:latin typeface="Segoe UI"/>
+                        </a:defRPr>
+                      </a:pPr>
+                      <a:r>
+                        <a:t>person_income</a:t>
+                      </a:r>
+                    </a:p>
+                  </a:txBody>
+                  <a:tcPr anchor="ctr">
+                    <a:solidFill>
+                      <a:srgbClr val="162035"/>
+                    </a:solidFill>
+                  </a:tcPr>
+                </a:tc>
+                <a:tc>
+                  <a:txBody>
+                    <a:bodyPr/>
+                    <a:lstStyle/>
+                    <a:p>
+                      <a:pPr algn="ctr">
+                        <a:defRPr sz="1050">
+                          <a:solidFill>
+                            <a:srgbClr val="FFFFFF"/>
+                          </a:solidFill>
+                          <a:latin typeface="Segoe UI"/>
+                        </a:defRPr>
+                      </a:pPr>
+                      <a:r>
+                        <a:t>0.0010</a:t>
+                      </a:r>
+                    </a:p>
+                  </a:txBody>
+                  <a:tcPr anchor="ctr">
+                    <a:solidFill>
+                      <a:srgbClr val="162035"/>
+                    </a:solidFill>
+                  </a:tcPr>
+                </a:tc>
+                <a:tc>
+                  <a:txBody>
+                    <a:bodyPr/>
+                    <a:lstStyle/>
+                    <a:p>
+                      <a:pPr algn="ctr">
+                        <a:defRPr sz="1050">
+                          <a:solidFill>
+                            <a:srgbClr val="FFFFFF"/>
+                          </a:solidFill>
+                          <a:latin typeface="Segoe UI"/>
+                        </a:defRPr>
+                      </a:pPr>
+                      <a:r>
+                        <a:t>0.0184</a:t>
+                      </a:r>
+                    </a:p>
+                  </a:txBody>
+                  <a:tcPr anchor="ctr">
+                    <a:solidFill>
+                      <a:srgbClr val="162035"/>
+                    </a:solidFill>
+                  </a:tcPr>
+                </a:tc>
+                <a:tc>
+                  <a:txBody>
+                    <a:bodyPr/>
+                    <a:lstStyle/>
+                    <a:p>
+                      <a:pPr algn="ctr">
+                        <a:defRPr sz="1050">
+                          <a:solidFill>
+                            <a:srgbClr val="FFFFFF"/>
+                          </a:solidFill>
+                          <a:latin typeface="Segoe UI"/>
+                        </a:defRPr>
+                      </a:pPr>
+                      <a:r>
+                        <a:t>✅ Estable</a:t>
+                      </a:r>
+                    </a:p>
+                  </a:txBody>
+                  <a:tcPr anchor="ctr">
+                    <a:solidFill>
+                      <a:srgbClr val="162035"/>
+                    </a:solidFill>
+                  </a:tcPr>
+                </a:tc>
+              </a:tr>
+              <a:tr h="444137">
+                <a:tc>
+                  <a:txBody>
+                    <a:bodyPr/>
+                    <a:lstStyle/>
+                    <a:p>
+                      <a:pPr algn="l">
+                        <a:defRPr sz="1050">
+                          <a:solidFill>
+                            <a:srgbClr val="FFFFFF"/>
+                          </a:solidFill>
+                          <a:latin typeface="Segoe UI"/>
+                        </a:defRPr>
+                      </a:pPr>
+                      <a:r>
+                        <a:t>person_emp_length</a:t>
+                      </a:r>
+                    </a:p>
+                  </a:txBody>
+                  <a:tcPr anchor="ctr">
+                    <a:solidFill>
+                      <a:srgbClr val="101828"/>
+                    </a:solidFill>
+                  </a:tcPr>
+                </a:tc>
+                <a:tc>
+                  <a:txBody>
+                    <a:bodyPr/>
+                    <a:lstStyle/>
+                    <a:p>
+                      <a:pPr algn="ctr">
+                        <a:defRPr sz="1050">
+                          <a:solidFill>
+                            <a:srgbClr val="FFFFFF"/>
+                          </a:solidFill>
+                          <a:latin typeface="Segoe UI"/>
+                        </a:defRPr>
+                      </a:pPr>
+                      <a:r>
+                        <a:t>0.0006</a:t>
+                      </a:r>
+                    </a:p>
+                  </a:txBody>
+                  <a:tcPr anchor="ctr">
+                    <a:solidFill>
+                      <a:srgbClr val="101828"/>
+                    </a:solidFill>
+                  </a:tcPr>
+                </a:tc>
+                <a:tc>
+                  <a:txBody>
+                    <a:bodyPr/>
+                    <a:lstStyle/>
+                    <a:p>
+                      <a:pPr algn="ctr">
+                        <a:defRPr sz="1050">
+                          <a:solidFill>
+                            <a:srgbClr val="FFFFFF"/>
+                          </a:solidFill>
+                          <a:latin typeface="Segoe UI"/>
+                        </a:defRPr>
+                      </a:pPr>
+                      <a:r>
+                        <a:t>0.0136</a:t>
+                      </a:r>
+                    </a:p>
+                  </a:txBody>
+                  <a:tcPr anchor="ctr">
+                    <a:solidFill>
+                      <a:srgbClr val="101828"/>
+                    </a:solidFill>
+                  </a:tcPr>
+                </a:tc>
+                <a:tc>
+                  <a:txBody>
+                    <a:bodyPr/>
+                    <a:lstStyle/>
+                    <a:p>
+                      <a:pPr algn="ctr">
+                        <a:defRPr sz="1050">
+                          <a:solidFill>
+                            <a:srgbClr val="FFFFFF"/>
+                          </a:solidFill>
+                          <a:latin typeface="Segoe UI"/>
+                        </a:defRPr>
+                      </a:pPr>
+                      <a:r>
+                        <a:t>✅ Estable</a:t>
+                      </a:r>
+                    </a:p>
+                  </a:txBody>
+                  <a:tcPr anchor="ctr">
+                    <a:solidFill>
+                      <a:srgbClr val="101828"/>
+                    </a:solidFill>
+                  </a:tcPr>
+                </a:tc>
+              </a:tr>
+              <a:tr h="444137">
+                <a:tc>
+                  <a:txBody>
+                    <a:bodyPr/>
+                    <a:lstStyle/>
+                    <a:p>
+                      <a:pPr algn="l">
+                        <a:defRPr sz="1050">
+                          <a:solidFill>
+                            <a:srgbClr val="FFFFFF"/>
+                          </a:solidFill>
+                          <a:latin typeface="Segoe UI"/>
+                        </a:defRPr>
+                      </a:pPr>
+                      <a:r>
+                        <a:t>loan_int_rate</a:t>
+                      </a:r>
+                    </a:p>
+                  </a:txBody>
+                  <a:tcPr anchor="ctr">
+                    <a:solidFill>
+                      <a:srgbClr val="162035"/>
+                    </a:solidFill>
+                  </a:tcPr>
+                </a:tc>
+                <a:tc>
+                  <a:txBody>
+                    <a:bodyPr/>
+                    <a:lstStyle/>
+                    <a:p>
+                      <a:pPr algn="ctr">
+                        <a:defRPr sz="1050">
+                          <a:solidFill>
+                            <a:srgbClr val="FFFFFF"/>
+                          </a:solidFill>
+                          <a:latin typeface="Segoe UI"/>
+                        </a:defRPr>
+                      </a:pPr>
+                      <a:r>
+                        <a:t>0.0000</a:t>
+                      </a:r>
+                    </a:p>
+                  </a:txBody>
+                  <a:tcPr anchor="ctr">
+                    <a:solidFill>
+                      <a:srgbClr val="162035"/>
+                    </a:solidFill>
+                  </a:tcPr>
+                </a:tc>
+                <a:tc>
+                  <a:txBody>
+                    <a:bodyPr/>
+                    <a:lstStyle/>
+                    <a:p>
+                      <a:pPr algn="ctr">
+                        <a:defRPr sz="1050">
+                          <a:solidFill>
+                            <a:srgbClr val="FFFFFF"/>
+                          </a:solidFill>
+                          <a:latin typeface="Segoe UI"/>
+                        </a:defRPr>
+                      </a:pPr>
+                      <a:r>
+                        <a:t>0.0001</a:t>
+                      </a:r>
+                    </a:p>
+                  </a:txBody>
+                  <a:tcPr anchor="ctr">
+                    <a:solidFill>
+                      <a:srgbClr val="162035"/>
+                    </a:solidFill>
+                  </a:tcPr>
+                </a:tc>
+                <a:tc>
+                  <a:txBody>
+                    <a:bodyPr/>
+                    <a:lstStyle/>
+                    <a:p>
+                      <a:pPr algn="ctr">
+                        <a:defRPr sz="1050">
+                          <a:solidFill>
+                            <a:srgbClr val="FFFFFF"/>
+                          </a:solidFill>
+                          <a:latin typeface="Segoe UI"/>
+                        </a:defRPr>
+                      </a:pPr>
+                      <a:r>
+                        <a:t>✅ Estable</a:t>
+                      </a:r>
+                    </a:p>
+                  </a:txBody>
+                  <a:tcPr anchor="ctr">
+                    <a:solidFill>
+                      <a:srgbClr val="162035"/>
+                    </a:solidFill>
+                  </a:tcPr>
+                </a:tc>
+              </a:tr>
+              <a:tr h="444137">
+                <a:tc>
+                  <a:txBody>
+                    <a:bodyPr/>
+                    <a:lstStyle/>
+                    <a:p>
+                      <a:pPr algn="l">
+                        <a:defRPr sz="1050">
+                          <a:solidFill>
+                            <a:srgbClr val="FFFFFF"/>
+                          </a:solidFill>
+                          <a:latin typeface="Segoe UI"/>
+                        </a:defRPr>
+                      </a:pPr>
+                      <a:r>
+                        <a:t>loan_percent_income</a:t>
+                      </a:r>
+                    </a:p>
+                  </a:txBody>
+                  <a:tcPr anchor="ctr">
+                    <a:solidFill>
+                      <a:srgbClr val="101828"/>
+                    </a:solidFill>
+                  </a:tcPr>
+                </a:tc>
+                <a:tc>
+                  <a:txBody>
+                    <a:bodyPr/>
+                    <a:lstStyle/>
+                    <a:p>
+                      <a:pPr algn="ctr">
+                        <a:defRPr sz="1050">
+                          <a:solidFill>
+                            <a:srgbClr val="FFFFFF"/>
+                          </a:solidFill>
+                          <a:latin typeface="Segoe UI"/>
+                        </a:defRPr>
+                      </a:pPr>
+                      <a:r>
+                        <a:t>0.0002</a:t>
+                      </a:r>
+                    </a:p>
+                  </a:txBody>
+                  <a:tcPr anchor="ctr">
+                    <a:solidFill>
+                      <a:srgbClr val="101828"/>
+                    </a:solidFill>
+                  </a:tcPr>
+                </a:tc>
+                <a:tc>
+                  <a:txBody>
+                    <a:bodyPr/>
+                    <a:lstStyle/>
+                    <a:p>
+                      <a:pPr algn="ctr">
+                        <a:defRPr sz="1050">
+                          <a:solidFill>
+                            <a:srgbClr val="FFFFFF"/>
+                          </a:solidFill>
+                          <a:latin typeface="Segoe UI"/>
+                        </a:defRPr>
+                      </a:pPr>
+                      <a:r>
+                        <a:t>0.0020</a:t>
+                      </a:r>
+                    </a:p>
+                  </a:txBody>
+                  <a:tcPr anchor="ctr">
+                    <a:solidFill>
+                      <a:srgbClr val="101828"/>
+                    </a:solidFill>
+                  </a:tcPr>
+                </a:tc>
+                <a:tc>
+                  <a:txBody>
+                    <a:bodyPr/>
+                    <a:lstStyle/>
+                    <a:p>
+                      <a:pPr algn="ctr">
+                        <a:defRPr sz="1050">
+                          <a:solidFill>
+                            <a:srgbClr val="FFFFFF"/>
+                          </a:solidFill>
+                          <a:latin typeface="Segoe UI"/>
+                        </a:defRPr>
+                      </a:pPr>
+                      <a:r>
+                        <a:t>✅ Estable</a:t>
+                      </a:r>
+                    </a:p>
+                  </a:txBody>
+                  <a:tcPr anchor="ctr">
+                    <a:solidFill>
+                      <a:srgbClr val="101828"/>
+                    </a:solidFill>
+                  </a:tcPr>
+                </a:tc>
+              </a:tr>
+              <a:tr h="444137">
+                <a:tc>
+                  <a:txBody>
+                    <a:bodyPr/>
+                    <a:lstStyle/>
+                    <a:p>
+                      <a:pPr algn="l">
+                        <a:defRPr sz="1050">
+                          <a:solidFill>
+                            <a:srgbClr val="FFFFFF"/>
+                          </a:solidFill>
+                          <a:latin typeface="Segoe UI"/>
+                        </a:defRPr>
+                      </a:pPr>
+                      <a:r>
+                        <a:t>home_ownership_3</a:t>
+                      </a:r>
+                    </a:p>
+                  </a:txBody>
+                  <a:tcPr anchor="ctr">
+                    <a:solidFill>
+                      <a:srgbClr val="162035"/>
+                    </a:solidFill>
+                  </a:tcPr>
+                </a:tc>
+                <a:tc>
+                  <a:txBody>
+                    <a:bodyPr/>
+                    <a:lstStyle/>
+                    <a:p>
+                      <a:pPr algn="ctr">
+                        <a:defRPr sz="1050">
+                          <a:solidFill>
+                            <a:srgbClr val="FFFFFF"/>
+                          </a:solidFill>
+                          <a:latin typeface="Segoe UI"/>
+                        </a:defRPr>
+                      </a:pPr>
+                      <a:r>
+                        <a:t>0.0002</a:t>
+                      </a:r>
+                    </a:p>
+                  </a:txBody>
+                  <a:tcPr anchor="ctr">
+                    <a:solidFill>
+                      <a:srgbClr val="162035"/>
+                    </a:solidFill>
+                  </a:tcPr>
+                </a:tc>
+                <a:tc>
+                  <a:txBody>
+                    <a:bodyPr/>
+                    <a:lstStyle/>
+                    <a:p>
+                      <a:pPr algn="ctr">
+                        <a:defRPr sz="1050">
+                          <a:solidFill>
+                            <a:srgbClr val="FFFFFF"/>
+                          </a:solidFill>
+                          <a:latin typeface="Segoe UI"/>
+                        </a:defRPr>
+                      </a:pPr>
+                      <a:r>
+                        <a:t>0.0034</a:t>
+                      </a:r>
+                    </a:p>
+                  </a:txBody>
+                  <a:tcPr anchor="ctr">
+                    <a:solidFill>
+                      <a:srgbClr val="162035"/>
+                    </a:solidFill>
+                  </a:tcPr>
+                </a:tc>
+                <a:tc>
+                  <a:txBody>
+                    <a:bodyPr/>
+                    <a:lstStyle/>
+                    <a:p>
+                      <a:pPr algn="ctr">
+                        <a:defRPr sz="1050">
+                          <a:solidFill>
+                            <a:srgbClr val="FFFFFF"/>
+                          </a:solidFill>
+                          <a:latin typeface="Segoe UI"/>
+                        </a:defRPr>
+                      </a:pPr>
+                      <a:r>
+                        <a:t>✅ Estable</a:t>
+                      </a:r>
+                    </a:p>
+                  </a:txBody>
+                  <a:tcPr anchor="ctr">
+                    <a:solidFill>
+                      <a:srgbClr val="162035"/>
+                    </a:solidFill>
+                  </a:tcPr>
+                </a:tc>
+              </a:tr>
+              <a:tr h="444138">
+                <a:tc>
+                  <a:txBody>
+                    <a:bodyPr/>
+                    <a:lstStyle/>
+                    <a:p>
+                      <a:pPr algn="l">
+                        <a:defRPr sz="1050">
+                          <a:solidFill>
+                            <a:srgbClr val="FFFFFF"/>
+                          </a:solidFill>
+                          <a:latin typeface="Segoe UI"/>
+                        </a:defRPr>
+                      </a:pPr>
+                      <a:r>
+                        <a:t>cb_person_default_on_file</a:t>
+                      </a:r>
+                    </a:p>
+                  </a:txBody>
+                  <a:tcPr anchor="ctr">
+                    <a:solidFill>
+                      <a:srgbClr val="101828"/>
+                    </a:solidFill>
+                  </a:tcPr>
+                </a:tc>
+                <a:tc>
+                  <a:txBody>
+                    <a:bodyPr/>
+                    <a:lstStyle/>
+                    <a:p>
+                      <a:pPr algn="ctr">
+                        <a:defRPr sz="1050">
+                          <a:solidFill>
+                            <a:srgbClr val="FFFFFF"/>
+                          </a:solidFill>
+                          <a:latin typeface="Segoe UI"/>
+                        </a:defRPr>
+                      </a:pPr>
+                      <a:r>
+                        <a:t>0.0000</a:t>
+                      </a:r>
+                    </a:p>
+                  </a:txBody>
+                  <a:tcPr anchor="ctr">
+                    <a:solidFill>
+                      <a:srgbClr val="101828"/>
+                    </a:solidFill>
+                  </a:tcPr>
+                </a:tc>
+                <a:tc>
+                  <a:txBody>
+                    <a:bodyPr/>
+                    <a:lstStyle/>
+                    <a:p>
+                      <a:pPr algn="ctr">
+                        <a:defRPr sz="1050">
+                          <a:solidFill>
+                            <a:srgbClr val="FFFFFF"/>
+                          </a:solidFill>
+                          <a:latin typeface="Segoe UI"/>
+                        </a:defRPr>
+                      </a:pPr>
+                      <a:r>
+                        <a:t>0.0001</a:t>
+                      </a:r>
+                    </a:p>
+                  </a:txBody>
+                  <a:tcPr anchor="ctr">
+                    <a:solidFill>
+                      <a:srgbClr val="101828"/>
+                    </a:solidFill>
+                  </a:tcPr>
+                </a:tc>
+                <a:tc>
+                  <a:txBody>
+                    <a:bodyPr/>
+                    <a:lstStyle/>
+                    <a:p>
+                      <a:pPr algn="ctr">
+                        <a:defRPr sz="1050">
+                          <a:solidFill>
+                            <a:srgbClr val="FFFFFF"/>
+                          </a:solidFill>
+                          <a:latin typeface="Segoe UI"/>
+                        </a:defRPr>
+                      </a:pPr>
+                      <a:r>
+                        <a:t>✅ Estable</a:t>
+                      </a:r>
+                    </a:p>
+                  </a:txBody>
+                  <a:tcPr anchor="ctr">
+                    <a:solidFill>
+                      <a:srgbClr val="101828"/>
+                    </a:solidFill>
+                  </a:tcPr>
+                </a:tc>
+              </a:tr>
+            </a:tbl>
+          </a:graphicData>
+        </a:graphic>
+      </p:graphicFrame>
+      <p:sp>
+        <p:nvSpPr>
+          <p:cNvPr id="6" name="Rounded Rectangle 5"/>
           <p:cNvSpPr/>
           <p:nvPr/>
         </p:nvSpPr>
         <p:spPr>
           <a:xfrm>
-            <a:off x="731520" y="1463040"/>
-            <a:ext cx="3474720" cy="1188720"/>
+            <a:off x="731520" y="4663440"/>
+            <a:ext cx="5303520" cy="1737360"/>
           </a:xfrm>
           <a:prstGeom prst="roundRect">
             <a:avLst/>
@@ -6944,9 +8977,9 @@
           <a:solidFill>
             <a:srgbClr val="162035"/>
           </a:solidFill>
-          <a:ln w="15240">
+          <a:ln w="17780">
             <a:solidFill>
-              <a:srgbClr val="263452"/>
+              <a:srgbClr val="334155"/>
             </a:solidFill>
           </a:ln>
         </p:spPr>
@@ -6974,14 +9007,14 @@
       </p:sp>
       <p:sp>
         <p:nvSpPr>
-          <p:cNvPr id="6" name="TextBox 5"/>
+          <p:cNvPr id="7" name="TextBox 6"/>
           <p:cNvSpPr txBox="1"/>
           <p:nvPr/>
         </p:nvSpPr>
         <p:spPr>
           <a:xfrm>
-            <a:off x="868680" y="1554480"/>
-            <a:ext cx="3200400" cy="1005840"/>
+            <a:off x="914400" y="4754880"/>
+            <a:ext cx="4937760" cy="1554480"/>
           </a:xfrm>
           <a:prstGeom prst="rect">
             <a:avLst/>
@@ -6995,40 +9028,107 @@
           <a:lstStyle/>
           <a:p>
             <a:pPr>
+              <a:spcAft>
+                <a:spcPts val="400"/>
+              </a:spcAft>
               <a:defRPr sz="1300" b="1">
                 <a:solidFill>
-                  <a:srgbClr val="10B981"/>
-                </a:solidFill>
+                  <a:srgbClr val="FFFFFF"/>
+                </a:solidFill>
+                <a:latin typeface="Segoe UI"/>
               </a:defRPr>
             </a:pPr>
             <a:r>
-              <a:t>PSI &lt; 0.10: Zona Verde (Estable)</a:t>
-            </a:r>
-          </a:p>
-          <a:p>
-            <a:pPr>
-              <a:defRPr sz="1100">
-                <a:solidFill>
-                  <a:srgbClr val="F8FAFC"/>
-                </a:solidFill>
-              </a:defRPr>
-            </a:pPr>
-            <a:r>
-              <a:t>La distribución no registra variación apreciable. El modelo no requiere recalibración.</a:t>
-            </a:r>
-          </a:p>
-        </p:txBody>
-      </p:sp>
-      <p:sp>
-        <p:nvSpPr>
-          <p:cNvPr id="7" name="Rounded Rectangle 6"/>
+              <a:t>Criterios Regulatorios de Deriva Poblacional (PSI)</a:t>
+            </a:r>
+          </a:p>
+          <a:p>
+            <a:pPr>
+              <a:spcAft>
+                <a:spcPts val="300"/>
+              </a:spcAft>
+            </a:pPr>
+            <a:r>
+              <a:rPr b="1" sz="1050">
+                <a:solidFill>
+                  <a:srgbClr val="34D399"/>
+                </a:solidFill>
+                <a:latin typeface="Segoe UI"/>
+              </a:rPr>
+              <a:t>• PSI &lt; 0.10 (Zona Verde): </a:t>
+            </a:r>
+            <a:r>
+              <a:rPr b="0" sz="1050">
+                <a:solidFill>
+                  <a:srgbClr val="E2E8F0"/>
+                </a:solidFill>
+                <a:latin typeface="Segoe UI"/>
+              </a:rPr>
+              <a:t>Distribución estable. No requiere ajuste ni recalibración.</a:t>
+            </a:r>
+          </a:p>
+          <a:p>
+            <a:pPr>
+              <a:spcAft>
+                <a:spcPts val="300"/>
+              </a:spcAft>
+            </a:pPr>
+            <a:r>
+              <a:rPr b="1" sz="1050">
+                <a:solidFill>
+                  <a:srgbClr val="FBBF24"/>
+                </a:solidFill>
+                <a:latin typeface="Segoe UI"/>
+              </a:rPr>
+              <a:t>• 0.10 &lt;= PSI &lt; 0.25 (Zona Ámbar): </a:t>
+            </a:r>
+            <a:r>
+              <a:rPr b="0" sz="1050">
+                <a:solidFill>
+                  <a:srgbClr val="E2E8F0"/>
+                </a:solidFill>
+                <a:latin typeface="Segoe UI"/>
+              </a:rPr>
+              <a:t>Deriva moderada. Monitoreo estrecho requerido.</a:t>
+            </a:r>
+          </a:p>
+          <a:p>
+            <a:pPr>
+              <a:spcAft>
+                <a:spcPts val="200"/>
+              </a:spcAft>
+            </a:pPr>
+            <a:r>
+              <a:rPr b="1" sz="1050">
+                <a:solidFill>
+                  <a:srgbClr val="FB7185"/>
+                </a:solidFill>
+                <a:latin typeface="Segoe UI"/>
+              </a:rPr>
+              <a:t>• PSI &gt;= 0.25 (Zona Roja): </a:t>
+            </a:r>
+            <a:r>
+              <a:rPr b="0" sz="1050">
+                <a:solidFill>
+                  <a:srgbClr val="E2E8F0"/>
+                </a:solidFill>
+                <a:latin typeface="Segoe UI"/>
+              </a:rPr>
+              <a:t>Deriva severa. Descalibración crítica; reentrenamiento obligatorio.</a:t>
+            </a:r>
+          </a:p>
+        </p:txBody>
+      </p:sp>
+      <p:sp>
+        <p:nvSpPr>
+          <p:cNvPr id="8" name="Rounded Rectangle 7"/>
           <p:cNvSpPr/>
           <p:nvPr/>
         </p:nvSpPr>
         <p:spPr>
           <a:xfrm>
-            <a:off x="4370832" y="1463040"/>
-            <a:ext cx="3474720" cy="1188720"/>
+            <a:off x="6309360" y="1371600"/>
+            <a:ext cx="5120640" cy="5029200"/>
           </a:xfrm>
           <a:prstGeom prst="roundRect">
             <a:avLst/>
@@ -7036,9 +9136,9 @@
           <a:solidFill>
             <a:srgbClr val="162035"/>
           </a:solidFill>
-          <a:ln w="15240">
+          <a:ln w="17780">
             <a:solidFill>
-              <a:srgbClr val="263452"/>
+              <a:srgbClr val="334155"/>
             </a:solidFill>
           </a:ln>
         </p:spPr>
@@ -7064,272 +9164,30 @@
           </a:p>
         </p:txBody>
       </p:sp>
-      <p:sp>
-        <p:nvSpPr>
-          <p:cNvPr id="8" name="TextBox 7"/>
-          <p:cNvSpPr txBox="1"/>
+      <p:pic>
+        <p:nvPicPr>
+          <p:cNvPr id="9" name="Picture 8" descr="chart_psi.png"/>
+          <p:cNvPicPr>
+            <a:picLocks noChangeAspect="1"/>
+          </p:cNvPicPr>
           <p:nvPr/>
-        </p:nvSpPr>
+        </p:nvPicPr>
+        <p:blipFill>
+          <a:blip r:embed="rId2"/>
+          <a:stretch>
+            <a:fillRect/>
+          </a:stretch>
+        </p:blipFill>
         <p:spPr>
           <a:xfrm>
-            <a:off x="4507992" y="1554480"/>
-            <a:ext cx="3200400" cy="1005840"/>
+            <a:off x="6446520" y="1645920"/>
+            <a:ext cx="4846320" cy="4389120"/>
           </a:xfrm>
           <a:prstGeom prst="rect">
             <a:avLst/>
           </a:prstGeom>
-          <a:noFill/>
         </p:spPr>
-        <p:txBody>
-          <a:bodyPr wrap="square">
-            <a:spAutoFit/>
-          </a:bodyPr>
-          <a:lstStyle/>
-          <a:p>
-            <a:pPr>
-              <a:defRPr sz="1300" b="1">
-                <a:solidFill>
-                  <a:srgbClr val="F59E0B"/>
-                </a:solidFill>
-              </a:defRPr>
-            </a:pPr>
-            <a:r>
-              <a:t>0.10 &lt;= PSI &lt; 0.25: Zona Ámbar (Alerta)</a:t>
-            </a:r>
-          </a:p>
-          <a:p>
-            <a:pPr>
-              <a:defRPr sz="1100">
-                <a:solidFill>
-                  <a:srgbClr val="F8FAFC"/>
-                </a:solidFill>
-              </a:defRPr>
-            </a:pPr>
-            <a:r>
-              <a:t>Cambio moderado en la población; requiere monitoreo estrecho.</a:t>
-            </a:r>
-          </a:p>
-        </p:txBody>
-      </p:sp>
-      <p:sp>
-        <p:nvSpPr>
-          <p:cNvPr id="9" name="Rounded Rectangle 8"/>
-          <p:cNvSpPr/>
-          <p:nvPr/>
-        </p:nvSpPr>
-        <p:spPr>
-          <a:xfrm>
-            <a:off x="8010144" y="1463040"/>
-            <a:ext cx="3474720" cy="1188720"/>
-          </a:xfrm>
-          <a:prstGeom prst="roundRect">
-            <a:avLst/>
-          </a:prstGeom>
-          <a:solidFill>
-            <a:srgbClr val="162035"/>
-          </a:solidFill>
-          <a:ln w="15240">
-            <a:solidFill>
-              <a:srgbClr val="263452"/>
-            </a:solidFill>
-          </a:ln>
-        </p:spPr>
-        <p:style>
-          <a:lnRef idx="1">
-            <a:schemeClr val="accent1"/>
-          </a:lnRef>
-          <a:fillRef idx="3">
-            <a:schemeClr val="accent1"/>
-          </a:fillRef>
-          <a:effectRef idx="2">
-            <a:schemeClr val="accent1"/>
-          </a:effectRef>
-          <a:fontRef idx="minor">
-            <a:schemeClr val="lt1"/>
-          </a:fontRef>
-        </p:style>
-        <p:txBody>
-          <a:bodyPr rtlCol="0" anchor="ctr"/>
-          <a:lstStyle/>
-          <a:p>
-            <a:pPr algn="ctr"/>
-          </a:p>
-        </p:txBody>
-      </p:sp>
-      <p:sp>
-        <p:nvSpPr>
-          <p:cNvPr id="10" name="TextBox 9"/>
-          <p:cNvSpPr txBox="1"/>
-          <p:nvPr/>
-        </p:nvSpPr>
-        <p:spPr>
-          <a:xfrm>
-            <a:off x="8147304" y="1554480"/>
-            <a:ext cx="3200400" cy="1005840"/>
-          </a:xfrm>
-          <a:prstGeom prst="rect">
-            <a:avLst/>
-          </a:prstGeom>
-          <a:noFill/>
-        </p:spPr>
-        <p:txBody>
-          <a:bodyPr wrap="square">
-            <a:spAutoFit/>
-          </a:bodyPr>
-          <a:lstStyle/>
-          <a:p>
-            <a:pPr>
-              <a:defRPr sz="1300" b="1">
-                <a:solidFill>
-                  <a:srgbClr val="F43F5E"/>
-                </a:solidFill>
-              </a:defRPr>
-            </a:pPr>
-            <a:r>
-              <a:t>PSI &gt;= 0.25: Zona Roja (Deriva Severa)</a:t>
-            </a:r>
-          </a:p>
-          <a:p>
-            <a:pPr>
-              <a:defRPr sz="1100">
-                <a:solidFill>
-                  <a:srgbClr val="F8FAFC"/>
-                </a:solidFill>
-              </a:defRPr>
-            </a:pPr>
-            <a:r>
-              <a:t>Descalibración poblacional crítica; re-entrenamiento obligatorio.</a:t>
-            </a:r>
-          </a:p>
-        </p:txBody>
-      </p:sp>
-      <p:sp>
-        <p:nvSpPr>
-          <p:cNvPr id="11" name="Rounded Rectangle 10"/>
-          <p:cNvSpPr/>
-          <p:nvPr/>
-        </p:nvSpPr>
-        <p:spPr>
-          <a:xfrm>
-            <a:off x="731520" y="2834640"/>
-            <a:ext cx="10698480" cy="3474720"/>
-          </a:xfrm>
-          <a:prstGeom prst="roundRect">
-            <a:avLst/>
-          </a:prstGeom>
-          <a:solidFill>
-            <a:srgbClr val="162035"/>
-          </a:solidFill>
-          <a:ln w="15240">
-            <a:solidFill>
-              <a:srgbClr val="263452"/>
-            </a:solidFill>
-          </a:ln>
-        </p:spPr>
-        <p:style>
-          <a:lnRef idx="1">
-            <a:schemeClr val="accent1"/>
-          </a:lnRef>
-          <a:fillRef idx="3">
-            <a:schemeClr val="accent1"/>
-          </a:fillRef>
-          <a:effectRef idx="2">
-            <a:schemeClr val="accent1"/>
-          </a:effectRef>
-          <a:fontRef idx="minor">
-            <a:schemeClr val="lt1"/>
-          </a:fontRef>
-        </p:style>
-        <p:txBody>
-          <a:bodyPr rtlCol="0" anchor="ctr"/>
-          <a:lstStyle/>
-          <a:p>
-            <a:pPr algn="ctr"/>
-          </a:p>
-        </p:txBody>
-      </p:sp>
-      <p:sp>
-        <p:nvSpPr>
-          <p:cNvPr id="12" name="TextBox 11"/>
-          <p:cNvSpPr txBox="1"/>
-          <p:nvPr/>
-        </p:nvSpPr>
-        <p:spPr>
-          <a:xfrm>
-            <a:off x="1005840" y="3017520"/>
-            <a:ext cx="10149840" cy="3108960"/>
-          </a:xfrm>
-          <a:prstGeom prst="rect">
-            <a:avLst/>
-          </a:prstGeom>
-          <a:noFill/>
-        </p:spPr>
-        <p:txBody>
-          <a:bodyPr wrap="square">
-            <a:spAutoFit/>
-          </a:bodyPr>
-          <a:lstStyle/>
-          <a:p>
-            <a:pPr>
-              <a:defRPr sz="1800" b="1">
-                <a:solidFill>
-                  <a:srgbClr val="F8FAFC"/>
-                </a:solidFill>
-              </a:defRPr>
-            </a:pPr>
-            <a:r>
-              <a:t>Resultados Empíricos del PSI en Particiones y Serie Temporal</a:t>
-            </a:r>
-          </a:p>
-          <a:p>
-            <a:br/>
-            <a:pPr>
-              <a:defRPr sz="1200">
-                <a:solidFill>
-                  <a:srgbClr val="F8FAFC"/>
-                </a:solidFill>
-              </a:defRPr>
-            </a:pPr>
-            <a:r>
-              <a:t>Variable Seleccionada           Train vs Test       Train vs OOT        Test vs OOT        Diagnóstico Regulatorio</a:t>
-            </a:r>
-            <a:br/>
-            <a:r>
-              <a:t>──────────────────────────────────────────────────────────────────────────────────────────────────</a:t>
-            </a:r>
-            <a:br/>
-            <a:r>
-              <a:t>• person_income                    0.0010              0.0184              0.0113            ✅ Totalmente Estable</a:t>
-            </a:r>
-            <a:br/>
-            <a:r>
-              <a:t>• person_emp_length                0.0006              0.0136              0.0087            ✅ Totalmente Estable</a:t>
-            </a:r>
-            <a:br/>
-            <a:r>
-              <a:t>• loan_int_rate                    0.0000              0.0001              0.0001            ✅ Totalmente Estable</a:t>
-            </a:r>
-            <a:br/>
-            <a:r>
-              <a:t>• loan_percent_income              0.0002              0.0020              0.0010            ✅ Totalmente Estable</a:t>
-            </a:r>
-            <a:br/>
-            <a:r>
-              <a:t>• home_ownership_3                 0.0002              0.0034              0.0020            ✅ Totalmente Estable</a:t>
-            </a:r>
-            <a:br/>
-            <a:r>
-              <a:t>• cb_person_default_on_file        0.0000              0.0001              0.0002            ✅ Totalmente Estable</a:t>
-            </a:r>
-            <a:br/>
-            <a:br/>
-            <a:r>
-              <a:t>Conclusión de Auditoría: Todas las métricas registraron valores inferiores a 0.02, confirmando máxima robustez frente a deriva macroeconómica.</a:t>
-            </a:r>
-            <a:br/>
-          </a:p>
-        </p:txBody>
-      </p:sp>
+      </p:pic>
     </p:spTree>
   </p:cSld>
   <p:clrMapOvr>
@@ -7400,7 +9258,7 @@
         <p:spPr>
           <a:xfrm>
             <a:off x="731520" y="365760"/>
-            <a:ext cx="10698480" cy="320040"/>
+            <a:ext cx="10698480" cy="292608"/>
           </a:xfrm>
           <a:prstGeom prst="rect">
             <a:avLst/>
@@ -7418,7 +9276,7 @@
                 <a:solidFill>
                   <a:srgbClr val="38BDF8"/>
                 </a:solidFill>
-                <a:latin typeface="Arial"/>
+                <a:latin typeface="Segoe UI"/>
               </a:defRPr>
             </a:pPr>
             <a:r>
@@ -7435,8 +9293,8 @@
         </p:nvSpPr>
         <p:spPr>
           <a:xfrm>
-            <a:off x="731520" y="640080"/>
-            <a:ext cx="10698480" cy="731520"/>
+            <a:off x="731520" y="658368"/>
+            <a:ext cx="10698480" cy="594360"/>
           </a:xfrm>
           <a:prstGeom prst="rect">
             <a:avLst/>
@@ -7450,11 +9308,11 @@
           <a:lstStyle/>
           <a:p>
             <a:pPr>
-              <a:defRPr sz="2400" b="1">
-                <a:solidFill>
-                  <a:srgbClr val="F8FAFC"/>
-                </a:solidFill>
-                <a:latin typeface="Arial"/>
+              <a:defRPr sz="2300" b="1">
+                <a:solidFill>
+                  <a:srgbClr val="FFFFFF"/>
+                </a:solidFill>
+                <a:latin typeface="Segoe UI"/>
               </a:defRPr>
             </a:pPr>
             <a:r>
@@ -7471,8 +9329,8 @@
         </p:nvSpPr>
         <p:spPr>
           <a:xfrm>
-            <a:off x="731520" y="1463040"/>
-            <a:ext cx="2560320" cy="2286000"/>
+            <a:off x="731520" y="1371600"/>
+            <a:ext cx="2560320" cy="2011680"/>
           </a:xfrm>
           <a:prstGeom prst="roundRect">
             <a:avLst/>
@@ -7480,9 +9338,9 @@
           <a:solidFill>
             <a:srgbClr val="162035"/>
           </a:solidFill>
-          <a:ln w="15240">
+          <a:ln w="17780">
             <a:solidFill>
-              <a:srgbClr val="263452"/>
+              <a:srgbClr val="334155"/>
             </a:solidFill>
           </a:ln>
         </p:spPr>
@@ -7516,8 +9374,8 @@
         </p:nvSpPr>
         <p:spPr>
           <a:xfrm>
-            <a:off x="868680" y="1600200"/>
-            <a:ext cx="2286000" cy="2011680"/>
+            <a:off x="868680" y="1463040"/>
+            <a:ext cx="2286000" cy="1828800"/>
           </a:xfrm>
           <a:prstGeom prst="rect">
             <a:avLst/>
@@ -7535,6 +9393,7 @@
                 <a:solidFill>
                   <a:srgbClr val="38BDF8"/>
                 </a:solidFill>
+                <a:latin typeface="Segoe UI"/>
               </a:defRPr>
             </a:pPr>
             <a:r>
@@ -7543,10 +9402,11 @@
           </a:p>
           <a:p>
             <a:pPr>
-              <a:defRPr sz="1100">
+              <a:defRPr sz="1050">
                 <a:solidFill>
                   <a:srgbClr val="94A3B8"/>
                 </a:solidFill>
+                <a:latin typeface="Segoe UI"/>
               </a:defRPr>
             </a:pPr>
             <a:r>
@@ -7554,12 +9414,12 @@
             </a:r>
           </a:p>
           <a:p>
-            <a:br/>
-            <a:pPr>
-              <a:defRPr sz="1100">
-                <a:solidFill>
-                  <a:srgbClr val="F8FAFC"/>
-                </a:solidFill>
+            <a:pPr>
+              <a:defRPr sz="1050">
+                <a:solidFill>
+                  <a:srgbClr val="E2E8F0"/>
+                </a:solidFill>
+                <a:latin typeface="Segoe UI"/>
               </a:defRPr>
             </a:pPr>
             <a:r>
@@ -7567,16 +9427,16 @@
             </a:r>
           </a:p>
           <a:p>
-            <a:br/>
-            <a:pPr>
-              <a:defRPr sz="1200" b="1">
+            <a:pPr>
+              <a:defRPr sz="1100" b="1">
                 <a:solidFill>
                   <a:srgbClr val="38BDF8"/>
                 </a:solidFill>
+                <a:latin typeface="Segoe UI"/>
               </a:defRPr>
             </a:pPr>
             <a:r>
-              <a:t>Resultado: 7 retenidas</a:t>
+              <a:t>Retenidas: 7 retenidas</a:t>
             </a:r>
           </a:p>
         </p:txBody>
@@ -7589,8 +9449,8 @@
         </p:nvSpPr>
         <p:spPr>
           <a:xfrm>
-            <a:off x="3456432" y="1463040"/>
-            <a:ext cx="2560320" cy="2286000"/>
+            <a:off x="3456432" y="1371600"/>
+            <a:ext cx="2560320" cy="2011680"/>
           </a:xfrm>
           <a:prstGeom prst="roundRect">
             <a:avLst/>
@@ -7598,9 +9458,9 @@
           <a:solidFill>
             <a:srgbClr val="162035"/>
           </a:solidFill>
-          <a:ln w="15240">
+          <a:ln w="17780">
             <a:solidFill>
-              <a:srgbClr val="263452"/>
+              <a:srgbClr val="334155"/>
             </a:solidFill>
           </a:ln>
         </p:spPr>
@@ -7634,8 +9494,8 @@
         </p:nvSpPr>
         <p:spPr>
           <a:xfrm>
-            <a:off x="3593592" y="1600200"/>
-            <a:ext cx="2286000" cy="2011680"/>
+            <a:off x="3593592" y="1463040"/>
+            <a:ext cx="2286000" cy="1828800"/>
           </a:xfrm>
           <a:prstGeom prst="rect">
             <a:avLst/>
@@ -7653,6 +9513,7 @@
                 <a:solidFill>
                   <a:srgbClr val="38BDF8"/>
                 </a:solidFill>
+                <a:latin typeface="Segoe UI"/>
               </a:defRPr>
             </a:pPr>
             <a:r>
@@ -7661,10 +9522,11 @@
           </a:p>
           <a:p>
             <a:pPr>
-              <a:defRPr sz="1100">
+              <a:defRPr sz="1050">
                 <a:solidFill>
                   <a:srgbClr val="94A3B8"/>
                 </a:solidFill>
+                <a:latin typeface="Segoe UI"/>
               </a:defRPr>
             </a:pPr>
             <a:r>
@@ -7672,12 +9534,12 @@
             </a:r>
           </a:p>
           <a:p>
-            <a:br/>
-            <a:pPr>
-              <a:defRPr sz="1100">
-                <a:solidFill>
-                  <a:srgbClr val="F8FAFC"/>
-                </a:solidFill>
+            <a:pPr>
+              <a:defRPr sz="1050">
+                <a:solidFill>
+                  <a:srgbClr val="E2E8F0"/>
+                </a:solidFill>
+                <a:latin typeface="Segoe UI"/>
               </a:defRPr>
             </a:pPr>
             <a:r>
@@ -7685,16 +9547,16 @@
             </a:r>
           </a:p>
           <a:p>
-            <a:br/>
-            <a:pPr>
-              <a:defRPr sz="1200" b="1">
+            <a:pPr>
+              <a:defRPr sz="1100" b="1">
                 <a:solidFill>
                   <a:srgbClr val="38BDF8"/>
                 </a:solidFill>
+                <a:latin typeface="Segoe UI"/>
               </a:defRPr>
             </a:pPr>
             <a:r>
-              <a:t>Resultado: 3 retenidas</a:t>
+              <a:t>Retenidas: 3 retenidas</a:t>
             </a:r>
           </a:p>
         </p:txBody>
@@ -7707,8 +9569,8 @@
         </p:nvSpPr>
         <p:spPr>
           <a:xfrm>
-            <a:off x="6181344" y="1463040"/>
-            <a:ext cx="2560320" cy="2286000"/>
+            <a:off x="6181344" y="1371600"/>
+            <a:ext cx="2560320" cy="2011680"/>
           </a:xfrm>
           <a:prstGeom prst="roundRect">
             <a:avLst/>
@@ -7716,9 +9578,9 @@
           <a:solidFill>
             <a:srgbClr val="162035"/>
           </a:solidFill>
-          <a:ln w="15240">
+          <a:ln w="17780">
             <a:solidFill>
-              <a:srgbClr val="263452"/>
+              <a:srgbClr val="334155"/>
             </a:solidFill>
           </a:ln>
         </p:spPr>
@@ -7752,8 +9614,8 @@
         </p:nvSpPr>
         <p:spPr>
           <a:xfrm>
-            <a:off x="6318504" y="1600200"/>
-            <a:ext cx="2286000" cy="2011680"/>
+            <a:off x="6318504" y="1463040"/>
+            <a:ext cx="2286000" cy="1828800"/>
           </a:xfrm>
           <a:prstGeom prst="rect">
             <a:avLst/>
@@ -7769,8 +9631,9 @@
             <a:pPr>
               <a:defRPr sz="1300" b="1">
                 <a:solidFill>
-                  <a:srgbClr val="10B981"/>
-                </a:solidFill>
+                  <a:srgbClr val="34D399"/>
+                </a:solidFill>
+                <a:latin typeface="Segoe UI"/>
               </a:defRPr>
             </a:pPr>
             <a:r>
@@ -7779,10 +9642,11 @@
           </a:p>
           <a:p>
             <a:pPr>
-              <a:defRPr sz="1100">
+              <a:defRPr sz="1050">
                 <a:solidFill>
                   <a:srgbClr val="94A3B8"/>
                 </a:solidFill>
+                <a:latin typeface="Segoe UI"/>
               </a:defRPr>
             </a:pPr>
             <a:r>
@@ -7790,12 +9654,12 @@
             </a:r>
           </a:p>
           <a:p>
-            <a:br/>
-            <a:pPr>
-              <a:defRPr sz="1100">
-                <a:solidFill>
-                  <a:srgbClr val="F8FAFC"/>
-                </a:solidFill>
+            <a:pPr>
+              <a:defRPr sz="1050">
+                <a:solidFill>
+                  <a:srgbClr val="E2E8F0"/>
+                </a:solidFill>
+                <a:latin typeface="Segoe UI"/>
               </a:defRPr>
             </a:pPr>
             <a:r>
@@ -7803,16 +9667,16 @@
             </a:r>
           </a:p>
           <a:p>
-            <a:br/>
-            <a:pPr>
-              <a:defRPr sz="1200" b="1">
-                <a:solidFill>
-                  <a:srgbClr val="10B981"/>
-                </a:solidFill>
+            <a:pPr>
+              <a:defRPr sz="1100" b="1">
+                <a:solidFill>
+                  <a:srgbClr val="34D399"/>
+                </a:solidFill>
+                <a:latin typeface="Segoe UI"/>
               </a:defRPr>
             </a:pPr>
             <a:r>
-              <a:t>Resultado: 5 continuas</a:t>
+              <a:t>Retenidas: 5 continuas</a:t>
             </a:r>
           </a:p>
         </p:txBody>
@@ -7825,8 +9689,8 @@
         </p:nvSpPr>
         <p:spPr>
           <a:xfrm>
-            <a:off x="8906256" y="1463040"/>
-            <a:ext cx="2560320" cy="2286000"/>
+            <a:off x="8906256" y="1371600"/>
+            <a:ext cx="2560320" cy="2011680"/>
           </a:xfrm>
           <a:prstGeom prst="roundRect">
             <a:avLst/>
@@ -7834,9 +9698,9 @@
           <a:solidFill>
             <a:srgbClr val="162035"/>
           </a:solidFill>
-          <a:ln w="15240">
+          <a:ln w="17780">
             <a:solidFill>
-              <a:srgbClr val="263452"/>
+              <a:srgbClr val="334155"/>
             </a:solidFill>
           </a:ln>
         </p:spPr>
@@ -7870,8 +9734,8 @@
         </p:nvSpPr>
         <p:spPr>
           <a:xfrm>
-            <a:off x="9043416" y="1600200"/>
-            <a:ext cx="2286000" cy="2011680"/>
+            <a:off x="9043416" y="1463040"/>
+            <a:ext cx="2286000" cy="1828800"/>
           </a:xfrm>
           <a:prstGeom prst="rect">
             <a:avLst/>
@@ -7887,8 +9751,9 @@
             <a:pPr>
               <a:defRPr sz="1300" b="1">
                 <a:solidFill>
-                  <a:srgbClr val="10B981"/>
-                </a:solidFill>
+                  <a:srgbClr val="34D399"/>
+                </a:solidFill>
+                <a:latin typeface="Segoe UI"/>
               </a:defRPr>
             </a:pPr>
             <a:r>
@@ -7897,10 +9762,11 @@
           </a:p>
           <a:p>
             <a:pPr>
-              <a:defRPr sz="1100">
+              <a:defRPr sz="1050">
                 <a:solidFill>
                   <a:srgbClr val="94A3B8"/>
                 </a:solidFill>
+                <a:latin typeface="Segoe UI"/>
               </a:defRPr>
             </a:pPr>
             <a:r>
@@ -7908,151 +9774,845 @@
             </a:r>
           </a:p>
           <a:p>
-            <a:br/>
-            <a:pPr>
-              <a:defRPr sz="1100">
-                <a:solidFill>
-                  <a:srgbClr val="F8FAFC"/>
-                </a:solidFill>
+            <a:pPr>
+              <a:defRPr sz="1050">
+                <a:solidFill>
+                  <a:srgbClr val="E2E8F0"/>
+                </a:solidFill>
+                <a:latin typeface="Segoe UI"/>
               </a:defRPr>
             </a:pPr>
             <a:r>
-              <a:t>Elimina duplicidad estructural (ej. loan_grade vs default_on_file).</a:t>
-            </a:r>
-          </a:p>
-          <a:p>
-            <a:br/>
-            <a:pPr>
-              <a:defRPr sz="1200" b="1">
-                <a:solidFill>
-                  <a:srgbClr val="10B981"/>
-                </a:solidFill>
+              <a:t>Elimina redundancia estructural (ej. loan_grade vs default_on_file).</a:t>
+            </a:r>
+          </a:p>
+          <a:p>
+            <a:pPr>
+              <a:defRPr sz="1100" b="1">
+                <a:solidFill>
+                  <a:srgbClr val="34D399"/>
+                </a:solidFill>
+                <a:latin typeface="Segoe UI"/>
               </a:defRPr>
             </a:pPr>
             <a:r>
-              <a:t>Resultado: 2 categóricas</a:t>
-            </a:r>
-          </a:p>
-        </p:txBody>
-      </p:sp>
-      <p:sp>
-        <p:nvSpPr>
-          <p:cNvPr id="13" name="Rounded Rectangle 12"/>
-          <p:cNvSpPr/>
+              <a:t>Retenidas: 2 categóricas</a:t>
+            </a:r>
+          </a:p>
+        </p:txBody>
+      </p:sp>
+      <p:graphicFrame>
+        <p:nvGraphicFramePr>
+          <p:cNvPr id="13" name="Table 12"/>
+          <p:cNvGraphicFramePr>
+            <a:graphicFrameLocks noGrp="1"/>
+          </p:cNvGraphicFramePr>
           <p:nvPr/>
-        </p:nvSpPr>
-        <p:spPr>
-          <a:xfrm>
-            <a:off x="731520" y="3931920"/>
-            <a:ext cx="10698480" cy="2377440"/>
-          </a:xfrm>
-          <a:prstGeom prst="roundRect">
-            <a:avLst/>
-          </a:prstGeom>
-          <a:solidFill>
-            <a:srgbClr val="162035"/>
-          </a:solidFill>
-          <a:ln w="15240">
-            <a:solidFill>
-              <a:srgbClr val="263452"/>
-            </a:solidFill>
-          </a:ln>
-        </p:spPr>
-        <p:style>
-          <a:lnRef idx="1">
-            <a:schemeClr val="accent1"/>
-          </a:lnRef>
-          <a:fillRef idx="3">
-            <a:schemeClr val="accent1"/>
-          </a:fillRef>
-          <a:effectRef idx="2">
-            <a:schemeClr val="accent1"/>
-          </a:effectRef>
-          <a:fontRef idx="minor">
-            <a:schemeClr val="lt1"/>
-          </a:fontRef>
-        </p:style>
-        <p:txBody>
-          <a:bodyPr rtlCol="0" anchor="ctr"/>
-          <a:lstStyle/>
-          <a:p>
-            <a:pPr algn="ctr"/>
-          </a:p>
-        </p:txBody>
-      </p:sp>
-      <p:sp>
-        <p:nvSpPr>
-          <p:cNvPr id="14" name="TextBox 13"/>
-          <p:cNvSpPr txBox="1"/>
-          <p:nvPr/>
-        </p:nvSpPr>
-        <p:spPr>
-          <a:xfrm>
-            <a:off x="1005840" y="4114800"/>
-            <a:ext cx="10149840" cy="2011680"/>
-          </a:xfrm>
-          <a:prstGeom prst="rect">
-            <a:avLst/>
-          </a:prstGeom>
-          <a:noFill/>
-        </p:spPr>
-        <p:txBody>
-          <a:bodyPr wrap="square">
-            <a:spAutoFit/>
-          </a:bodyPr>
-          <a:lstStyle/>
-          <a:p>
-            <a:pPr>
-              <a:defRPr sz="1700" b="1">
-                <a:solidFill>
-                  <a:srgbClr val="F8FAFC"/>
-                </a:solidFill>
-              </a:defRPr>
-            </a:pPr>
-            <a:r>
-              <a:t>Set Final Óptimo de 7 Variables Seleccionadas para Producción</a:t>
-            </a:r>
-          </a:p>
-          <a:p>
-            <a:br/>
-            <a:pPr>
-              <a:defRPr sz="1200">
-                <a:solidFill>
-                  <a:srgbClr val="F8FAFC"/>
-                </a:solidFill>
-              </a:defRPr>
-            </a:pPr>
-            <a:r>
-              <a:t>1. person_income (Continua): Capacidad de pago y solidez patrimonial del solicitante.</a:t>
-            </a:r>
-            <a:br/>
-            <a:r>
-              <a:t>2. loan_percent_income (Continua): Carga de endeudamiento relativo (Debt-to-Income / DTI).</a:t>
-            </a:r>
-            <a:br/>
-            <a:r>
-              <a:t>3. loan_int_rate (Continua): Prima de riesgo asignada por la entidad financiera.</a:t>
-            </a:r>
-            <a:br/>
-            <a:r>
-              <a:t>4. person_home_ownership (Categórica): Régimen residencial (OWN, MORTGAGE, RENT, OTHER).</a:t>
-            </a:r>
-            <a:br/>
-            <a:r>
-              <a:t>5. cb_person_default_on_file (Categórica): Historial crediticio negativo previo en buró.</a:t>
-            </a:r>
-            <a:br/>
-            <a:r>
-              <a:t>6. person_emp_length (Continua): Estabilidad y antigüedad laboral.</a:t>
-            </a:r>
-            <a:br/>
-            <a:r>
-              <a:t>7. person_age (Continua): Ciclo de vida y madurez financiera del cliente.</a:t>
-            </a:r>
-            <a:br/>
-          </a:p>
-        </p:txBody>
-      </p:sp>
+        </p:nvGraphicFramePr>
+        <p:xfrm>
+          <a:off x="731520" y="3566160"/>
+          <a:ext cx="10698480" cy="2834640"/>
+        </p:xfrm>
+        <a:graphic>
+          <a:graphicData uri="http://schemas.openxmlformats.org/drawingml/2006/table">
+            <a:tbl>
+              <a:tblPr firstRow="1" bandRow="1">
+                <a:tableStyleId>{5C22544A-7EE6-4342-B048-85BDC9FD1C3A}</a:tableStyleId>
+              </a:tblPr>
+              <a:tblGrid>
+                <a:gridCol w="2286000"/>
+                <a:gridCol w="1371600"/>
+                <a:gridCol w="2926080"/>
+                <a:gridCol w="4114800"/>
+              </a:tblGrid>
+              <a:tr h="354330">
+                <a:tc>
+                  <a:txBody>
+                    <a:bodyPr/>
+                    <a:lstStyle/>
+                    <a:p>
+                      <a:pPr algn="ctr">
+                        <a:defRPr sz="1100" b="1">
+                          <a:solidFill>
+                            <a:srgbClr val="38BDF8"/>
+                          </a:solidFill>
+                          <a:latin typeface="Segoe UI"/>
+                        </a:defRPr>
+                      </a:pPr>
+                      <a:r>
+                        <a:t>Variable Técnica</a:t>
+                      </a:r>
+                    </a:p>
+                  </a:txBody>
+                  <a:tcPr anchor="ctr">
+                    <a:solidFill>
+                      <a:srgbClr val="1E293B"/>
+                    </a:solidFill>
+                  </a:tcPr>
+                </a:tc>
+                <a:tc>
+                  <a:txBody>
+                    <a:bodyPr/>
+                    <a:lstStyle/>
+                    <a:p>
+                      <a:pPr algn="ctr">
+                        <a:defRPr sz="1100" b="1">
+                          <a:solidFill>
+                            <a:srgbClr val="38BDF8"/>
+                          </a:solidFill>
+                          <a:latin typeface="Segoe UI"/>
+                        </a:defRPr>
+                      </a:pPr>
+                      <a:r>
+                        <a:t>Tipo</a:t>
+                      </a:r>
+                    </a:p>
+                  </a:txBody>
+                  <a:tcPr anchor="ctr">
+                    <a:solidFill>
+                      <a:srgbClr val="1E293B"/>
+                    </a:solidFill>
+                  </a:tcPr>
+                </a:tc>
+                <a:tc>
+                  <a:txBody>
+                    <a:bodyPr/>
+                    <a:lstStyle/>
+                    <a:p>
+                      <a:pPr algn="ctr">
+                        <a:defRPr sz="1100" b="1">
+                          <a:solidFill>
+                            <a:srgbClr val="38BDF8"/>
+                          </a:solidFill>
+                          <a:latin typeface="Segoe UI"/>
+                        </a:defRPr>
+                      </a:pPr>
+                      <a:r>
+                        <a:t>Nombre de Negocio</a:t>
+                      </a:r>
+                    </a:p>
+                  </a:txBody>
+                  <a:tcPr anchor="ctr">
+                    <a:solidFill>
+                      <a:srgbClr val="1E293B"/>
+                    </a:solidFill>
+                  </a:tcPr>
+                </a:tc>
+                <a:tc>
+                  <a:txBody>
+                    <a:bodyPr/>
+                    <a:lstStyle/>
+                    <a:p>
+                      <a:pPr algn="ctr">
+                        <a:defRPr sz="1100" b="1">
+                          <a:solidFill>
+                            <a:srgbClr val="38BDF8"/>
+                          </a:solidFill>
+                          <a:latin typeface="Segoe UI"/>
+                        </a:defRPr>
+                      </a:pPr>
+                      <a:r>
+                        <a:t>Rol en la Política de Riesgo</a:t>
+                      </a:r>
+                    </a:p>
+                  </a:txBody>
+                  <a:tcPr anchor="ctr">
+                    <a:solidFill>
+                      <a:srgbClr val="1E293B"/>
+                    </a:solidFill>
+                  </a:tcPr>
+                </a:tc>
+              </a:tr>
+              <a:tr h="354330">
+                <a:tc>
+                  <a:txBody>
+                    <a:bodyPr/>
+                    <a:lstStyle/>
+                    <a:p>
+                      <a:pPr algn="l">
+                        <a:defRPr sz="1050">
+                          <a:solidFill>
+                            <a:srgbClr val="FFFFFF"/>
+                          </a:solidFill>
+                          <a:latin typeface="Segoe UI"/>
+                        </a:defRPr>
+                      </a:pPr>
+                      <a:r>
+                        <a:t>person_income</a:t>
+                      </a:r>
+                    </a:p>
+                  </a:txBody>
+                  <a:tcPr anchor="ctr">
+                    <a:solidFill>
+                      <a:srgbClr val="162035"/>
+                    </a:solidFill>
+                  </a:tcPr>
+                </a:tc>
+                <a:tc>
+                  <a:txBody>
+                    <a:bodyPr/>
+                    <a:lstStyle/>
+                    <a:p>
+                      <a:pPr algn="ctr">
+                        <a:defRPr sz="1050">
+                          <a:solidFill>
+                            <a:srgbClr val="FFFFFF"/>
+                          </a:solidFill>
+                          <a:latin typeface="Segoe UI"/>
+                        </a:defRPr>
+                      </a:pPr>
+                      <a:r>
+                        <a:t>Continua</a:t>
+                      </a:r>
+                    </a:p>
+                  </a:txBody>
+                  <a:tcPr anchor="ctr">
+                    <a:solidFill>
+                      <a:srgbClr val="162035"/>
+                    </a:solidFill>
+                  </a:tcPr>
+                </a:tc>
+                <a:tc>
+                  <a:txBody>
+                    <a:bodyPr/>
+                    <a:lstStyle/>
+                    <a:p>
+                      <a:pPr algn="ctr">
+                        <a:defRPr sz="1050">
+                          <a:solidFill>
+                            <a:srgbClr val="FFFFFF"/>
+                          </a:solidFill>
+                          <a:latin typeface="Segoe UI"/>
+                        </a:defRPr>
+                      </a:pPr>
+                      <a:r>
+                        <a:t>Ingreso Anual ($)</a:t>
+                      </a:r>
+                    </a:p>
+                  </a:txBody>
+                  <a:tcPr anchor="ctr">
+                    <a:solidFill>
+                      <a:srgbClr val="162035"/>
+                    </a:solidFill>
+                  </a:tcPr>
+                </a:tc>
+                <a:tc>
+                  <a:txBody>
+                    <a:bodyPr/>
+                    <a:lstStyle/>
+                    <a:p>
+                      <a:pPr algn="ctr">
+                        <a:defRPr sz="1050">
+                          <a:solidFill>
+                            <a:srgbClr val="FFFFFF"/>
+                          </a:solidFill>
+                          <a:latin typeface="Segoe UI"/>
+                        </a:defRPr>
+                      </a:pPr>
+                      <a:r>
+                        <a:t>Capacidad de pago y solidez patrimonial del cliente</a:t>
+                      </a:r>
+                    </a:p>
+                  </a:txBody>
+                  <a:tcPr anchor="ctr">
+                    <a:solidFill>
+                      <a:srgbClr val="162035"/>
+                    </a:solidFill>
+                  </a:tcPr>
+                </a:tc>
+              </a:tr>
+              <a:tr h="354330">
+                <a:tc>
+                  <a:txBody>
+                    <a:bodyPr/>
+                    <a:lstStyle/>
+                    <a:p>
+                      <a:pPr algn="l">
+                        <a:defRPr sz="1050">
+                          <a:solidFill>
+                            <a:srgbClr val="FFFFFF"/>
+                          </a:solidFill>
+                          <a:latin typeface="Segoe UI"/>
+                        </a:defRPr>
+                      </a:pPr>
+                      <a:r>
+                        <a:t>loan_percent_income</a:t>
+                      </a:r>
+                    </a:p>
+                  </a:txBody>
+                  <a:tcPr anchor="ctr">
+                    <a:solidFill>
+                      <a:srgbClr val="101828"/>
+                    </a:solidFill>
+                  </a:tcPr>
+                </a:tc>
+                <a:tc>
+                  <a:txBody>
+                    <a:bodyPr/>
+                    <a:lstStyle/>
+                    <a:p>
+                      <a:pPr algn="ctr">
+                        <a:defRPr sz="1050">
+                          <a:solidFill>
+                            <a:srgbClr val="FFFFFF"/>
+                          </a:solidFill>
+                          <a:latin typeface="Segoe UI"/>
+                        </a:defRPr>
+                      </a:pPr>
+                      <a:r>
+                        <a:t>Continua</a:t>
+                      </a:r>
+                    </a:p>
+                  </a:txBody>
+                  <a:tcPr anchor="ctr">
+                    <a:solidFill>
+                      <a:srgbClr val="101828"/>
+                    </a:solidFill>
+                  </a:tcPr>
+                </a:tc>
+                <a:tc>
+                  <a:txBody>
+                    <a:bodyPr/>
+                    <a:lstStyle/>
+                    <a:p>
+                      <a:pPr algn="ctr">
+                        <a:defRPr sz="1050">
+                          <a:solidFill>
+                            <a:srgbClr val="FFFFFF"/>
+                          </a:solidFill>
+                          <a:latin typeface="Segoe UI"/>
+                        </a:defRPr>
+                      </a:pPr>
+                      <a:r>
+                        <a:t>Ratio Préstamo/Ingreso (DTI)</a:t>
+                      </a:r>
+                    </a:p>
+                  </a:txBody>
+                  <a:tcPr anchor="ctr">
+                    <a:solidFill>
+                      <a:srgbClr val="101828"/>
+                    </a:solidFill>
+                  </a:tcPr>
+                </a:tc>
+                <a:tc>
+                  <a:txBody>
+                    <a:bodyPr/>
+                    <a:lstStyle/>
+                    <a:p>
+                      <a:pPr algn="ctr">
+                        <a:defRPr sz="1050">
+                          <a:solidFill>
+                            <a:srgbClr val="FFFFFF"/>
+                          </a:solidFill>
+                          <a:latin typeface="Segoe UI"/>
+                        </a:defRPr>
+                      </a:pPr>
+                      <a:r>
+                        <a:t>Nivel de apalancamiento y carga de servicio de deuda</a:t>
+                      </a:r>
+                    </a:p>
+                  </a:txBody>
+                  <a:tcPr anchor="ctr">
+                    <a:solidFill>
+                      <a:srgbClr val="101828"/>
+                    </a:solidFill>
+                  </a:tcPr>
+                </a:tc>
+              </a:tr>
+              <a:tr h="354330">
+                <a:tc>
+                  <a:txBody>
+                    <a:bodyPr/>
+                    <a:lstStyle/>
+                    <a:p>
+                      <a:pPr algn="l">
+                        <a:defRPr sz="1050">
+                          <a:solidFill>
+                            <a:srgbClr val="FFFFFF"/>
+                          </a:solidFill>
+                          <a:latin typeface="Segoe UI"/>
+                        </a:defRPr>
+                      </a:pPr>
+                      <a:r>
+                        <a:t>loan_int_rate</a:t>
+                      </a:r>
+                    </a:p>
+                  </a:txBody>
+                  <a:tcPr anchor="ctr">
+                    <a:solidFill>
+                      <a:srgbClr val="162035"/>
+                    </a:solidFill>
+                  </a:tcPr>
+                </a:tc>
+                <a:tc>
+                  <a:txBody>
+                    <a:bodyPr/>
+                    <a:lstStyle/>
+                    <a:p>
+                      <a:pPr algn="ctr">
+                        <a:defRPr sz="1050">
+                          <a:solidFill>
+                            <a:srgbClr val="FFFFFF"/>
+                          </a:solidFill>
+                          <a:latin typeface="Segoe UI"/>
+                        </a:defRPr>
+                      </a:pPr>
+                      <a:r>
+                        <a:t>Continua</a:t>
+                      </a:r>
+                    </a:p>
+                  </a:txBody>
+                  <a:tcPr anchor="ctr">
+                    <a:solidFill>
+                      <a:srgbClr val="162035"/>
+                    </a:solidFill>
+                  </a:tcPr>
+                </a:tc>
+                <a:tc>
+                  <a:txBody>
+                    <a:bodyPr/>
+                    <a:lstStyle/>
+                    <a:p>
+                      <a:pPr algn="ctr">
+                        <a:defRPr sz="1050">
+                          <a:solidFill>
+                            <a:srgbClr val="FFFFFF"/>
+                          </a:solidFill>
+                          <a:latin typeface="Segoe UI"/>
+                        </a:defRPr>
+                      </a:pPr>
+                      <a:r>
+                        <a:t>Tasa de Interés (%)</a:t>
+                      </a:r>
+                    </a:p>
+                  </a:txBody>
+                  <a:tcPr anchor="ctr">
+                    <a:solidFill>
+                      <a:srgbClr val="162035"/>
+                    </a:solidFill>
+                  </a:tcPr>
+                </a:tc>
+                <a:tc>
+                  <a:txBody>
+                    <a:bodyPr/>
+                    <a:lstStyle/>
+                    <a:p>
+                      <a:pPr algn="ctr">
+                        <a:defRPr sz="1050">
+                          <a:solidFill>
+                            <a:srgbClr val="FFFFFF"/>
+                          </a:solidFill>
+                          <a:latin typeface="Segoe UI"/>
+                        </a:defRPr>
+                      </a:pPr>
+                      <a:r>
+                        <a:t>Prima de riesgo asignada por la entidad financiera</a:t>
+                      </a:r>
+                    </a:p>
+                  </a:txBody>
+                  <a:tcPr anchor="ctr">
+                    <a:solidFill>
+                      <a:srgbClr val="162035"/>
+                    </a:solidFill>
+                  </a:tcPr>
+                </a:tc>
+              </a:tr>
+              <a:tr h="354330">
+                <a:tc>
+                  <a:txBody>
+                    <a:bodyPr/>
+                    <a:lstStyle/>
+                    <a:p>
+                      <a:pPr algn="l">
+                        <a:defRPr sz="1050">
+                          <a:solidFill>
+                            <a:srgbClr val="FFFFFF"/>
+                          </a:solidFill>
+                          <a:latin typeface="Segoe UI"/>
+                        </a:defRPr>
+                      </a:pPr>
+                      <a:r>
+                        <a:t>person_home_ownership</a:t>
+                      </a:r>
+                    </a:p>
+                  </a:txBody>
+                  <a:tcPr anchor="ctr">
+                    <a:solidFill>
+                      <a:srgbClr val="101828"/>
+                    </a:solidFill>
+                  </a:tcPr>
+                </a:tc>
+                <a:tc>
+                  <a:txBody>
+                    <a:bodyPr/>
+                    <a:lstStyle/>
+                    <a:p>
+                      <a:pPr algn="ctr">
+                        <a:defRPr sz="1050">
+                          <a:solidFill>
+                            <a:srgbClr val="FFFFFF"/>
+                          </a:solidFill>
+                          <a:latin typeface="Segoe UI"/>
+                        </a:defRPr>
+                      </a:pPr>
+                      <a:r>
+                        <a:t>Categórica</a:t>
+                      </a:r>
+                    </a:p>
+                  </a:txBody>
+                  <a:tcPr anchor="ctr">
+                    <a:solidFill>
+                      <a:srgbClr val="101828"/>
+                    </a:solidFill>
+                  </a:tcPr>
+                </a:tc>
+                <a:tc>
+                  <a:txBody>
+                    <a:bodyPr/>
+                    <a:lstStyle/>
+                    <a:p>
+                      <a:pPr algn="ctr">
+                        <a:defRPr sz="1050">
+                          <a:solidFill>
+                            <a:srgbClr val="FFFFFF"/>
+                          </a:solidFill>
+                          <a:latin typeface="Segoe UI"/>
+                        </a:defRPr>
+                      </a:pPr>
+                      <a:r>
+                        <a:t>Régimen de Vivienda</a:t>
+                      </a:r>
+                    </a:p>
+                  </a:txBody>
+                  <a:tcPr anchor="ctr">
+                    <a:solidFill>
+                      <a:srgbClr val="101828"/>
+                    </a:solidFill>
+                  </a:tcPr>
+                </a:tc>
+                <a:tc>
+                  <a:txBody>
+                    <a:bodyPr/>
+                    <a:lstStyle/>
+                    <a:p>
+                      <a:pPr algn="ctr">
+                        <a:defRPr sz="1050">
+                          <a:solidFill>
+                            <a:srgbClr val="FFFFFF"/>
+                          </a:solidFill>
+                          <a:latin typeface="Segoe UI"/>
+                        </a:defRPr>
+                      </a:pPr>
+                      <a:r>
+                        <a:t>Estabilidad habitacional y respaldo patrimonial (OWN/RENT)</a:t>
+                      </a:r>
+                    </a:p>
+                  </a:txBody>
+                  <a:tcPr anchor="ctr">
+                    <a:solidFill>
+                      <a:srgbClr val="101828"/>
+                    </a:solidFill>
+                  </a:tcPr>
+                </a:tc>
+              </a:tr>
+              <a:tr h="354330">
+                <a:tc>
+                  <a:txBody>
+                    <a:bodyPr/>
+                    <a:lstStyle/>
+                    <a:p>
+                      <a:pPr algn="l">
+                        <a:defRPr sz="1050">
+                          <a:solidFill>
+                            <a:srgbClr val="FFFFFF"/>
+                          </a:solidFill>
+                          <a:latin typeface="Segoe UI"/>
+                        </a:defRPr>
+                      </a:pPr>
+                      <a:r>
+                        <a:t>cb_person_default_on_file</a:t>
+                      </a:r>
+                    </a:p>
+                  </a:txBody>
+                  <a:tcPr anchor="ctr">
+                    <a:solidFill>
+                      <a:srgbClr val="162035"/>
+                    </a:solidFill>
+                  </a:tcPr>
+                </a:tc>
+                <a:tc>
+                  <a:txBody>
+                    <a:bodyPr/>
+                    <a:lstStyle/>
+                    <a:p>
+                      <a:pPr algn="ctr">
+                        <a:defRPr sz="1050">
+                          <a:solidFill>
+                            <a:srgbClr val="FFFFFF"/>
+                          </a:solidFill>
+                          <a:latin typeface="Segoe UI"/>
+                        </a:defRPr>
+                      </a:pPr>
+                      <a:r>
+                        <a:t>Categórica</a:t>
+                      </a:r>
+                    </a:p>
+                  </a:txBody>
+                  <a:tcPr anchor="ctr">
+                    <a:solidFill>
+                      <a:srgbClr val="162035"/>
+                    </a:solidFill>
+                  </a:tcPr>
+                </a:tc>
+                <a:tc>
+                  <a:txBody>
+                    <a:bodyPr/>
+                    <a:lstStyle/>
+                    <a:p>
+                      <a:pPr algn="ctr">
+                        <a:defRPr sz="1050">
+                          <a:solidFill>
+                            <a:srgbClr val="FFFFFF"/>
+                          </a:solidFill>
+                          <a:latin typeface="Segoe UI"/>
+                        </a:defRPr>
+                      </a:pPr>
+                      <a:r>
+                        <a:t>Historial Previo de Mora</a:t>
+                      </a:r>
+                    </a:p>
+                  </a:txBody>
+                  <a:tcPr anchor="ctr">
+                    <a:solidFill>
+                      <a:srgbClr val="162035"/>
+                    </a:solidFill>
+                  </a:tcPr>
+                </a:tc>
+                <a:tc>
+                  <a:txBody>
+                    <a:bodyPr/>
+                    <a:lstStyle/>
+                    <a:p>
+                      <a:pPr algn="ctr">
+                        <a:defRPr sz="1050">
+                          <a:solidFill>
+                            <a:srgbClr val="FFFFFF"/>
+                          </a:solidFill>
+                          <a:latin typeface="Segoe UI"/>
+                        </a:defRPr>
+                      </a:pPr>
+                      <a:r>
+                        <a:t>Comportamiento crediticio histórico negativo en buró</a:t>
+                      </a:r>
+                    </a:p>
+                  </a:txBody>
+                  <a:tcPr anchor="ctr">
+                    <a:solidFill>
+                      <a:srgbClr val="162035"/>
+                    </a:solidFill>
+                  </a:tcPr>
+                </a:tc>
+              </a:tr>
+              <a:tr h="354330">
+                <a:tc>
+                  <a:txBody>
+                    <a:bodyPr/>
+                    <a:lstStyle/>
+                    <a:p>
+                      <a:pPr algn="l">
+                        <a:defRPr sz="1050">
+                          <a:solidFill>
+                            <a:srgbClr val="FFFFFF"/>
+                          </a:solidFill>
+                          <a:latin typeface="Segoe UI"/>
+                        </a:defRPr>
+                      </a:pPr>
+                      <a:r>
+                        <a:t>person_emp_length</a:t>
+                      </a:r>
+                    </a:p>
+                  </a:txBody>
+                  <a:tcPr anchor="ctr">
+                    <a:solidFill>
+                      <a:srgbClr val="101828"/>
+                    </a:solidFill>
+                  </a:tcPr>
+                </a:tc>
+                <a:tc>
+                  <a:txBody>
+                    <a:bodyPr/>
+                    <a:lstStyle/>
+                    <a:p>
+                      <a:pPr algn="ctr">
+                        <a:defRPr sz="1050">
+                          <a:solidFill>
+                            <a:srgbClr val="FFFFFF"/>
+                          </a:solidFill>
+                          <a:latin typeface="Segoe UI"/>
+                        </a:defRPr>
+                      </a:pPr>
+                      <a:r>
+                        <a:t>Continua</a:t>
+                      </a:r>
+                    </a:p>
+                  </a:txBody>
+                  <a:tcPr anchor="ctr">
+                    <a:solidFill>
+                      <a:srgbClr val="101828"/>
+                    </a:solidFill>
+                  </a:tcPr>
+                </a:tc>
+                <a:tc>
+                  <a:txBody>
+                    <a:bodyPr/>
+                    <a:lstStyle/>
+                    <a:p>
+                      <a:pPr algn="ctr">
+                        <a:defRPr sz="1050">
+                          <a:solidFill>
+                            <a:srgbClr val="FFFFFF"/>
+                          </a:solidFill>
+                          <a:latin typeface="Segoe UI"/>
+                        </a:defRPr>
+                      </a:pPr>
+                      <a:r>
+                        <a:t>Antigüedad Laboral (Años)</a:t>
+                      </a:r>
+                    </a:p>
+                  </a:txBody>
+                  <a:tcPr anchor="ctr">
+                    <a:solidFill>
+                      <a:srgbClr val="101828"/>
+                    </a:solidFill>
+                  </a:tcPr>
+                </a:tc>
+                <a:tc>
+                  <a:txBody>
+                    <a:bodyPr/>
+                    <a:lstStyle/>
+                    <a:p>
+                      <a:pPr algn="ctr">
+                        <a:defRPr sz="1050">
+                          <a:solidFill>
+                            <a:srgbClr val="FFFFFF"/>
+                          </a:solidFill>
+                          <a:latin typeface="Segoe UI"/>
+                        </a:defRPr>
+                      </a:pPr>
+                      <a:r>
+                        <a:t>Estabilidad y permanencia en la fuente de ingresos</a:t>
+                      </a:r>
+                    </a:p>
+                  </a:txBody>
+                  <a:tcPr anchor="ctr">
+                    <a:solidFill>
+                      <a:srgbClr val="101828"/>
+                    </a:solidFill>
+                  </a:tcPr>
+                </a:tc>
+              </a:tr>
+              <a:tr h="354330">
+                <a:tc>
+                  <a:txBody>
+                    <a:bodyPr/>
+                    <a:lstStyle/>
+                    <a:p>
+                      <a:pPr algn="l">
+                        <a:defRPr sz="1050">
+                          <a:solidFill>
+                            <a:srgbClr val="FFFFFF"/>
+                          </a:solidFill>
+                          <a:latin typeface="Segoe UI"/>
+                        </a:defRPr>
+                      </a:pPr>
+                      <a:r>
+                        <a:t>person_age</a:t>
+                      </a:r>
+                    </a:p>
+                  </a:txBody>
+                  <a:tcPr anchor="ctr">
+                    <a:solidFill>
+                      <a:srgbClr val="162035"/>
+                    </a:solidFill>
+                  </a:tcPr>
+                </a:tc>
+                <a:tc>
+                  <a:txBody>
+                    <a:bodyPr/>
+                    <a:lstStyle/>
+                    <a:p>
+                      <a:pPr algn="ctr">
+                        <a:defRPr sz="1050">
+                          <a:solidFill>
+                            <a:srgbClr val="FFFFFF"/>
+                          </a:solidFill>
+                          <a:latin typeface="Segoe UI"/>
+                        </a:defRPr>
+                      </a:pPr>
+                      <a:r>
+                        <a:t>Continua</a:t>
+                      </a:r>
+                    </a:p>
+                  </a:txBody>
+                  <a:tcPr anchor="ctr">
+                    <a:solidFill>
+                      <a:srgbClr val="162035"/>
+                    </a:solidFill>
+                  </a:tcPr>
+                </a:tc>
+                <a:tc>
+                  <a:txBody>
+                    <a:bodyPr/>
+                    <a:lstStyle/>
+                    <a:p>
+                      <a:pPr algn="ctr">
+                        <a:defRPr sz="1050">
+                          <a:solidFill>
+                            <a:srgbClr val="FFFFFF"/>
+                          </a:solidFill>
+                          <a:latin typeface="Segoe UI"/>
+                        </a:defRPr>
+                      </a:pPr>
+                      <a:r>
+                        <a:t>Edad del Solicitante</a:t>
+                      </a:r>
+                    </a:p>
+                  </a:txBody>
+                  <a:tcPr anchor="ctr">
+                    <a:solidFill>
+                      <a:srgbClr val="162035"/>
+                    </a:solidFill>
+                  </a:tcPr>
+                </a:tc>
+                <a:tc>
+                  <a:txBody>
+                    <a:bodyPr/>
+                    <a:lstStyle/>
+                    <a:p>
+                      <a:pPr algn="ctr">
+                        <a:defRPr sz="1050">
+                          <a:solidFill>
+                            <a:srgbClr val="FFFFFF"/>
+                          </a:solidFill>
+                          <a:latin typeface="Segoe UI"/>
+                        </a:defRPr>
+                      </a:pPr>
+                      <a:r>
+                        <a:t>Ciclo de vida, madurez y horizonte financiero</a:t>
+                      </a:r>
+                    </a:p>
+                  </a:txBody>
+                  <a:tcPr anchor="ctr">
+                    <a:solidFill>
+                      <a:srgbClr val="162035"/>
+                    </a:solidFill>
+                  </a:tcPr>
+                </a:tc>
+              </a:tr>
+            </a:tbl>
+          </a:graphicData>
+        </a:graphic>
+      </p:graphicFrame>
     </p:spTree>
   </p:cSld>
   <p:clrMapOvr>
@@ -8123,7 +10683,7 @@
         <p:spPr>
           <a:xfrm>
             <a:off x="731520" y="365760"/>
-            <a:ext cx="10698480" cy="320040"/>
+            <a:ext cx="10698480" cy="292608"/>
           </a:xfrm>
           <a:prstGeom prst="rect">
             <a:avLst/>
@@ -8141,7 +10701,7 @@
                 <a:solidFill>
                   <a:srgbClr val="38BDF8"/>
                 </a:solidFill>
-                <a:latin typeface="Arial"/>
+                <a:latin typeface="Segoe UI"/>
               </a:defRPr>
             </a:pPr>
             <a:r>
@@ -8158,8 +10718,8 @@
         </p:nvSpPr>
         <p:spPr>
           <a:xfrm>
-            <a:off x="731520" y="640080"/>
-            <a:ext cx="10698480" cy="731520"/>
+            <a:off x="731520" y="658368"/>
+            <a:ext cx="10698480" cy="594360"/>
           </a:xfrm>
           <a:prstGeom prst="rect">
             <a:avLst/>
@@ -8173,11 +10733,11 @@
           <a:lstStyle/>
           <a:p>
             <a:pPr>
-              <a:defRPr sz="2400" b="1">
-                <a:solidFill>
-                  <a:srgbClr val="F8FAFC"/>
-                </a:solidFill>
-                <a:latin typeface="Arial"/>
+              <a:defRPr sz="2300" b="1">
+                <a:solidFill>
+                  <a:srgbClr val="FFFFFF"/>
+                </a:solidFill>
+                <a:latin typeface="Segoe UI"/>
               </a:defRPr>
             </a:pPr>
             <a:r>
@@ -8194,8 +10754,8 @@
         </p:nvSpPr>
         <p:spPr>
           <a:xfrm>
-            <a:off x="731520" y="1463040"/>
-            <a:ext cx="5120640" cy="4754880"/>
+            <a:off x="731520" y="1371600"/>
+            <a:ext cx="5303520" cy="5029200"/>
           </a:xfrm>
           <a:prstGeom prst="roundRect">
             <a:avLst/>
@@ -8203,9 +10763,9 @@
           <a:solidFill>
             <a:srgbClr val="162035"/>
           </a:solidFill>
-          <a:ln w="15240">
+          <a:ln w="17780">
             <a:solidFill>
-              <a:srgbClr val="263452"/>
+              <a:srgbClr val="334155"/>
             </a:solidFill>
           </a:ln>
         </p:spPr>
@@ -8239,8 +10799,8 @@
         </p:nvSpPr>
         <p:spPr>
           <a:xfrm>
-            <a:off x="914400" y="1645920"/>
-            <a:ext cx="4754880" cy="4389120"/>
+            <a:off x="914400" y="1554480"/>
+            <a:ext cx="4937760" cy="4663440"/>
           </a:xfrm>
           <a:prstGeom prst="rect">
             <a:avLst/>
@@ -8254,72 +10814,244 @@
           <a:lstStyle/>
           <a:p>
             <a:pPr>
-              <a:defRPr sz="1800" b="1">
-                <a:solidFill>
-                  <a:srgbClr val="10B981"/>
-                </a:solidFill>
+              <a:spcAft>
+                <a:spcPts val="800"/>
+              </a:spcAft>
+              <a:defRPr sz="1700" b="1">
+                <a:solidFill>
+                  <a:srgbClr val="38BDF8"/>
+                </a:solidFill>
+                <a:latin typeface="Segoe UI"/>
               </a:defRPr>
             </a:pPr>
             <a:r>
-              <a:t>Métricas de Validación en Test Independiente</a:t>
-            </a:r>
-          </a:p>
-          <a:p>
-            <a:br/>
-            <a:pPr>
-              <a:defRPr sz="1300">
-                <a:solidFill>
-                  <a:srgbClr val="F8FAFC"/>
-                </a:solidFill>
-              </a:defRPr>
-            </a:pPr>
-            <a:r>
-              <a:t>• Test ROC-AUC: 0.8329</a:t>
-            </a:r>
-            <a:br/>
-            <a:r>
-              <a:t>   - Capacidad discriminatoria sobresaliente para modelos lineales interpretables.</a:t>
-            </a:r>
-            <a:br/>
-            <a:r>
-              <a:t>   </a:t>
-            </a:r>
-            <a:br/>
-            <a:r>
-              <a:t>• Test Gini: 0.6658 (Gini = 2 * AUC - 1)</a:t>
-            </a:r>
-            <a:br/>
-            <a:r>
-              <a:t>   - Excelente separación de densidades solvente vs moroso.</a:t>
-            </a:r>
-            <a:br/>
-            <a:br/>
-            <a:r>
-              <a:t>• Brier Score: 0.1261</a:t>
-            </a:r>
-            <a:br/>
-            <a:r>
-              <a:t>   - Calibración probabilística ajustada y confiable.</a:t>
-            </a:r>
-            <a:br/>
-            <a:br/>
-            <a:r>
-              <a:t>• Estadístico KS (Kolmogorov-Smirnov): 0.528</a:t>
-            </a:r>
-            <a:br/>
-            <a:r>
-              <a:t>   - Separación máxima en el 3er decil de score.</a:t>
-            </a:r>
-            <a:br/>
-            <a:br/>
-            <a:r>
-              <a:t>Arquitectura del Modelo:</a:t>
-            </a:r>
-            <a:br/>
-            <a:r>
-              <a:t>Pipeline Scikit-Learn compuesto por StandardScaler + OneHotEncoder (drop='first') + Regresión Logística penalizada L2.</a:t>
-            </a:r>
-            <a:br/>
+              <a:t>Resultados de Validación y Escala FICO</a:t>
+            </a:r>
+          </a:p>
+          <a:p>
+            <a:pPr>
+              <a:spcAft>
+                <a:spcPts val="600"/>
+              </a:spcAft>
+            </a:pPr>
+            <a:r>
+              <a:rPr b="1" sz="1200">
+                <a:solidFill>
+                  <a:srgbClr val="34D399"/>
+                </a:solidFill>
+                <a:latin typeface="Segoe UI"/>
+              </a:rPr>
+              <a:t>Test ROC-AUC: </a:t>
+            </a:r>
+            <a:r>
+              <a:rPr b="0" sz="1200">
+                <a:solidFill>
+                  <a:srgbClr val="E2E8F0"/>
+                </a:solidFill>
+                <a:latin typeface="Segoe UI"/>
+              </a:rPr>
+              <a:t>0.8329 (Poder de discriminación excelente).</a:t>
+            </a:r>
+          </a:p>
+          <a:p>
+            <a:pPr>
+              <a:spcAft>
+                <a:spcPts val="600"/>
+              </a:spcAft>
+            </a:pPr>
+            <a:r>
+              <a:rPr b="1" sz="1200">
+                <a:solidFill>
+                  <a:srgbClr val="34D399"/>
+                </a:solidFill>
+                <a:latin typeface="Segoe UI"/>
+              </a:rPr>
+              <a:t>Test Gini: </a:t>
+            </a:r>
+            <a:r>
+              <a:rPr b="0" sz="1200">
+                <a:solidFill>
+                  <a:srgbClr val="E2E8F0"/>
+                </a:solidFill>
+                <a:latin typeface="Segoe UI"/>
+              </a:rPr>
+              <a:t>0.6658 (Gini = 2 × AUC - 1).</a:t>
+            </a:r>
+          </a:p>
+          <a:p>
+            <a:pPr>
+              <a:spcAft>
+                <a:spcPts val="600"/>
+              </a:spcAft>
+            </a:pPr>
+            <a:r>
+              <a:rPr b="1" sz="1200">
+                <a:solidFill>
+                  <a:srgbClr val="38BDF8"/>
+                </a:solidFill>
+                <a:latin typeface="Segoe UI"/>
+              </a:rPr>
+              <a:t>Brier Score: </a:t>
+            </a:r>
+            <a:r>
+              <a:rPr b="0" sz="1200">
+                <a:solidFill>
+                  <a:srgbClr val="E2E8F0"/>
+                </a:solidFill>
+                <a:latin typeface="Segoe UI"/>
+              </a:rPr>
+              <a:t>0.1261 (Calibración probabilística fiable).</a:t>
+            </a:r>
+          </a:p>
+          <a:p>
+            <a:pPr>
+              <a:spcAft>
+                <a:spcPts val="1200"/>
+              </a:spcAft>
+            </a:pPr>
+            <a:r>
+              <a:rPr b="1" sz="1200">
+                <a:solidFill>
+                  <a:srgbClr val="38BDF8"/>
+                </a:solidFill>
+                <a:latin typeface="Segoe UI"/>
+              </a:rPr>
+              <a:t>Estadístico KS: </a:t>
+            </a:r>
+            <a:r>
+              <a:rPr b="0" sz="1200">
+                <a:solidFill>
+                  <a:srgbClr val="E2E8F0"/>
+                </a:solidFill>
+                <a:latin typeface="Segoe UI"/>
+              </a:rPr>
+              <a:t>0.528 (Máxima separación en 3er decil de score).</a:t>
+            </a:r>
+          </a:p>
+          <a:p>
+            <a:pPr>
+              <a:spcAft>
+                <a:spcPts val="600"/>
+              </a:spcAft>
+            </a:pPr>
+            <a:r>
+              <a:rPr b="1" sz="1200">
+                <a:solidFill>
+                  <a:srgbClr val="FBBF24"/>
+                </a:solidFill>
+                <a:latin typeface="Segoe UI"/>
+              </a:rPr>
+              <a:t>Fórmula FICO: </a:t>
+            </a:r>
+            <a:r>
+              <a:rPr b="0" sz="1200">
+                <a:solidFill>
+                  <a:srgbClr val="E2E8F0"/>
+                </a:solidFill>
+                <a:latin typeface="Segoe UI"/>
+              </a:rPr>
+              <a:t>Score = Offset - Factor × ln(Odds)</a:t>
+            </a:r>
+          </a:p>
+          <a:p>
+            <a:pPr>
+              <a:spcAft>
+                <a:spcPts val="600"/>
+              </a:spcAft>
+            </a:pPr>
+            <a:r>
+              <a:rPr b="1" sz="1100">
+                <a:solidFill>
+                  <a:srgbClr val="38BDF8"/>
+                </a:solidFill>
+                <a:latin typeface="Segoe UI"/>
+              </a:rPr>
+              <a:t>• PDO (Points to Double Odds): </a:t>
+            </a:r>
+            <a:r>
+              <a:rPr b="0" sz="1100">
+                <a:solidFill>
+                  <a:srgbClr val="E2E8F0"/>
+                </a:solidFill>
+                <a:latin typeface="Segoe UI"/>
+              </a:rPr>
+              <a:t>20 puntos por duplicación de odds.</a:t>
+            </a:r>
+          </a:p>
+          <a:p>
+            <a:pPr>
+              <a:spcAft>
+                <a:spcPts val="600"/>
+              </a:spcAft>
+            </a:pPr>
+            <a:r>
+              <a:rPr b="1" sz="1100">
+                <a:solidFill>
+                  <a:srgbClr val="38BDF8"/>
+                </a:solidFill>
+                <a:latin typeface="Segoe UI"/>
+              </a:rPr>
+              <a:t>• Base Score: </a:t>
+            </a:r>
+            <a:r>
+              <a:rPr b="0" sz="1100">
+                <a:solidFill>
+                  <a:srgbClr val="E2E8F0"/>
+                </a:solidFill>
+                <a:latin typeface="Segoe UI"/>
+              </a:rPr>
+              <a:t>600 puntos para Odds de 50:1 (PD = 1.96%).</a:t>
+            </a:r>
+          </a:p>
+          <a:p>
+            <a:pPr>
+              <a:spcAft>
+                <a:spcPts val="600"/>
+              </a:spcAft>
+            </a:pPr>
+            <a:r>
+              <a:rPr b="1" sz="1100">
+                <a:solidFill>
+                  <a:srgbClr val="38BDF8"/>
+                </a:solidFill>
+                <a:latin typeface="Segoe UI"/>
+              </a:rPr>
+              <a:t>• Parámetros: </a:t>
+            </a:r>
+            <a:r>
+              <a:rPr b="0" sz="1100">
+                <a:solidFill>
+                  <a:srgbClr val="E2E8F0"/>
+                </a:solidFill>
+                <a:latin typeface="Segoe UI"/>
+              </a:rPr>
+              <a:t>Factor ≈ 28.85, Offset ≈ 712.87.</a:t>
+            </a:r>
+          </a:p>
+          <a:p>
+            <a:pPr>
+              <a:spcAft>
+                <a:spcPts val="600"/>
+              </a:spcAft>
+            </a:pPr>
+            <a:r>
+              <a:rPr b="1" sz="1150">
+                <a:solidFill>
+                  <a:srgbClr val="38BDF8"/>
+                </a:solidFill>
+                <a:latin typeface="Segoe UI"/>
+              </a:rPr>
+              <a:t>Cumplimiento Regulatorio: </a:t>
+            </a:r>
+            <a:r>
+              <a:rPr b="0" sz="1150">
+                <a:solidFill>
+                  <a:srgbClr val="34D399"/>
+                </a:solidFill>
+                <a:latin typeface="Segoe UI"/>
+              </a:rPr>
+              <a:t>Interpretabilidad aditiva requerida por reguladores bancarios.</a:t>
+            </a:r>
           </a:p>
         </p:txBody>
       </p:sp>
@@ -8331,8 +11063,8 @@
         </p:nvSpPr>
         <p:spPr>
           <a:xfrm>
-            <a:off x="6217920" y="1463040"/>
-            <a:ext cx="5212080" cy="4754880"/>
+            <a:off x="6309360" y="1371600"/>
+            <a:ext cx="5120640" cy="5029200"/>
           </a:xfrm>
           <a:prstGeom prst="roundRect">
             <a:avLst/>
@@ -8340,9 +11072,9 @@
           <a:solidFill>
             <a:srgbClr val="162035"/>
           </a:solidFill>
-          <a:ln w="15240">
+          <a:ln w="17780">
             <a:solidFill>
-              <a:srgbClr val="263452"/>
+              <a:srgbClr val="334155"/>
             </a:solidFill>
           </a:ln>
         </p:spPr>
@@ -8368,97 +11100,30 @@
           </a:p>
         </p:txBody>
       </p:sp>
-      <p:sp>
-        <p:nvSpPr>
-          <p:cNvPr id="8" name="TextBox 7"/>
-          <p:cNvSpPr txBox="1"/>
+      <p:pic>
+        <p:nvPicPr>
+          <p:cNvPr id="8" name="Picture 7" descr="chart_score.png"/>
+          <p:cNvPicPr>
+            <a:picLocks noChangeAspect="1"/>
+          </p:cNvPicPr>
           <p:nvPr/>
-        </p:nvSpPr>
+        </p:nvPicPr>
+        <p:blipFill>
+          <a:blip r:embed="rId2"/>
+          <a:stretch>
+            <a:fillRect/>
+          </a:stretch>
+        </p:blipFill>
         <p:spPr>
           <a:xfrm>
-            <a:off x="6400800" y="1645920"/>
-            <a:ext cx="4846320" cy="4389120"/>
+            <a:off x="6446520" y="1600200"/>
+            <a:ext cx="4846320" cy="4572000"/>
           </a:xfrm>
           <a:prstGeom prst="rect">
             <a:avLst/>
           </a:prstGeom>
-          <a:noFill/>
         </p:spPr>
-        <p:txBody>
-          <a:bodyPr wrap="square">
-            <a:spAutoFit/>
-          </a:bodyPr>
-          <a:lstStyle/>
-          <a:p>
-            <a:pPr>
-              <a:defRPr sz="1800" b="1">
-                <a:solidFill>
-                  <a:srgbClr val="38BDF8"/>
-                </a:solidFill>
-              </a:defRPr>
-            </a:pPr>
-            <a:r>
-              <a:t>Escalamiento a Score FICO (300 - 850)</a:t>
-            </a:r>
-          </a:p>
-          <a:p>
-            <a:br/>
-            <a:pPr>
-              <a:defRPr sz="1300">
-                <a:solidFill>
-                  <a:srgbClr val="F8FAFC"/>
-                </a:solidFill>
-              </a:defRPr>
-            </a:pPr>
-            <a:r>
-              <a:t>Fórmula de Transformación Estándar Bancaria:</a:t>
-            </a:r>
-            <a:br/>
-            <a:r>
-              <a:t>   Score = Offset - Factor * ln(Odds)</a:t>
-            </a:r>
-            <a:br/>
-            <a:r>
-              <a:t>   Odds = PD / (1 - PD)</a:t>
-            </a:r>
-            <a:br/>
-            <a:br/>
-            <a:r>
-              <a:t>Parámetros Calibrados:</a:t>
-            </a:r>
-            <a:br/>
-            <a:r>
-              <a:t>• Points to Double the Odds (PDO): 20 puntos</a:t>
-            </a:r>
-            <a:br/>
-            <a:r>
-              <a:t>• Base Score: 600 puntos para Odds de 50:1 (PD = 1.96%)</a:t>
-            </a:r>
-            <a:br/>
-            <a:r>
-              <a:t>• Factor = 20 / ln(2) ≈ 28.85</a:t>
-            </a:r>
-            <a:br/>
-            <a:r>
-              <a:t>• Offset = 600 - 28.85 * ln(1/50) ≈ 712.87</a:t>
-            </a:r>
-            <a:br/>
-            <a:br/>
-            <a:r>
-              <a:t>Ventajas Regulatorias:</a:t>
-            </a:r>
-            <a:br/>
-            <a:r>
-              <a:t>- Interpretabilidad completa requerida por reguladores bancarios.</a:t>
-            </a:r>
-            <a:br/>
-            <a:r>
-              <a:t>- Desglose lineal exacto de puntos ganados/perdidos por cada variable.</a:t>
-            </a:r>
-            <a:br/>
-          </a:p>
-        </p:txBody>
-      </p:sp>
+      </p:pic>
     </p:spTree>
   </p:cSld>
   <p:clrMapOvr>
@@ -8529,7 +11194,7 @@
         <p:spPr>
           <a:xfrm>
             <a:off x="731520" y="365760"/>
-            <a:ext cx="10698480" cy="320040"/>
+            <a:ext cx="10698480" cy="292608"/>
           </a:xfrm>
           <a:prstGeom prst="rect">
             <a:avLst/>
@@ -8547,7 +11212,7 @@
                 <a:solidFill>
                   <a:srgbClr val="38BDF8"/>
                 </a:solidFill>
-                <a:latin typeface="Arial"/>
+                <a:latin typeface="Segoe UI"/>
               </a:defRPr>
             </a:pPr>
             <a:r>
@@ -8564,8 +11229,8 @@
         </p:nvSpPr>
         <p:spPr>
           <a:xfrm>
-            <a:off x="731520" y="640080"/>
-            <a:ext cx="10698480" cy="731520"/>
+            <a:off x="731520" y="658368"/>
+            <a:ext cx="10698480" cy="594360"/>
           </a:xfrm>
           <a:prstGeom prst="rect">
             <a:avLst/>
@@ -8579,11 +11244,11 @@
           <a:lstStyle/>
           <a:p>
             <a:pPr>
-              <a:defRPr sz="2400" b="1">
-                <a:solidFill>
-                  <a:srgbClr val="F8FAFC"/>
-                </a:solidFill>
-                <a:latin typeface="Arial"/>
+              <a:defRPr sz="2300" b="1">
+                <a:solidFill>
+                  <a:srgbClr val="FFFFFF"/>
+                </a:solidFill>
+                <a:latin typeface="Segoe UI"/>
               </a:defRPr>
             </a:pPr>
             <a:r>
@@ -8600,8 +11265,8 @@
         </p:nvSpPr>
         <p:spPr>
           <a:xfrm>
-            <a:off x="731520" y="1463040"/>
-            <a:ext cx="10698480" cy="1280160"/>
+            <a:off x="731520" y="1371600"/>
+            <a:ext cx="10728655" cy="1188720"/>
           </a:xfrm>
           <a:prstGeom prst="roundRect">
             <a:avLst/>
@@ -8609,9 +11274,9 @@
           <a:solidFill>
             <a:srgbClr val="162035"/>
           </a:solidFill>
-          <a:ln w="15240">
+          <a:ln w="17780">
             <a:solidFill>
-              <a:srgbClr val="263452"/>
+              <a:srgbClr val="334155"/>
             </a:solidFill>
           </a:ln>
         </p:spPr>
@@ -8645,8 +11310,8 @@
         </p:nvSpPr>
         <p:spPr>
           <a:xfrm>
-            <a:off x="1005840" y="1600200"/>
-            <a:ext cx="10149840" cy="1005840"/>
+            <a:off x="914400" y="1463040"/>
+            <a:ext cx="10332720" cy="1005840"/>
           </a:xfrm>
           <a:prstGeom prst="rect">
             <a:avLst/>
@@ -8660,40 +11325,951 @@
           <a:lstStyle/>
           <a:p>
             <a:pPr>
-              <a:defRPr sz="1400" b="1">
-                <a:solidFill>
-                  <a:srgbClr val="F43F5E"/>
-                </a:solidFill>
+              <a:spcAft>
+                <a:spcPts val="400"/>
+              </a:spcAft>
+              <a:defRPr sz="1300" b="1">
+                <a:solidFill>
+                  <a:srgbClr val="FB7185"/>
+                </a:solidFill>
+                <a:latin typeface="Segoe UI"/>
               </a:defRPr>
             </a:pPr>
             <a:r>
-              <a:t>Compuerta 1: Reglas de Exclusión Dura (Knockout Filters)</a:t>
-            </a:r>
-          </a:p>
-          <a:p>
-            <a:pPr>
-              <a:defRPr sz="1200">
-                <a:solidFill>
-                  <a:srgbClr val="F8FAFC"/>
-                </a:solidFill>
+              <a:t>Compuerta Pre-Scoring: Reglas de Exclusión Dura (Knockout Filters)</a:t>
+            </a:r>
+          </a:p>
+          <a:p>
+            <a:pPr>
+              <a:defRPr sz="1100">
+                <a:solidFill>
+                  <a:srgbClr val="FFFFFF"/>
+                </a:solidFill>
+                <a:latin typeface="Segoe UI"/>
               </a:defRPr>
             </a:pPr>
             <a:r>
-              <a:t>KO-01: Menor de 18 años  |  KO-02: Mayor de 80 años  |  KO-03: Ingreso &lt; $8,000 USD  |  KO-04: DTI &gt; 65%  |  KO-05: Cooldown &lt; 90 días</a:t>
-            </a:r>
-          </a:p>
-        </p:txBody>
-      </p:sp>
-      <p:sp>
-        <p:nvSpPr>
-          <p:cNvPr id="7" name="Rounded Rectangle 6"/>
+              <a:t>• KO-01: Menor de 18 años   |   • KO-02: Mayor de 80 años   |   • KO-03: Ingreso &lt; $8,000 USD   |   • KO-04: DTI &gt; 65%   |   • KO-05: Cooldown &lt; 90 días</a:t>
+            </a:r>
+          </a:p>
+        </p:txBody>
+      </p:sp>
+      <p:graphicFrame>
+        <p:nvGraphicFramePr>
+          <p:cNvPr id="7" name="Table 6"/>
+          <p:cNvGraphicFramePr>
+            <a:graphicFrameLocks noGrp="1"/>
+          </p:cNvGraphicFramePr>
+          <p:nvPr/>
+        </p:nvGraphicFramePr>
+        <p:xfrm>
+          <a:off x="731520" y="2743200"/>
+          <a:ext cx="10698480" cy="2468880"/>
+        </p:xfrm>
+        <a:graphic>
+          <a:graphicData uri="http://schemas.openxmlformats.org/drawingml/2006/table">
+            <a:tbl>
+              <a:tblPr firstRow="1" bandRow="1">
+                <a:tableStyleId>{5C22544A-7EE6-4342-B048-85BDC9FD1C3A}</a:tableStyleId>
+              </a:tblPr>
+              <a:tblGrid>
+                <a:gridCol w="1920240"/>
+                <a:gridCol w="1463040"/>
+                <a:gridCol w="1463040"/>
+                <a:gridCol w="2560320"/>
+                <a:gridCol w="1645920"/>
+                <a:gridCol w="1645920"/>
+              </a:tblGrid>
+              <a:tr h="411480">
+                <a:tc>
+                  <a:txBody>
+                    <a:bodyPr/>
+                    <a:lstStyle/>
+                    <a:p>
+                      <a:pPr algn="ctr">
+                        <a:defRPr sz="1100" b="1">
+                          <a:solidFill>
+                            <a:srgbClr val="38BDF8"/>
+                          </a:solidFill>
+                          <a:latin typeface="Segoe UI"/>
+                        </a:defRPr>
+                      </a:pPr>
+                      <a:r>
+                        <a:t>Tramo de Riesgo</a:t>
+                      </a:r>
+                    </a:p>
+                  </a:txBody>
+                  <a:tcPr anchor="ctr">
+                    <a:solidFill>
+                      <a:srgbClr val="1E293B"/>
+                    </a:solidFill>
+                  </a:tcPr>
+                </a:tc>
+                <a:tc>
+                  <a:txBody>
+                    <a:bodyPr/>
+                    <a:lstStyle/>
+                    <a:p>
+                      <a:pPr algn="ctr">
+                        <a:defRPr sz="1100" b="1">
+                          <a:solidFill>
+                            <a:srgbClr val="38BDF8"/>
+                          </a:solidFill>
+                          <a:latin typeface="Segoe UI"/>
+                        </a:defRPr>
+                      </a:pPr>
+                      <a:r>
+                        <a:t>Rango Score</a:t>
+                      </a:r>
+                    </a:p>
+                  </a:txBody>
+                  <a:tcPr anchor="ctr">
+                    <a:solidFill>
+                      <a:srgbClr val="1E293B"/>
+                    </a:solidFill>
+                  </a:tcPr>
+                </a:tc>
+                <a:tc>
+                  <a:txBody>
+                    <a:bodyPr/>
+                    <a:lstStyle/>
+                    <a:p>
+                      <a:pPr algn="ctr">
+                        <a:defRPr sz="1100" b="1">
+                          <a:solidFill>
+                            <a:srgbClr val="38BDF8"/>
+                          </a:solidFill>
+                          <a:latin typeface="Segoe UI"/>
+                        </a:defRPr>
+                      </a:pPr>
+                      <a:r>
+                        <a:t>Prob. Default</a:t>
+                      </a:r>
+                    </a:p>
+                  </a:txBody>
+                  <a:tcPr anchor="ctr">
+                    <a:solidFill>
+                      <a:srgbClr val="1E293B"/>
+                    </a:solidFill>
+                  </a:tcPr>
+                </a:tc>
+                <a:tc>
+                  <a:txBody>
+                    <a:bodyPr/>
+                    <a:lstStyle/>
+                    <a:p>
+                      <a:pPr algn="ctr">
+                        <a:defRPr sz="1100" b="1">
+                          <a:solidFill>
+                            <a:srgbClr val="38BDF8"/>
+                          </a:solidFill>
+                          <a:latin typeface="Segoe UI"/>
+                        </a:defRPr>
+                      </a:pPr>
+                      <a:r>
+                        <a:t>Decisión Operativa</a:t>
+                      </a:r>
+                    </a:p>
+                  </a:txBody>
+                  <a:tcPr anchor="ctr">
+                    <a:solidFill>
+                      <a:srgbClr val="1E293B"/>
+                    </a:solidFill>
+                  </a:tcPr>
+                </a:tc>
+                <a:tc>
+                  <a:txBody>
+                    <a:bodyPr/>
+                    <a:lstStyle/>
+                    <a:p>
+                      <a:pPr algn="ctr">
+                        <a:defRPr sz="1100" b="1">
+                          <a:solidFill>
+                            <a:srgbClr val="38BDF8"/>
+                          </a:solidFill>
+                          <a:latin typeface="Segoe UI"/>
+                        </a:defRPr>
+                      </a:pPr>
+                      <a:r>
+                        <a:t>Límite Máximo</a:t>
+                      </a:r>
+                    </a:p>
+                  </a:txBody>
+                  <a:tcPr anchor="ctr">
+                    <a:solidFill>
+                      <a:srgbClr val="1E293B"/>
+                    </a:solidFill>
+                  </a:tcPr>
+                </a:tc>
+                <a:tc>
+                  <a:txBody>
+                    <a:bodyPr/>
+                    <a:lstStyle/>
+                    <a:p>
+                      <a:pPr algn="ctr">
+                        <a:defRPr sz="1100" b="1">
+                          <a:solidFill>
+                            <a:srgbClr val="38BDF8"/>
+                          </a:solidFill>
+                          <a:latin typeface="Segoe UI"/>
+                        </a:defRPr>
+                      </a:pPr>
+                      <a:r>
+                        <a:t>Spread Tasa</a:t>
+                      </a:r>
+                    </a:p>
+                  </a:txBody>
+                  <a:tcPr anchor="ctr">
+                    <a:solidFill>
+                      <a:srgbClr val="1E293B"/>
+                    </a:solidFill>
+                  </a:tcPr>
+                </a:tc>
+              </a:tr>
+              <a:tr h="411480">
+                <a:tc>
+                  <a:txBody>
+                    <a:bodyPr/>
+                    <a:lstStyle/>
+                    <a:p>
+                      <a:pPr algn="l">
+                        <a:defRPr sz="1050">
+                          <a:solidFill>
+                            <a:srgbClr val="FFFFFF"/>
+                          </a:solidFill>
+                          <a:latin typeface="Segoe UI"/>
+                        </a:defRPr>
+                      </a:pPr>
+                      <a:r>
+                        <a:t>Tier A (Prime)</a:t>
+                      </a:r>
+                    </a:p>
+                  </a:txBody>
+                  <a:tcPr anchor="ctr">
+                    <a:solidFill>
+                      <a:srgbClr val="162035"/>
+                    </a:solidFill>
+                  </a:tcPr>
+                </a:tc>
+                <a:tc>
+                  <a:txBody>
+                    <a:bodyPr/>
+                    <a:lstStyle/>
+                    <a:p>
+                      <a:pPr algn="ctr">
+                        <a:defRPr sz="1050">
+                          <a:solidFill>
+                            <a:srgbClr val="FFFFFF"/>
+                          </a:solidFill>
+                          <a:latin typeface="Segoe UI"/>
+                        </a:defRPr>
+                      </a:pPr>
+                      <a:r>
+                        <a:t>750 - 850</a:t>
+                      </a:r>
+                    </a:p>
+                  </a:txBody>
+                  <a:tcPr anchor="ctr">
+                    <a:solidFill>
+                      <a:srgbClr val="162035"/>
+                    </a:solidFill>
+                  </a:tcPr>
+                </a:tc>
+                <a:tc>
+                  <a:txBody>
+                    <a:bodyPr/>
+                    <a:lstStyle/>
+                    <a:p>
+                      <a:pPr algn="ctr">
+                        <a:defRPr sz="1050">
+                          <a:solidFill>
+                            <a:srgbClr val="FFFFFF"/>
+                          </a:solidFill>
+                          <a:latin typeface="Segoe UI"/>
+                        </a:defRPr>
+                      </a:pPr>
+                      <a:r>
+                        <a:t>&lt; 4.5%</a:t>
+                      </a:r>
+                    </a:p>
+                  </a:txBody>
+                  <a:tcPr anchor="ctr">
+                    <a:solidFill>
+                      <a:srgbClr val="162035"/>
+                    </a:solidFill>
+                  </a:tcPr>
+                </a:tc>
+                <a:tc>
+                  <a:txBody>
+                    <a:bodyPr/>
+                    <a:lstStyle/>
+                    <a:p>
+                      <a:pPr algn="ctr">
+                        <a:defRPr sz="1050">
+                          <a:solidFill>
+                            <a:srgbClr val="FFFFFF"/>
+                          </a:solidFill>
+                          <a:latin typeface="Segoe UI"/>
+                        </a:defRPr>
+                      </a:pPr>
+                      <a:r>
+                        <a:t>Aprobación Automática (STP)</a:t>
+                      </a:r>
+                    </a:p>
+                  </a:txBody>
+                  <a:tcPr anchor="ctr">
+                    <a:solidFill>
+                      <a:srgbClr val="162035"/>
+                    </a:solidFill>
+                  </a:tcPr>
+                </a:tc>
+                <a:tc>
+                  <a:txBody>
+                    <a:bodyPr/>
+                    <a:lstStyle/>
+                    <a:p>
+                      <a:pPr algn="ctr">
+                        <a:defRPr sz="1050">
+                          <a:solidFill>
+                            <a:srgbClr val="FFFFFF"/>
+                          </a:solidFill>
+                          <a:latin typeface="Segoe UI"/>
+                        </a:defRPr>
+                      </a:pPr>
+                      <a:r>
+                        <a:t>125% del monto</a:t>
+                      </a:r>
+                    </a:p>
+                  </a:txBody>
+                  <a:tcPr anchor="ctr">
+                    <a:solidFill>
+                      <a:srgbClr val="162035"/>
+                    </a:solidFill>
+                  </a:tcPr>
+                </a:tc>
+                <a:tc>
+                  <a:txBody>
+                    <a:bodyPr/>
+                    <a:lstStyle/>
+                    <a:p>
+                      <a:pPr algn="ctr">
+                        <a:defRPr sz="1050">
+                          <a:solidFill>
+                            <a:srgbClr val="FFFFFF"/>
+                          </a:solidFill>
+                          <a:latin typeface="Segoe UI"/>
+                        </a:defRPr>
+                      </a:pPr>
+                      <a:r>
+                        <a:t>+150 bps (7.00%)</a:t>
+                      </a:r>
+                    </a:p>
+                  </a:txBody>
+                  <a:tcPr anchor="ctr">
+                    <a:solidFill>
+                      <a:srgbClr val="162035"/>
+                    </a:solidFill>
+                  </a:tcPr>
+                </a:tc>
+              </a:tr>
+              <a:tr h="411480">
+                <a:tc>
+                  <a:txBody>
+                    <a:bodyPr/>
+                    <a:lstStyle/>
+                    <a:p>
+                      <a:pPr algn="l">
+                        <a:defRPr sz="1050">
+                          <a:solidFill>
+                            <a:srgbClr val="FFFFFF"/>
+                          </a:solidFill>
+                          <a:latin typeface="Segoe UI"/>
+                        </a:defRPr>
+                      </a:pPr>
+                      <a:r>
+                        <a:t>Tier B (Bajo Riesgo)</a:t>
+                      </a:r>
+                    </a:p>
+                  </a:txBody>
+                  <a:tcPr anchor="ctr">
+                    <a:solidFill>
+                      <a:srgbClr val="101828"/>
+                    </a:solidFill>
+                  </a:tcPr>
+                </a:tc>
+                <a:tc>
+                  <a:txBody>
+                    <a:bodyPr/>
+                    <a:lstStyle/>
+                    <a:p>
+                      <a:pPr algn="ctr">
+                        <a:defRPr sz="1050">
+                          <a:solidFill>
+                            <a:srgbClr val="FFFFFF"/>
+                          </a:solidFill>
+                          <a:latin typeface="Segoe UI"/>
+                        </a:defRPr>
+                      </a:pPr>
+                      <a:r>
+                        <a:t>670 - 749</a:t>
+                      </a:r>
+                    </a:p>
+                  </a:txBody>
+                  <a:tcPr anchor="ctr">
+                    <a:solidFill>
+                      <a:srgbClr val="101828"/>
+                    </a:solidFill>
+                  </a:tcPr>
+                </a:tc>
+                <a:tc>
+                  <a:txBody>
+                    <a:bodyPr/>
+                    <a:lstStyle/>
+                    <a:p>
+                      <a:pPr algn="ctr">
+                        <a:defRPr sz="1050">
+                          <a:solidFill>
+                            <a:srgbClr val="FFFFFF"/>
+                          </a:solidFill>
+                          <a:latin typeface="Segoe UI"/>
+                        </a:defRPr>
+                      </a:pPr>
+                      <a:r>
+                        <a:t>4.5% - 12.0%</a:t>
+                      </a:r>
+                    </a:p>
+                  </a:txBody>
+                  <a:tcPr anchor="ctr">
+                    <a:solidFill>
+                      <a:srgbClr val="101828"/>
+                    </a:solidFill>
+                  </a:tcPr>
+                </a:tc>
+                <a:tc>
+                  <a:txBody>
+                    <a:bodyPr/>
+                    <a:lstStyle/>
+                    <a:p>
+                      <a:pPr algn="ctr">
+                        <a:defRPr sz="1050">
+                          <a:solidFill>
+                            <a:srgbClr val="FFFFFF"/>
+                          </a:solidFill>
+                          <a:latin typeface="Segoe UI"/>
+                        </a:defRPr>
+                      </a:pPr>
+                      <a:r>
+                        <a:t>Aprobado Estándar (DTI &lt;= 28%)</a:t>
+                      </a:r>
+                    </a:p>
+                  </a:txBody>
+                  <a:tcPr anchor="ctr">
+                    <a:solidFill>
+                      <a:srgbClr val="101828"/>
+                    </a:solidFill>
+                  </a:tcPr>
+                </a:tc>
+                <a:tc>
+                  <a:txBody>
+                    <a:bodyPr/>
+                    <a:lstStyle/>
+                    <a:p>
+                      <a:pPr algn="ctr">
+                        <a:defRPr sz="1050">
+                          <a:solidFill>
+                            <a:srgbClr val="FFFFFF"/>
+                          </a:solidFill>
+                          <a:latin typeface="Segoe UI"/>
+                        </a:defRPr>
+                      </a:pPr>
+                      <a:r>
+                        <a:t>100% del monto</a:t>
+                      </a:r>
+                    </a:p>
+                  </a:txBody>
+                  <a:tcPr anchor="ctr">
+                    <a:solidFill>
+                      <a:srgbClr val="101828"/>
+                    </a:solidFill>
+                  </a:tcPr>
+                </a:tc>
+                <a:tc>
+                  <a:txBody>
+                    <a:bodyPr/>
+                    <a:lstStyle/>
+                    <a:p>
+                      <a:pPr algn="ctr">
+                        <a:defRPr sz="1050">
+                          <a:solidFill>
+                            <a:srgbClr val="FFFFFF"/>
+                          </a:solidFill>
+                          <a:latin typeface="Segoe UI"/>
+                        </a:defRPr>
+                      </a:pPr>
+                      <a:r>
+                        <a:t>+250 bps (8.00%)</a:t>
+                      </a:r>
+                    </a:p>
+                  </a:txBody>
+                  <a:tcPr anchor="ctr">
+                    <a:solidFill>
+                      <a:srgbClr val="101828"/>
+                    </a:solidFill>
+                  </a:tcPr>
+                </a:tc>
+              </a:tr>
+              <a:tr h="411480">
+                <a:tc>
+                  <a:txBody>
+                    <a:bodyPr/>
+                    <a:lstStyle/>
+                    <a:p>
+                      <a:pPr algn="l">
+                        <a:defRPr sz="1050">
+                          <a:solidFill>
+                            <a:srgbClr val="FFFFFF"/>
+                          </a:solidFill>
+                          <a:latin typeface="Segoe UI"/>
+                        </a:defRPr>
+                      </a:pPr>
+                      <a:r>
+                        <a:t>Tier C (Near-Prime)</a:t>
+                      </a:r>
+                    </a:p>
+                  </a:txBody>
+                  <a:tcPr anchor="ctr">
+                    <a:solidFill>
+                      <a:srgbClr val="162035"/>
+                    </a:solidFill>
+                  </a:tcPr>
+                </a:tc>
+                <a:tc>
+                  <a:txBody>
+                    <a:bodyPr/>
+                    <a:lstStyle/>
+                    <a:p>
+                      <a:pPr algn="ctr">
+                        <a:defRPr sz="1050">
+                          <a:solidFill>
+                            <a:srgbClr val="FFFFFF"/>
+                          </a:solidFill>
+                          <a:latin typeface="Segoe UI"/>
+                        </a:defRPr>
+                      </a:pPr>
+                      <a:r>
+                        <a:t>600 - 669</a:t>
+                      </a:r>
+                    </a:p>
+                  </a:txBody>
+                  <a:tcPr anchor="ctr">
+                    <a:solidFill>
+                      <a:srgbClr val="162035"/>
+                    </a:solidFill>
+                  </a:tcPr>
+                </a:tc>
+                <a:tc>
+                  <a:txBody>
+                    <a:bodyPr/>
+                    <a:lstStyle/>
+                    <a:p>
+                      <a:pPr algn="ctr">
+                        <a:defRPr sz="1050">
+                          <a:solidFill>
+                            <a:srgbClr val="FFFFFF"/>
+                          </a:solidFill>
+                          <a:latin typeface="Segoe UI"/>
+                        </a:defRPr>
+                      </a:pPr>
+                      <a:r>
+                        <a:t>12.0% - 24.0%</a:t>
+                      </a:r>
+                    </a:p>
+                  </a:txBody>
+                  <a:tcPr anchor="ctr">
+                    <a:solidFill>
+                      <a:srgbClr val="162035"/>
+                    </a:solidFill>
+                  </a:tcPr>
+                </a:tc>
+                <a:tc>
+                  <a:txBody>
+                    <a:bodyPr/>
+                    <a:lstStyle/>
+                    <a:p>
+                      <a:pPr algn="ctr">
+                        <a:defRPr sz="1050">
+                          <a:solidFill>
+                            <a:srgbClr val="FFFFFF"/>
+                          </a:solidFill>
+                          <a:latin typeface="Segoe UI"/>
+                        </a:defRPr>
+                      </a:pPr>
+                      <a:r>
+                        <a:t>Revisión Manual / Condicionado</a:t>
+                      </a:r>
+                    </a:p>
+                  </a:txBody>
+                  <a:tcPr anchor="ctr">
+                    <a:solidFill>
+                      <a:srgbClr val="162035"/>
+                    </a:solidFill>
+                  </a:tcPr>
+                </a:tc>
+                <a:tc>
+                  <a:txBody>
+                    <a:bodyPr/>
+                    <a:lstStyle/>
+                    <a:p>
+                      <a:pPr algn="ctr">
+                        <a:defRPr sz="1050">
+                          <a:solidFill>
+                            <a:srgbClr val="FFFFFF"/>
+                          </a:solidFill>
+                          <a:latin typeface="Segoe UI"/>
+                        </a:defRPr>
+                      </a:pPr>
+                      <a:r>
+                        <a:t>80% del monto</a:t>
+                      </a:r>
+                    </a:p>
+                  </a:txBody>
+                  <a:tcPr anchor="ctr">
+                    <a:solidFill>
+                      <a:srgbClr val="162035"/>
+                    </a:solidFill>
+                  </a:tcPr>
+                </a:tc>
+                <a:tc>
+                  <a:txBody>
+                    <a:bodyPr/>
+                    <a:lstStyle/>
+                    <a:p>
+                      <a:pPr algn="ctr">
+                        <a:defRPr sz="1050">
+                          <a:solidFill>
+                            <a:srgbClr val="FFFFFF"/>
+                          </a:solidFill>
+                          <a:latin typeface="Segoe UI"/>
+                        </a:defRPr>
+                      </a:pPr>
+                      <a:r>
+                        <a:t>+450 bps (10.00%)</a:t>
+                      </a:r>
+                    </a:p>
+                  </a:txBody>
+                  <a:tcPr anchor="ctr">
+                    <a:solidFill>
+                      <a:srgbClr val="162035"/>
+                    </a:solidFill>
+                  </a:tcPr>
+                </a:tc>
+              </a:tr>
+              <a:tr h="411480">
+                <a:tc>
+                  <a:txBody>
+                    <a:bodyPr/>
+                    <a:lstStyle/>
+                    <a:p>
+                      <a:pPr algn="l">
+                        <a:defRPr sz="1050">
+                          <a:solidFill>
+                            <a:srgbClr val="FFFFFF"/>
+                          </a:solidFill>
+                          <a:latin typeface="Segoe UI"/>
+                        </a:defRPr>
+                      </a:pPr>
+                      <a:r>
+                        <a:t>Tier D (Subprime)</a:t>
+                      </a:r>
+                    </a:p>
+                  </a:txBody>
+                  <a:tcPr anchor="ctr">
+                    <a:solidFill>
+                      <a:srgbClr val="101828"/>
+                    </a:solidFill>
+                  </a:tcPr>
+                </a:tc>
+                <a:tc>
+                  <a:txBody>
+                    <a:bodyPr/>
+                    <a:lstStyle/>
+                    <a:p>
+                      <a:pPr algn="ctr">
+                        <a:defRPr sz="1050">
+                          <a:solidFill>
+                            <a:srgbClr val="FFFFFF"/>
+                          </a:solidFill>
+                          <a:latin typeface="Segoe UI"/>
+                        </a:defRPr>
+                      </a:pPr>
+                      <a:r>
+                        <a:t>530 - 599</a:t>
+                      </a:r>
+                    </a:p>
+                  </a:txBody>
+                  <a:tcPr anchor="ctr">
+                    <a:solidFill>
+                      <a:srgbClr val="101828"/>
+                    </a:solidFill>
+                  </a:tcPr>
+                </a:tc>
+                <a:tc>
+                  <a:txBody>
+                    <a:bodyPr/>
+                    <a:lstStyle/>
+                    <a:p>
+                      <a:pPr algn="ctr">
+                        <a:defRPr sz="1050">
+                          <a:solidFill>
+                            <a:srgbClr val="FFFFFF"/>
+                          </a:solidFill>
+                          <a:latin typeface="Segoe UI"/>
+                        </a:defRPr>
+                      </a:pPr>
+                      <a:r>
+                        <a:t>24.0% - 42.0%</a:t>
+                      </a:r>
+                    </a:p>
+                  </a:txBody>
+                  <a:tcPr anchor="ctr">
+                    <a:solidFill>
+                      <a:srgbClr val="101828"/>
+                    </a:solidFill>
+                  </a:tcPr>
+                </a:tc>
+                <a:tc>
+                  <a:txBody>
+                    <a:bodyPr/>
+                    <a:lstStyle/>
+                    <a:p>
+                      <a:pPr algn="ctr">
+                        <a:defRPr sz="1050">
+                          <a:solidFill>
+                            <a:srgbClr val="FFFFFF"/>
+                          </a:solidFill>
+                          <a:latin typeface="Segoe UI"/>
+                        </a:defRPr>
+                      </a:pPr>
+                      <a:r>
+                        <a:t>Aprobación con Aval / Colateral</a:t>
+                      </a:r>
+                    </a:p>
+                  </a:txBody>
+                  <a:tcPr anchor="ctr">
+                    <a:solidFill>
+                      <a:srgbClr val="101828"/>
+                    </a:solidFill>
+                  </a:tcPr>
+                </a:tc>
+                <a:tc>
+                  <a:txBody>
+                    <a:bodyPr/>
+                    <a:lstStyle/>
+                    <a:p>
+                      <a:pPr algn="ctr">
+                        <a:defRPr sz="1050">
+                          <a:solidFill>
+                            <a:srgbClr val="FFFFFF"/>
+                          </a:solidFill>
+                          <a:latin typeface="Segoe UI"/>
+                        </a:defRPr>
+                      </a:pPr>
+                      <a:r>
+                        <a:t>50% del monto</a:t>
+                      </a:r>
+                    </a:p>
+                  </a:txBody>
+                  <a:tcPr anchor="ctr">
+                    <a:solidFill>
+                      <a:srgbClr val="101828"/>
+                    </a:solidFill>
+                  </a:tcPr>
+                </a:tc>
+                <a:tc>
+                  <a:txBody>
+                    <a:bodyPr/>
+                    <a:lstStyle/>
+                    <a:p>
+                      <a:pPr algn="ctr">
+                        <a:defRPr sz="1050">
+                          <a:solidFill>
+                            <a:srgbClr val="FFFFFF"/>
+                          </a:solidFill>
+                          <a:latin typeface="Segoe UI"/>
+                        </a:defRPr>
+                      </a:pPr>
+                      <a:r>
+                        <a:t>+750 bps (13.00%)</a:t>
+                      </a:r>
+                    </a:p>
+                  </a:txBody>
+                  <a:tcPr anchor="ctr">
+                    <a:solidFill>
+                      <a:srgbClr val="101828"/>
+                    </a:solidFill>
+                  </a:tcPr>
+                </a:tc>
+              </a:tr>
+              <a:tr h="411480">
+                <a:tc>
+                  <a:txBody>
+                    <a:bodyPr/>
+                    <a:lstStyle/>
+                    <a:p>
+                      <a:pPr algn="l">
+                        <a:defRPr sz="1050">
+                          <a:solidFill>
+                            <a:srgbClr val="FFFFFF"/>
+                          </a:solidFill>
+                          <a:latin typeface="Segoe UI"/>
+                        </a:defRPr>
+                      </a:pPr>
+                      <a:r>
+                        <a:t>Tier E (Crítico)</a:t>
+                      </a:r>
+                    </a:p>
+                  </a:txBody>
+                  <a:tcPr anchor="ctr">
+                    <a:solidFill>
+                      <a:srgbClr val="162035"/>
+                    </a:solidFill>
+                  </a:tcPr>
+                </a:tc>
+                <a:tc>
+                  <a:txBody>
+                    <a:bodyPr/>
+                    <a:lstStyle/>
+                    <a:p>
+                      <a:pPr algn="ctr">
+                        <a:defRPr sz="1050">
+                          <a:solidFill>
+                            <a:srgbClr val="FFFFFF"/>
+                          </a:solidFill>
+                          <a:latin typeface="Segoe UI"/>
+                        </a:defRPr>
+                      </a:pPr>
+                      <a:r>
+                        <a:t>300 - 529</a:t>
+                      </a:r>
+                    </a:p>
+                  </a:txBody>
+                  <a:tcPr anchor="ctr">
+                    <a:solidFill>
+                      <a:srgbClr val="162035"/>
+                    </a:solidFill>
+                  </a:tcPr>
+                </a:tc>
+                <a:tc>
+                  <a:txBody>
+                    <a:bodyPr/>
+                    <a:lstStyle/>
+                    <a:p>
+                      <a:pPr algn="ctr">
+                        <a:defRPr sz="1050">
+                          <a:solidFill>
+                            <a:srgbClr val="FFFFFF"/>
+                          </a:solidFill>
+                          <a:latin typeface="Segoe UI"/>
+                        </a:defRPr>
+                      </a:pPr>
+                      <a:r>
+                        <a:t>&gt; 42.0%</a:t>
+                      </a:r>
+                    </a:p>
+                  </a:txBody>
+                  <a:tcPr anchor="ctr">
+                    <a:solidFill>
+                      <a:srgbClr val="162035"/>
+                    </a:solidFill>
+                  </a:tcPr>
+                </a:tc>
+                <a:tc>
+                  <a:txBody>
+                    <a:bodyPr/>
+                    <a:lstStyle/>
+                    <a:p>
+                      <a:pPr algn="ctr">
+                        <a:defRPr sz="1050">
+                          <a:solidFill>
+                            <a:srgbClr val="FFFFFF"/>
+                          </a:solidFill>
+                          <a:latin typeface="Segoe UI"/>
+                        </a:defRPr>
+                      </a:pPr>
+                      <a:r>
+                        <a:t>Rechazado por Política de Riesgo</a:t>
+                      </a:r>
+                    </a:p>
+                  </a:txBody>
+                  <a:tcPr anchor="ctr">
+                    <a:solidFill>
+                      <a:srgbClr val="162035"/>
+                    </a:solidFill>
+                  </a:tcPr>
+                </a:tc>
+                <a:tc>
+                  <a:txBody>
+                    <a:bodyPr/>
+                    <a:lstStyle/>
+                    <a:p>
+                      <a:pPr algn="ctr">
+                        <a:defRPr sz="1050">
+                          <a:solidFill>
+                            <a:srgbClr val="FFFFFF"/>
+                          </a:solidFill>
+                          <a:latin typeface="Segoe UI"/>
+                        </a:defRPr>
+                      </a:pPr>
+                      <a:r>
+                        <a:t>0%</a:t>
+                      </a:r>
+                    </a:p>
+                  </a:txBody>
+                  <a:tcPr anchor="ctr">
+                    <a:solidFill>
+                      <a:srgbClr val="162035"/>
+                    </a:solidFill>
+                  </a:tcPr>
+                </a:tc>
+                <a:tc>
+                  <a:txBody>
+                    <a:bodyPr/>
+                    <a:lstStyle/>
+                    <a:p>
+                      <a:pPr algn="ctr">
+                        <a:defRPr sz="1050">
+                          <a:solidFill>
+                            <a:srgbClr val="FFFFFF"/>
+                          </a:solidFill>
+                          <a:latin typeface="Segoe UI"/>
+                        </a:defRPr>
+                      </a:pPr>
+                      <a:r>
+                        <a:t>Declinado</a:t>
+                      </a:r>
+                    </a:p>
+                  </a:txBody>
+                  <a:tcPr anchor="ctr">
+                    <a:solidFill>
+                      <a:srgbClr val="162035"/>
+                    </a:solidFill>
+                  </a:tcPr>
+                </a:tc>
+              </a:tr>
+            </a:tbl>
+          </a:graphicData>
+        </a:graphic>
+      </p:graphicFrame>
+      <p:sp>
+        <p:nvSpPr>
+          <p:cNvPr id="8" name="Rounded Rectangle 7"/>
           <p:cNvSpPr/>
           <p:nvPr/>
         </p:nvSpPr>
         <p:spPr>
           <a:xfrm>
-            <a:off x="731520" y="2926080"/>
-            <a:ext cx="10698480" cy="3383280"/>
+            <a:off x="731520" y="5394960"/>
+            <a:ext cx="10728655" cy="1005840"/>
           </a:xfrm>
           <a:prstGeom prst="roundRect">
             <a:avLst/>
@@ -8701,9 +12277,9 @@
           <a:solidFill>
             <a:srgbClr val="162035"/>
           </a:solidFill>
-          <a:ln w="15240">
+          <a:ln w="17780">
             <a:solidFill>
-              <a:srgbClr val="263452"/>
+              <a:srgbClr val="334155"/>
             </a:solidFill>
           </a:ln>
         </p:spPr>
@@ -8731,14 +12307,14 @@
       </p:sp>
       <p:sp>
         <p:nvSpPr>
-          <p:cNvPr id="8" name="TextBox 7"/>
+          <p:cNvPr id="9" name="TextBox 8"/>
           <p:cNvSpPr txBox="1"/>
           <p:nvPr/>
         </p:nvSpPr>
         <p:spPr>
           <a:xfrm>
-            <a:off x="1005840" y="3108960"/>
-            <a:ext cx="10149840" cy="3017520"/>
+            <a:off x="914400" y="5440680"/>
+            <a:ext cx="10332720" cy="822960"/>
           </a:xfrm>
           <a:prstGeom prst="rect">
             <a:avLst/>
@@ -8752,58 +12328,29 @@
           <a:lstStyle/>
           <a:p>
             <a:pPr>
-              <a:defRPr sz="1700" b="1">
-                <a:solidFill>
-                  <a:srgbClr val="F8FAFC"/>
-                </a:solidFill>
+              <a:defRPr sz="1300" b="1">
+                <a:solidFill>
+                  <a:srgbClr val="34D399"/>
+                </a:solidFill>
+                <a:latin typeface="Segoe UI"/>
               </a:defRPr>
             </a:pPr>
             <a:r>
-              <a:t>Matriz de Tramos de Riesgo, Suscripción y Pricing Dinámico</a:t>
-            </a:r>
-          </a:p>
-          <a:p>
-            <a:br/>
-            <a:pPr>
-              <a:defRPr sz="1200">
-                <a:solidFill>
-                  <a:srgbClr val="F8FAFC"/>
-                </a:solidFill>
+              <a:t>Modelado de Pérdida Esperada IFRS 9:   EL = PD × LGD × EAD</a:t>
+            </a:r>
+          </a:p>
+          <a:p>
+            <a:pPr>
+              <a:defRPr sz="1100">
+                <a:solidFill>
+                  <a:srgbClr val="FFFFFF"/>
+                </a:solidFill>
+                <a:latin typeface="Segoe UI"/>
               </a:defRPr>
             </a:pPr>
             <a:r>
-              <a:t>Tramo               Score FICO      Prob. Default       Decisión de Suscripción          Límite Máx.       Spread Tasa</a:t>
-            </a:r>
-            <a:br/>
-            <a:r>
-              <a:t>──────────────────────────────────────────────────────────────────────────────────────────────────</a:t>
-            </a:r>
-            <a:br/>
-            <a:r>
-              <a:t>Tier A (Prime)       750 - 850         &lt; 4.5%          Aprobación Automática (STP)         125%             +150 bps (7.00%)</a:t>
-            </a:r>
-            <a:br/>
-            <a:r>
-              <a:t>Tier B (Bajo Riesgo) 670 - 749      4.5% - 12.0%       Aprobado Estándar (DTI &lt;= 28%)      100%             +250 bps (8.00%)</a:t>
-            </a:r>
-            <a:br/>
-            <a:r>
-              <a:t>Tier C (Near-Prime)  600 - 669     12.0% - 24.0%       Revisión Manual / Condicionado       80%             +450 bps (10.00%)</a:t>
-            </a:r>
-            <a:br/>
-            <a:r>
-              <a:t>Tier D (Subprime)    530 - 599     24.0% - 42.0%       Aprobación con Aval / Colateral      50%             +750 bps (13.00%)</a:t>
-            </a:r>
-            <a:br/>
-            <a:r>
-              <a:t>Tier E (Crítico)     300 - 529        &gt; 42.0%          Rechazo por Política de Riesgo        0%             Rechazado</a:t>
-            </a:r>
-            <a:br/>
-            <a:br/>
-            <a:r>
-              <a:t>Cálculo de Pérdida Esperada (IFRS 9):  EL = PD × LGD × EAD   (LGD no garantizada = 55%, LGD colateral = 25%)</a:t>
-            </a:r>
-            <a:br/>
+              <a:t>LGD no garantizada = 55% | LGD con garantía real = 25% | EAD = Saldo expuesto al default | Cálculo en tiempo real por solicitud.</a:t>
+            </a:r>
           </a:p>
         </p:txBody>
       </p:sp>
